--- a/src/files/CV-Mikita_Kanstantsinau(front-end).pptx
+++ b/src/files/CV-Mikita_Kanstantsinau(front-end).pptx
@@ -8,8 +8,8 @@
     <p:sldId id="256" r:id="rId6"/>
     <p:sldId id="257" r:id="rId7"/>
   </p:sldIdLst>
-  <p:sldSz cx="4191000" cy="6832600"/>
-  <p:notesSz cx="4191000" cy="6832600"/>
+  <p:sldSz cx="4203700" cy="6775450"/>
+  <p:notesSz cx="4203700" cy="6775450"/>
   <p:defaultTextStyle>
     <a:defPPr>
       <a:defRPr kern="0"/>
@@ -47,8 +47,8 @@
         </p:nvSpPr>
         <p:spPr>
           <a:xfrm>
-            <a:off x="314801" y="2118106"/>
-            <a:ext cx="3567747" cy="1434846"/>
+            <a:off x="314801" y="2074799"/>
+            <a:ext cx="3567747" cy="1405509"/>
           </a:xfrm>
           <a:prstGeom prst="rect">
             <a:avLst/>
@@ -84,8 +84,8 @@
         </p:nvSpPr>
         <p:spPr>
           <a:xfrm>
-            <a:off x="629602" y="3826256"/>
-            <a:ext cx="2938145" cy="1708150"/>
+            <a:off x="629602" y="3748024"/>
+            <a:ext cx="2938145" cy="1673225"/>
           </a:xfrm>
           <a:prstGeom prst="rect">
             <a:avLst/>
@@ -430,8 +430,8 @@
         </p:nvSpPr>
         <p:spPr>
           <a:xfrm>
-            <a:off x="209867" y="1571498"/>
-            <a:ext cx="1825847" cy="4509516"/>
+            <a:off x="209867" y="1539367"/>
+            <a:ext cx="1825847" cy="4417314"/>
           </a:xfrm>
           <a:prstGeom prst="rect">
             <a:avLst/>
@@ -461,8 +461,8 @@
         </p:nvSpPr>
         <p:spPr>
           <a:xfrm>
-            <a:off x="2161635" y="1571498"/>
-            <a:ext cx="1825847" cy="4509516"/>
+            <a:off x="2161635" y="1539367"/>
+            <a:ext cx="1825847" cy="4417314"/>
           </a:xfrm>
           <a:prstGeom prst="rect">
             <a:avLst/>
@@ -869,8 +869,8 @@
         </p:nvSpPr>
         <p:spPr>
           <a:xfrm>
-            <a:off x="1298257" y="202468"/>
-            <a:ext cx="2381885" cy="531144"/>
+            <a:off x="1298854" y="203053"/>
+            <a:ext cx="2381885" cy="531449"/>
           </a:xfrm>
           <a:prstGeom prst="rect">
             <a:avLst/>
@@ -906,7 +906,7 @@
         </p:nvSpPr>
         <p:spPr>
           <a:xfrm>
-            <a:off x="1421663" y="3290942"/>
+            <a:off x="1422247" y="3291527"/>
             <a:ext cx="2448560" cy="1672589"/>
           </a:xfrm>
           <a:prstGeom prst="rect">
@@ -943,8 +943,8 @@
         </p:nvSpPr>
         <p:spPr>
           <a:xfrm>
-            <a:off x="1427099" y="6354318"/>
-            <a:ext cx="1343152" cy="341630"/>
+            <a:off x="1427099" y="6224397"/>
+            <a:ext cx="1343152" cy="334645"/>
           </a:xfrm>
           <a:prstGeom prst="rect">
             <a:avLst/>
@@ -980,8 +980,8 @@
         </p:nvSpPr>
         <p:spPr>
           <a:xfrm>
-            <a:off x="209867" y="6354318"/>
-            <a:ext cx="965390" cy="341630"/>
+            <a:off x="209867" y="6224397"/>
+            <a:ext cx="965390" cy="334645"/>
           </a:xfrm>
           <a:prstGeom prst="rect">
             <a:avLst/>
@@ -1021,8 +1021,8 @@
         </p:nvSpPr>
         <p:spPr>
           <a:xfrm>
-            <a:off x="3022092" y="6354318"/>
-            <a:ext cx="965390" cy="341630"/>
+            <a:off x="3022092" y="6224397"/>
+            <a:ext cx="965390" cy="334645"/>
           </a:xfrm>
           <a:prstGeom prst="rect">
             <a:avLst/>
@@ -1229,8 +1229,8 @@
         </p:nvSpPr>
         <p:spPr>
           <a:xfrm>
-            <a:off x="0" y="0"/>
-            <a:ext cx="4196080" cy="6832600"/>
+            <a:off x="-2209" y="-1333"/>
+            <a:ext cx="4201160" cy="6695440"/>
           </a:xfrm>
           <a:custGeom>
             <a:avLst/>
@@ -1239,21 +1239,60 @@
             <a:cxnLst/>
             <a:rect l="l" t="t" r="r" b="b"/>
             <a:pathLst>
-              <a:path w="4196080" h="6832600">
+              <a:path w="4201160" h="6695440">
                 <a:moveTo>
-                  <a:pt x="4196066" y="0"/>
+                  <a:pt x="4198213" y="0"/>
                 </a:moveTo>
                 <a:lnTo>
-                  <a:pt x="0" y="0"/>
-                </a:lnTo>
-                <a:lnTo>
-                  <a:pt x="0" y="6832104"/>
-                </a:lnTo>
-                <a:lnTo>
-                  <a:pt x="4196066" y="6832104"/>
-                </a:lnTo>
-                <a:lnTo>
-                  <a:pt x="4196066" y="0"/>
+                  <a:pt x="2768" y="0"/>
+                </a:lnTo>
+                <a:lnTo>
+                  <a:pt x="1866" y="368"/>
+                </a:lnTo>
+                <a:lnTo>
+                  <a:pt x="381" y="1854"/>
+                </a:lnTo>
+                <a:lnTo>
+                  <a:pt x="0" y="2768"/>
+                </a:lnTo>
+                <a:lnTo>
+                  <a:pt x="0" y="6691007"/>
+                </a:lnTo>
+                <a:lnTo>
+                  <a:pt x="0" y="6692061"/>
+                </a:lnTo>
+                <a:lnTo>
+                  <a:pt x="381" y="6692963"/>
+                </a:lnTo>
+                <a:lnTo>
+                  <a:pt x="1866" y="6694462"/>
+                </a:lnTo>
+                <a:lnTo>
+                  <a:pt x="2768" y="6694830"/>
+                </a:lnTo>
+                <a:lnTo>
+                  <a:pt x="4198213" y="6694830"/>
+                </a:lnTo>
+                <a:lnTo>
+                  <a:pt x="4199115" y="6694462"/>
+                </a:lnTo>
+                <a:lnTo>
+                  <a:pt x="4200613" y="6692963"/>
+                </a:lnTo>
+                <a:lnTo>
+                  <a:pt x="4200982" y="6692061"/>
+                </a:lnTo>
+                <a:lnTo>
+                  <a:pt x="4200982" y="2768"/>
+                </a:lnTo>
+                <a:lnTo>
+                  <a:pt x="4200613" y="1854"/>
+                </a:lnTo>
+                <a:lnTo>
+                  <a:pt x="4199115" y="368"/>
+                </a:lnTo>
+                <a:lnTo>
+                  <a:pt x="4198213" y="0"/>
                 </a:lnTo>
                 <a:close/>
               </a:path>
@@ -1283,7 +1322,7 @@
         </p:blipFill>
         <p:spPr>
           <a:xfrm>
-            <a:off x="73571" y="4718146"/>
+            <a:off x="74167" y="4646467"/>
             <a:ext cx="87838" cy="87838"/>
           </a:xfrm>
           <a:prstGeom prst="rect">
@@ -1305,7 +1344,7 @@
         </p:blipFill>
         <p:spPr>
           <a:xfrm>
-            <a:off x="73571" y="4932014"/>
+            <a:off x="74167" y="4860335"/>
             <a:ext cx="87838" cy="87838"/>
           </a:xfrm>
           <a:prstGeom prst="rect">
@@ -1321,7 +1360,7 @@
         </p:nvSpPr>
         <p:spPr>
           <a:xfrm>
-            <a:off x="60871" y="4529771"/>
+            <a:off x="61468" y="4458091"/>
             <a:ext cx="932180" cy="583565"/>
           </a:xfrm>
           <a:prstGeom prst="rect">
@@ -1385,11 +1424,25 @@
               </a:spcBef>
             </a:pPr>
             <a:r>
+              <a:rPr dirty="0" sz="450" spc="-65">
+                <a:latin typeface="Verdana"/>
+                <a:cs typeface="Verdana"/>
+              </a:rPr>
+              <a:t>B1</a:t>
+            </a:r>
+            <a:r>
+              <a:rPr dirty="0" sz="450" spc="-40">
+                <a:latin typeface="Verdana"/>
+                <a:cs typeface="Verdana"/>
+              </a:rPr>
+              <a:t> </a:t>
+            </a:r>
+            <a:r>
               <a:rPr dirty="0" sz="450" spc="-10">
                 <a:latin typeface="Verdana"/>
                 <a:cs typeface="Verdana"/>
               </a:rPr>
-              <a:t>A2 (Pre-Intermediate)</a:t>
+              <a:t>(Intermediate)</a:t>
             </a:r>
             <a:endParaRPr sz="450">
               <a:latin typeface="Verdana"/>
@@ -1443,113 +1496,13 @@
       <p:sp>
         <p:nvSpPr>
           <p:cNvPr id="6" name="object 6" descr=""/>
-          <p:cNvSpPr txBox="1"/>
-          <p:nvPr/>
-        </p:nvSpPr>
-        <p:spPr>
-          <a:xfrm>
-            <a:off x="104790" y="5159916"/>
-            <a:ext cx="1044575" cy="154305"/>
-          </a:xfrm>
-          <a:prstGeom prst="rect">
-            <a:avLst/>
-          </a:prstGeom>
-        </p:spPr>
-        <p:txBody>
-          <a:bodyPr wrap="square" lIns="0" tIns="11430" rIns="0" bIns="0" rtlCol="0" vert="horz">
-            <a:spAutoFit/>
-          </a:bodyPr>
-          <a:lstStyle/>
-          <a:p>
-            <a:pPr marL="12700">
-              <a:lnSpc>
-                <a:spcPct val="100000"/>
-              </a:lnSpc>
-              <a:spcBef>
-                <a:spcPts val="90"/>
-              </a:spcBef>
-            </a:pPr>
-            <a:r>
-              <a:rPr dirty="0" sz="850" b="1">
-                <a:latin typeface="Tahoma"/>
-                <a:cs typeface="Tahoma"/>
-              </a:rPr>
-              <a:t>WORK</a:t>
-            </a:r>
-            <a:r>
-              <a:rPr dirty="0" sz="850" spc="195" b="1">
-                <a:latin typeface="Tahoma"/>
-                <a:cs typeface="Tahoma"/>
-              </a:rPr>
-              <a:t> </a:t>
-            </a:r>
-            <a:r>
-              <a:rPr dirty="0" sz="850" spc="-10" b="1">
-                <a:latin typeface="Tahoma"/>
-                <a:cs typeface="Tahoma"/>
-              </a:rPr>
-              <a:t>EXAMPLES</a:t>
-            </a:r>
-            <a:endParaRPr sz="850">
-              <a:latin typeface="Tahoma"/>
-              <a:cs typeface="Tahoma"/>
-            </a:endParaRPr>
-          </a:p>
-        </p:txBody>
-      </p:sp>
-      <p:sp>
-        <p:nvSpPr>
-          <p:cNvPr id="7" name="object 7" descr=""/>
-          <p:cNvSpPr txBox="1"/>
-          <p:nvPr/>
-        </p:nvSpPr>
-        <p:spPr>
-          <a:xfrm>
-            <a:off x="356851" y="5774790"/>
-            <a:ext cx="541020" cy="154305"/>
-          </a:xfrm>
-          <a:prstGeom prst="rect">
-            <a:avLst/>
-          </a:prstGeom>
-        </p:spPr>
-        <p:txBody>
-          <a:bodyPr wrap="square" lIns="0" tIns="11430" rIns="0" bIns="0" rtlCol="0" vert="horz">
-            <a:spAutoFit/>
-          </a:bodyPr>
-          <a:lstStyle/>
-          <a:p>
-            <a:pPr marL="12700">
-              <a:lnSpc>
-                <a:spcPct val="100000"/>
-              </a:lnSpc>
-              <a:spcBef>
-                <a:spcPts val="90"/>
-              </a:spcBef>
-            </a:pPr>
-            <a:r>
-              <a:rPr dirty="0" sz="850" spc="-10" b="1">
-                <a:latin typeface="Tahoma"/>
-                <a:cs typeface="Tahoma"/>
-              </a:rPr>
-              <a:t>AWARDS</a:t>
-            </a:r>
-            <a:endParaRPr sz="850">
-              <a:latin typeface="Tahoma"/>
-              <a:cs typeface="Tahoma"/>
-            </a:endParaRPr>
-          </a:p>
-        </p:txBody>
-      </p:sp>
-      <p:sp>
-        <p:nvSpPr>
-          <p:cNvPr id="8" name="object 8" descr=""/>
           <p:cNvSpPr/>
           <p:nvPr/>
         </p:nvSpPr>
         <p:spPr>
           <a:xfrm>
-            <a:off x="1257490" y="1048016"/>
-            <a:ext cx="4445" cy="5633720"/>
+            <a:off x="1258087" y="1048905"/>
+            <a:ext cx="4445" cy="5492115"/>
           </a:xfrm>
           <a:custGeom>
             <a:avLst/>
@@ -1558,7 +1511,7 @@
             <a:cxnLst/>
             <a:rect l="l" t="t" r="r" b="b"/>
             <a:pathLst>
-              <a:path w="4444" h="5633720">
+              <a:path w="4444" h="5492115">
                 <a:moveTo>
                   <a:pt x="3819" y="0"/>
                 </a:moveTo>
@@ -1566,10 +1519,10 @@
                   <a:pt x="0" y="0"/>
                 </a:lnTo>
                 <a:lnTo>
-                  <a:pt x="0" y="5633135"/>
-                </a:lnTo>
-                <a:lnTo>
-                  <a:pt x="3819" y="5633135"/>
+                  <a:pt x="0" y="5491822"/>
+                </a:lnTo>
+                <a:lnTo>
+                  <a:pt x="3819" y="5491822"/>
                 </a:lnTo>
                 <a:lnTo>
                   <a:pt x="3819" y="0"/>
@@ -1590,13 +1543,13 @@
       </p:sp>
       <p:sp>
         <p:nvSpPr>
-          <p:cNvPr id="9" name="object 9" descr=""/>
+          <p:cNvPr id="7" name="object 7" descr=""/>
           <p:cNvSpPr txBox="1"/>
           <p:nvPr/>
         </p:nvSpPr>
         <p:spPr>
           <a:xfrm>
-            <a:off x="1324990" y="972496"/>
+            <a:off x="1325587" y="973385"/>
             <a:ext cx="2780665" cy="1372235"/>
           </a:xfrm>
           <a:prstGeom prst="rect">
@@ -4006,14 +3959,14 @@
       </p:sp>
       <p:sp>
         <p:nvSpPr>
-          <p:cNvPr id="10" name="object 10" descr=""/>
+          <p:cNvPr id="8" name="object 8" descr=""/>
           <p:cNvSpPr txBox="1"/>
           <p:nvPr/>
         </p:nvSpPr>
         <p:spPr>
           <a:xfrm>
-            <a:off x="1324990" y="4907855"/>
-            <a:ext cx="1116965" cy="154305"/>
+            <a:off x="1325587" y="4908744"/>
+            <a:ext cx="1155065" cy="154305"/>
           </a:xfrm>
           <a:prstGeom prst="rect">
             <a:avLst/>
@@ -4052,7 +4005,7 @@
                 <a:latin typeface="Tahoma"/>
                 <a:cs typeface="Tahoma"/>
               </a:rPr>
-              <a:t>EXPIRIENCE</a:t>
+              <a:t>EXPERIENCE</a:t>
             </a:r>
             <a:endParaRPr sz="850">
               <a:latin typeface="Tahoma"/>
@@ -4063,13 +4016,13 @@
       </p:sp>
       <p:sp>
         <p:nvSpPr>
-          <p:cNvPr id="11" name="object 11" descr=""/>
+          <p:cNvPr id="9" name="object 9" descr=""/>
           <p:cNvSpPr txBox="1"/>
           <p:nvPr/>
         </p:nvSpPr>
         <p:spPr>
           <a:xfrm>
-            <a:off x="1324990" y="6110863"/>
+            <a:off x="1325587" y="6111752"/>
             <a:ext cx="822960" cy="429895"/>
           </a:xfrm>
           <a:prstGeom prst="rect">
@@ -4240,13 +4193,13 @@
       </p:sp>
       <p:sp>
         <p:nvSpPr>
-          <p:cNvPr id="12" name="object 12" descr=""/>
+          <p:cNvPr id="10" name="object 10" descr=""/>
           <p:cNvSpPr txBox="1"/>
           <p:nvPr/>
         </p:nvSpPr>
         <p:spPr>
           <a:xfrm>
-            <a:off x="2720864" y="6276035"/>
+            <a:off x="2721461" y="6276925"/>
             <a:ext cx="1116965" cy="264795"/>
           </a:xfrm>
           <a:prstGeom prst="rect">
@@ -4396,7 +4349,7 @@
       </p:sp>
       <p:pic>
         <p:nvPicPr>
-          <p:cNvPr id="13" name="object 13" descr=""/>
+          <p:cNvPr id="11" name="object 11" descr=""/>
           <p:cNvPicPr/>
           <p:nvPr/>
         </p:nvPicPr>
@@ -4408,7 +4361,7 @@
         </p:blipFill>
         <p:spPr>
           <a:xfrm>
-            <a:off x="271868" y="207674"/>
+            <a:off x="272465" y="208563"/>
             <a:ext cx="688044" cy="688044"/>
           </a:xfrm>
           <a:prstGeom prst="rect">
@@ -4418,7 +4371,7 @@
       </p:pic>
       <p:sp>
         <p:nvSpPr>
-          <p:cNvPr id="14" name="object 14"/>
+          <p:cNvPr id="12" name="object 12"/>
           <p:cNvSpPr txBox="1">
             <a:spLocks noGrp="1"/>
           </p:cNvSpPr>
@@ -4489,13 +4442,13 @@
       </p:sp>
       <p:sp>
         <p:nvSpPr>
-          <p:cNvPr id="15" name="object 15" descr=""/>
+          <p:cNvPr id="13" name="object 13" descr=""/>
           <p:cNvSpPr txBox="1"/>
           <p:nvPr/>
         </p:nvSpPr>
         <p:spPr>
           <a:xfrm>
-            <a:off x="1324990" y="775618"/>
+            <a:off x="1325587" y="776507"/>
             <a:ext cx="920115" cy="94615"/>
           </a:xfrm>
           <a:prstGeom prst="rect">
@@ -4742,27 +4695,27 @@
       </p:sp>
       <p:grpSp>
         <p:nvGrpSpPr>
-          <p:cNvPr id="16" name="object 16" descr=""/>
+          <p:cNvPr id="14" name="object 14" descr=""/>
           <p:cNvGrpSpPr/>
           <p:nvPr/>
         </p:nvGrpSpPr>
         <p:grpSpPr>
           <a:xfrm>
-            <a:off x="3735755" y="92938"/>
+            <a:off x="3736352" y="93827"/>
             <a:ext cx="321945" cy="153670"/>
-            <a:chOff x="3735755" y="92938"/>
+            <a:chOff x="3736352" y="93827"/>
             <a:chExt cx="321945" cy="153670"/>
           </a:xfrm>
         </p:grpSpPr>
         <p:sp>
           <p:nvSpPr>
-            <p:cNvPr id="17" name="object 17" descr=""/>
+            <p:cNvPr id="15" name="object 15" descr=""/>
             <p:cNvSpPr/>
             <p:nvPr/>
           </p:nvSpPr>
           <p:spPr>
             <a:xfrm>
-              <a:off x="3737978" y="95160"/>
+              <a:off x="3738575" y="96050"/>
               <a:ext cx="149225" cy="149225"/>
             </a:xfrm>
             <a:custGeom>
@@ -4849,13 +4802,13 @@
         </p:sp>
         <p:sp>
           <p:nvSpPr>
-            <p:cNvPr id="18" name="object 18" descr=""/>
+            <p:cNvPr id="16" name="object 16" descr=""/>
             <p:cNvSpPr/>
             <p:nvPr/>
           </p:nvSpPr>
           <p:spPr>
             <a:xfrm>
-              <a:off x="3737978" y="95160"/>
+              <a:off x="3738575" y="96050"/>
               <a:ext cx="317500" cy="149225"/>
             </a:xfrm>
             <a:custGeom>
@@ -5167,13 +5120,13 @@
       </p:grpSp>
       <p:sp>
         <p:nvSpPr>
-          <p:cNvPr id="19" name="object 19" descr=""/>
+          <p:cNvPr id="17" name="object 17" descr=""/>
           <p:cNvSpPr txBox="1"/>
           <p:nvPr/>
         </p:nvSpPr>
         <p:spPr>
           <a:xfrm>
-            <a:off x="3761562" y="122554"/>
+            <a:off x="3762159" y="123443"/>
             <a:ext cx="272415" cy="90170"/>
           </a:xfrm>
           <a:prstGeom prst="rect">
@@ -5230,14 +5183,14 @@
       </p:sp>
       <p:sp>
         <p:nvSpPr>
-          <p:cNvPr id="20" name="object 20" descr=""/>
+          <p:cNvPr id="18" name="object 18" descr=""/>
           <p:cNvSpPr txBox="1"/>
           <p:nvPr/>
         </p:nvSpPr>
         <p:spPr>
           <a:xfrm>
-            <a:off x="60882" y="1008583"/>
-            <a:ext cx="1079500" cy="794385"/>
+            <a:off x="61479" y="1009472"/>
+            <a:ext cx="1079500" cy="721360"/>
           </a:xfrm>
           <a:prstGeom prst="rect">
             <a:avLst/>
@@ -5270,7 +5223,7 @@
             </a:endParaRPr>
           </a:p>
           <a:p>
-            <a:pPr marL="12700">
+            <a:pPr algn="just" marL="12700">
               <a:lnSpc>
                 <a:spcPct val="100000"/>
               </a:lnSpc>
@@ -5279,29 +5232,29 @@
               </a:spcBef>
             </a:pPr>
             <a:r>
-              <a:rPr dirty="0" sz="450" b="1">
+              <a:rPr dirty="0" sz="450" spc="10" b="1">
                 <a:latin typeface="Tahoma"/>
                 <a:cs typeface="Tahoma"/>
               </a:rPr>
               <a:t>Address:</a:t>
             </a:r>
             <a:r>
-              <a:rPr dirty="0" sz="450" spc="220" b="1">
-                <a:latin typeface="Tahoma"/>
-                <a:cs typeface="Tahoma"/>
-              </a:rPr>
-              <a:t>  </a:t>
-            </a:r>
-            <a:r>
-              <a:rPr dirty="0" sz="450">
+              <a:rPr dirty="0" sz="450" spc="455" b="1">
+                <a:latin typeface="Tahoma"/>
+                <a:cs typeface="Tahoma"/>
+              </a:rPr>
+              <a:t> </a:t>
+            </a:r>
+            <a:r>
+              <a:rPr dirty="0" sz="450" spc="10">
                 <a:latin typeface="Verdana"/>
                 <a:cs typeface="Verdana"/>
                 <a:hlinkClick r:id="rId6"/>
               </a:rPr>
-              <a:t>Sulaberidze</a:t>
-            </a:r>
-            <a:r>
-              <a:rPr dirty="0" sz="450" spc="35">
+              <a:t>Batumi,</a:t>
+            </a:r>
+            <a:r>
+              <a:rPr dirty="0" sz="450" spc="-25">
                 <a:latin typeface="Verdana"/>
                 <a:cs typeface="Verdana"/>
                 <a:hlinkClick r:id="rId6"/>
@@ -5309,28 +5262,12 @@
               <a:t> </a:t>
             </a:r>
             <a:r>
-              <a:rPr dirty="0" sz="450" spc="-35">
+              <a:rPr dirty="0" sz="450" spc="-10">
                 <a:latin typeface="Verdana"/>
                 <a:cs typeface="Verdana"/>
                 <a:hlinkClick r:id="rId6"/>
               </a:rPr>
-              <a:t>st.,</a:t>
-            </a:r>
-            <a:r>
-              <a:rPr dirty="0" sz="450" spc="10">
-                <a:latin typeface="Verdana"/>
-                <a:cs typeface="Verdana"/>
-                <a:hlinkClick r:id="rId6"/>
-              </a:rPr>
-              <a:t> </a:t>
-            </a:r>
-            <a:r>
-              <a:rPr dirty="0" sz="450" spc="-10">
-                <a:latin typeface="Verdana"/>
-                <a:cs typeface="Verdana"/>
-                <a:hlinkClick r:id="rId6"/>
-              </a:rPr>
-              <a:t>Batumi,</a:t>
+              <a:t>Georgia</a:t>
             </a:r>
             <a:endParaRPr sz="450">
               <a:latin typeface="Verdana"/>
@@ -5338,52 +5275,27 @@
             </a:endParaRPr>
           </a:p>
           <a:p>
-            <a:pPr marL="350520">
-              <a:lnSpc>
-                <a:spcPct val="100000"/>
-              </a:lnSpc>
-              <a:spcBef>
-                <a:spcPts val="30"/>
-              </a:spcBef>
-            </a:pPr>
-            <a:r>
-              <a:rPr dirty="0" sz="450" spc="-10">
-                <a:latin typeface="Verdana"/>
-                <a:cs typeface="Verdana"/>
-                <a:hlinkClick r:id="rId6"/>
-              </a:rPr>
-              <a:t>Georgia</a:t>
-            </a:r>
-            <a:endParaRPr sz="450">
-              <a:latin typeface="Verdana"/>
-              <a:cs typeface="Verdana"/>
-            </a:endParaRPr>
-          </a:p>
-          <a:p>
-            <a:pPr marL="350520" marR="5080" indent="-338455">
+            <a:pPr algn="just" marL="350520" marR="5080" indent="-338455">
               <a:lnSpc>
                 <a:spcPct val="105800"/>
               </a:lnSpc>
               <a:spcBef>
                 <a:spcPts val="150"/>
               </a:spcBef>
-              <a:tabLst>
-                <a:tab pos="350520" algn="l"/>
-              </a:tabLst>
             </a:pPr>
             <a:r>
-              <a:rPr dirty="0" sz="450" spc="-10" b="1">
+              <a:rPr dirty="0" sz="450" b="1">
                 <a:latin typeface="Tahoma"/>
                 <a:cs typeface="Tahoma"/>
               </a:rPr>
               <a:t>Email:</a:t>
             </a:r>
             <a:r>
-              <a:rPr dirty="0" sz="450" b="1">
-                <a:latin typeface="Tahoma"/>
-                <a:cs typeface="Tahoma"/>
-              </a:rPr>
-              <a:t>	</a:t>
+              <a:rPr dirty="0" sz="450" spc="495" b="1">
+                <a:latin typeface="Tahoma"/>
+                <a:cs typeface="Tahoma"/>
+              </a:rPr>
+              <a:t>  </a:t>
             </a:r>
             <a:r>
               <a:rPr dirty="0" sz="450" spc="-10">
@@ -5533,7 +5445,7 @@
       </p:sp>
       <p:pic>
         <p:nvPicPr>
-          <p:cNvPr id="21" name="object 21" descr=""/>
+          <p:cNvPr id="19" name="object 19" descr=""/>
           <p:cNvPicPr/>
           <p:nvPr/>
         </p:nvPicPr>
@@ -5545,8 +5457,8 @@
         </p:blipFill>
         <p:spPr>
           <a:xfrm>
-            <a:off x="73571" y="2044801"/>
-            <a:ext cx="106933" cy="106933"/>
+            <a:off x="89839" y="1973224"/>
+            <a:ext cx="75603" cy="106730"/>
           </a:xfrm>
           <a:prstGeom prst="rect">
             <a:avLst/>
@@ -5555,13 +5467,13 @@
       </p:pic>
       <p:sp>
         <p:nvSpPr>
-          <p:cNvPr id="22" name="object 22" descr=""/>
+          <p:cNvPr id="20" name="object 20" descr=""/>
           <p:cNvSpPr txBox="1"/>
           <p:nvPr/>
         </p:nvSpPr>
         <p:spPr>
           <a:xfrm>
-            <a:off x="186905" y="1856423"/>
+            <a:off x="187502" y="1784743"/>
             <a:ext cx="827405" cy="285115"/>
           </a:xfrm>
           <a:prstGeom prst="rect">
@@ -5631,29 +5543,75 @@
           </a:p>
         </p:txBody>
       </p:sp>
+      <p:sp>
+        <p:nvSpPr>
+          <p:cNvPr id="21" name="object 21" descr=""/>
+          <p:cNvSpPr txBox="1"/>
+          <p:nvPr/>
+        </p:nvSpPr>
+        <p:spPr>
+          <a:xfrm>
+            <a:off x="1046797" y="1975692"/>
+            <a:ext cx="146685" cy="94615"/>
+          </a:xfrm>
+          <a:prstGeom prst="rect">
+            <a:avLst/>
+          </a:prstGeom>
+        </p:spPr>
+        <p:txBody>
+          <a:bodyPr wrap="square" lIns="0" tIns="12700" rIns="0" bIns="0" rtlCol="0" vert="horz">
+            <a:spAutoFit/>
+          </a:bodyPr>
+          <a:lstStyle/>
+          <a:p>
+            <a:pPr marL="12700">
+              <a:lnSpc>
+                <a:spcPct val="100000"/>
+              </a:lnSpc>
+              <a:spcBef>
+                <a:spcPts val="100"/>
+              </a:spcBef>
+            </a:pPr>
+            <a:r>
+              <a:rPr dirty="0" sz="450" spc="-30">
+                <a:solidFill>
+                  <a:srgbClr val="7F7F7F"/>
+                </a:solidFill>
+                <a:latin typeface="Verdana"/>
+                <a:cs typeface="Verdana"/>
+              </a:rPr>
+              <a:t>2yr+</a:t>
+            </a:r>
+            <a:endParaRPr sz="450">
+              <a:latin typeface="Verdana"/>
+              <a:cs typeface="Verdana"/>
+            </a:endParaRPr>
+          </a:p>
+        </p:txBody>
+      </p:sp>
       <p:grpSp>
         <p:nvGrpSpPr>
-          <p:cNvPr id="23" name="object 23" descr=""/>
+          <p:cNvPr id="22" name="object 22" descr=""/>
           <p:cNvGrpSpPr/>
           <p:nvPr/>
         </p:nvGrpSpPr>
         <p:grpSpPr>
           <a:xfrm>
-            <a:off x="73571" y="2174649"/>
+            <a:off x="74167" y="2102971"/>
             <a:ext cx="1108075" cy="156845"/>
-            <a:chOff x="73571" y="2174649"/>
+            <a:chOff x="74167" y="2102971"/>
             <a:chExt cx="1108075" cy="156845"/>
           </a:xfrm>
         </p:grpSpPr>
         <p:sp>
           <p:nvSpPr>
-            <p:cNvPr id="24" name="object 24" descr=""/>
+            <p:cNvPr id="23" name="object 23" descr=""/>
             <p:cNvSpPr/>
             <p:nvPr/>
           </p:nvSpPr>
           <p:spPr>
             <a:xfrm>
-              <a:off x="73571" y="2174649"/>
+              <a:off x="74167" y="2102971"/>
               <a:ext cx="1108075" cy="15875"/>
             </a:xfrm>
             <a:custGeom>
@@ -5695,13 +5653,13 @@
         </p:sp>
         <p:sp>
           <p:nvSpPr>
-            <p:cNvPr id="25" name="object 25" descr=""/>
+            <p:cNvPr id="24" name="object 24" descr=""/>
             <p:cNvSpPr/>
             <p:nvPr/>
           </p:nvSpPr>
           <p:spPr>
             <a:xfrm>
-              <a:off x="73571" y="2174649"/>
+              <a:off x="74167" y="2102971"/>
               <a:ext cx="1054100" cy="15875"/>
             </a:xfrm>
             <a:custGeom>
@@ -5743,7 +5701,7 @@
         </p:sp>
         <p:pic>
           <p:nvPicPr>
-            <p:cNvPr id="26" name="object 26" descr=""/>
+            <p:cNvPr id="25" name="object 25" descr=""/>
             <p:cNvPicPr/>
             <p:nvPr/>
           </p:nvPicPr>
@@ -5755,8 +5713,8 @@
           </p:blipFill>
           <p:spPr>
             <a:xfrm>
-              <a:off x="73571" y="2224290"/>
-              <a:ext cx="106933" cy="106933"/>
+              <a:off x="89547" y="2152726"/>
+              <a:ext cx="76187" cy="106718"/>
             </a:xfrm>
             <a:prstGeom prst="rect">
               <a:avLst/>
@@ -5766,13 +5724,13 @@
       </p:grpSp>
       <p:sp>
         <p:nvSpPr>
-          <p:cNvPr id="27" name="object 27" descr=""/>
+          <p:cNvPr id="26" name="object 26" descr=""/>
           <p:cNvSpPr txBox="1"/>
           <p:nvPr/>
         </p:nvSpPr>
         <p:spPr>
           <a:xfrm>
-            <a:off x="186905" y="2226872"/>
+            <a:off x="187502" y="2155193"/>
             <a:ext cx="690245" cy="94615"/>
           </a:xfrm>
           <a:prstGeom prst="rect">
@@ -5814,6 +5772,52 @@
           </a:p>
         </p:txBody>
       </p:sp>
+      <p:sp>
+        <p:nvSpPr>
+          <p:cNvPr id="27" name="object 27" descr=""/>
+          <p:cNvSpPr txBox="1"/>
+          <p:nvPr/>
+        </p:nvSpPr>
+        <p:spPr>
+          <a:xfrm>
+            <a:off x="1046797" y="2155193"/>
+            <a:ext cx="146685" cy="94615"/>
+          </a:xfrm>
+          <a:prstGeom prst="rect">
+            <a:avLst/>
+          </a:prstGeom>
+        </p:spPr>
+        <p:txBody>
+          <a:bodyPr wrap="square" lIns="0" tIns="12700" rIns="0" bIns="0" rtlCol="0" vert="horz">
+            <a:spAutoFit/>
+          </a:bodyPr>
+          <a:lstStyle/>
+          <a:p>
+            <a:pPr marL="12700">
+              <a:lnSpc>
+                <a:spcPct val="100000"/>
+              </a:lnSpc>
+              <a:spcBef>
+                <a:spcPts val="100"/>
+              </a:spcBef>
+            </a:pPr>
+            <a:r>
+              <a:rPr dirty="0" sz="450" spc="-30">
+                <a:solidFill>
+                  <a:srgbClr val="7F7F7F"/>
+                </a:solidFill>
+                <a:latin typeface="Verdana"/>
+                <a:cs typeface="Verdana"/>
+              </a:rPr>
+              <a:t>2yr+</a:t>
+            </a:r>
+            <a:endParaRPr sz="450">
+              <a:latin typeface="Verdana"/>
+              <a:cs typeface="Verdana"/>
+            </a:endParaRPr>
+          </a:p>
+        </p:txBody>
+      </p:sp>
       <p:grpSp>
         <p:nvGrpSpPr>
           <p:cNvPr id="28" name="object 28" descr=""/>
@@ -5822,10 +5826,10 @@
         </p:nvGrpSpPr>
         <p:grpSpPr>
           <a:xfrm>
-            <a:off x="73571" y="2354138"/>
-            <a:ext cx="1108075" cy="156845"/>
-            <a:chOff x="73571" y="2354138"/>
-            <a:chExt cx="1108075" cy="156845"/>
+            <a:off x="74167" y="2282472"/>
+            <a:ext cx="1108075" cy="150495"/>
+            <a:chOff x="74167" y="2282472"/>
+            <a:chExt cx="1108075" cy="150495"/>
           </a:xfrm>
         </p:grpSpPr>
         <p:sp>
@@ -5836,7 +5840,7 @@
           </p:nvSpPr>
           <p:spPr>
             <a:xfrm>
-              <a:off x="73571" y="2354138"/>
+              <a:off x="74167" y="2282472"/>
               <a:ext cx="1108075" cy="15875"/>
             </a:xfrm>
             <a:custGeom>
@@ -5884,7 +5888,7 @@
           </p:nvSpPr>
           <p:spPr>
             <a:xfrm>
-              <a:off x="73571" y="2354138"/>
+              <a:off x="74167" y="2282472"/>
               <a:ext cx="1054100" cy="15875"/>
             </a:xfrm>
             <a:custGeom>
@@ -5938,8 +5942,8 @@
           </p:blipFill>
           <p:spPr>
             <a:xfrm>
-              <a:off x="73571" y="2403792"/>
-              <a:ext cx="106933" cy="106933"/>
+              <a:off x="80860" y="2338793"/>
+              <a:ext cx="93560" cy="93573"/>
             </a:xfrm>
             <a:prstGeom prst="rect">
               <a:avLst/>
@@ -5955,7 +5959,7 @@
         </p:nvSpPr>
         <p:spPr>
           <a:xfrm>
-            <a:off x="186905" y="2406361"/>
+            <a:off x="187502" y="2334695"/>
             <a:ext cx="320040" cy="94615"/>
           </a:xfrm>
           <a:prstGeom prst="rect">
@@ -5990,29 +5994,75 @@
           </a:p>
         </p:txBody>
       </p:sp>
+      <p:sp>
+        <p:nvSpPr>
+          <p:cNvPr id="33" name="object 33" descr=""/>
+          <p:cNvSpPr txBox="1"/>
+          <p:nvPr/>
+        </p:nvSpPr>
+        <p:spPr>
+          <a:xfrm>
+            <a:off x="1020063" y="2334695"/>
+            <a:ext cx="173355" cy="94615"/>
+          </a:xfrm>
+          <a:prstGeom prst="rect">
+            <a:avLst/>
+          </a:prstGeom>
+        </p:spPr>
+        <p:txBody>
+          <a:bodyPr wrap="square" lIns="0" tIns="12700" rIns="0" bIns="0" rtlCol="0" vert="horz">
+            <a:spAutoFit/>
+          </a:bodyPr>
+          <a:lstStyle/>
+          <a:p>
+            <a:pPr marL="12700">
+              <a:lnSpc>
+                <a:spcPct val="100000"/>
+              </a:lnSpc>
+              <a:spcBef>
+                <a:spcPts val="100"/>
+              </a:spcBef>
+            </a:pPr>
+            <a:r>
+              <a:rPr dirty="0" sz="450" spc="-65">
+                <a:solidFill>
+                  <a:srgbClr val="7F7F7F"/>
+                </a:solidFill>
+                <a:latin typeface="Verdana"/>
+                <a:cs typeface="Verdana"/>
+              </a:rPr>
+              <a:t>1.5yr+</a:t>
+            </a:r>
+            <a:endParaRPr sz="450">
+              <a:latin typeface="Verdana"/>
+              <a:cs typeface="Verdana"/>
+            </a:endParaRPr>
+          </a:p>
+        </p:txBody>
+      </p:sp>
       <p:grpSp>
         <p:nvGrpSpPr>
-          <p:cNvPr id="33" name="object 33" descr=""/>
+          <p:cNvPr id="34" name="object 34" descr=""/>
           <p:cNvGrpSpPr/>
           <p:nvPr/>
         </p:nvGrpSpPr>
         <p:grpSpPr>
           <a:xfrm>
-            <a:off x="73571" y="2533635"/>
-            <a:ext cx="1108075" cy="156845"/>
-            <a:chOff x="73571" y="2533635"/>
-            <a:chExt cx="1108075" cy="156845"/>
+            <a:off x="74167" y="2461961"/>
+            <a:ext cx="1108075" cy="15875"/>
+            <a:chOff x="74167" y="2461961"/>
+            <a:chExt cx="1108075" cy="15875"/>
           </a:xfrm>
         </p:grpSpPr>
         <p:sp>
           <p:nvSpPr>
-            <p:cNvPr id="34" name="object 34" descr=""/>
+            <p:cNvPr id="35" name="object 35" descr=""/>
             <p:cNvSpPr/>
             <p:nvPr/>
           </p:nvSpPr>
           <p:spPr>
             <a:xfrm>
-              <a:off x="73571" y="2533635"/>
+              <a:off x="74167" y="2461961"/>
               <a:ext cx="1108075" cy="15875"/>
             </a:xfrm>
             <a:custGeom>
@@ -6030,10 +6080,10 @@
                     <a:pt x="0" y="0"/>
                   </a:lnTo>
                   <a:lnTo>
-                    <a:pt x="0" y="15279"/>
-                  </a:lnTo>
-                  <a:lnTo>
-                    <a:pt x="1107528" y="15279"/>
+                    <a:pt x="0" y="15274"/>
+                  </a:lnTo>
+                  <a:lnTo>
+                    <a:pt x="1107528" y="15274"/>
                   </a:lnTo>
                   <a:lnTo>
                     <a:pt x="1107528" y="0"/>
@@ -6054,13 +6104,13 @@
         </p:sp>
         <p:sp>
           <p:nvSpPr>
-            <p:cNvPr id="35" name="object 35" descr=""/>
+            <p:cNvPr id="36" name="object 36" descr=""/>
             <p:cNvSpPr/>
             <p:nvPr/>
           </p:nvSpPr>
           <p:spPr>
             <a:xfrm>
-              <a:off x="73571" y="2533635"/>
+              <a:off x="74167" y="2461961"/>
               <a:ext cx="943610" cy="15875"/>
             </a:xfrm>
             <a:custGeom>
@@ -6078,10 +6128,10 @@
                     <a:pt x="0" y="0"/>
                   </a:lnTo>
                   <a:lnTo>
-                    <a:pt x="0" y="15279"/>
-                  </a:lnTo>
-                  <a:lnTo>
-                    <a:pt x="943312" y="15279"/>
+                    <a:pt x="0" y="15274"/>
+                  </a:lnTo>
+                  <a:lnTo>
+                    <a:pt x="943312" y="15274"/>
                   </a:lnTo>
                   <a:lnTo>
                     <a:pt x="943312" y="0"/>
@@ -6100,28 +6150,6 @@
             <a:p/>
           </p:txBody>
         </p:sp>
-        <p:pic>
-          <p:nvPicPr>
-            <p:cNvPr id="36" name="object 36" descr=""/>
-            <p:cNvPicPr/>
-            <p:nvPr/>
-          </p:nvPicPr>
-          <p:blipFill>
-            <a:blip r:embed="rId14" cstate="print"/>
-            <a:stretch>
-              <a:fillRect/>
-            </a:stretch>
-          </p:blipFill>
-          <p:spPr>
-            <a:xfrm>
-              <a:off x="73571" y="2583281"/>
-              <a:ext cx="106933" cy="106933"/>
-            </a:xfrm>
-            <a:prstGeom prst="rect">
-              <a:avLst/>
-            </a:prstGeom>
-          </p:spPr>
-        </p:pic>
       </p:grpSp>
       <p:sp>
         <p:nvSpPr>
@@ -6131,7 +6159,7 @@
         </p:nvSpPr>
         <p:spPr>
           <a:xfrm>
-            <a:off x="186905" y="2585863"/>
+            <a:off x="187502" y="2514184"/>
             <a:ext cx="409575" cy="94615"/>
           </a:xfrm>
           <a:prstGeom prst="rect">
@@ -6180,149 +6208,16 @@
           </a:p>
         </p:txBody>
       </p:sp>
-      <p:grpSp>
-        <p:nvGrpSpPr>
-          <p:cNvPr id="38" name="object 38" descr=""/>
-          <p:cNvGrpSpPr/>
-          <p:nvPr/>
-        </p:nvGrpSpPr>
-        <p:grpSpPr>
-          <a:xfrm>
-            <a:off x="73571" y="2713124"/>
-            <a:ext cx="1108075" cy="156845"/>
-            <a:chOff x="73571" y="2713124"/>
-            <a:chExt cx="1108075" cy="156845"/>
-          </a:xfrm>
-        </p:grpSpPr>
-        <p:sp>
-          <p:nvSpPr>
-            <p:cNvPr id="39" name="object 39" descr=""/>
-            <p:cNvSpPr/>
-            <p:nvPr/>
-          </p:nvSpPr>
-          <p:spPr>
-            <a:xfrm>
-              <a:off x="73571" y="2713124"/>
-              <a:ext cx="1108075" cy="15875"/>
-            </a:xfrm>
-            <a:custGeom>
-              <a:avLst/>
-              <a:gdLst/>
-              <a:ahLst/>
-              <a:cxnLst/>
-              <a:rect l="l" t="t" r="r" b="b"/>
-              <a:pathLst>
-                <a:path w="1108075" h="15875">
-                  <a:moveTo>
-                    <a:pt x="1107528" y="0"/>
-                  </a:moveTo>
-                  <a:lnTo>
-                    <a:pt x="0" y="0"/>
-                  </a:lnTo>
-                  <a:lnTo>
-                    <a:pt x="0" y="15279"/>
-                  </a:lnTo>
-                  <a:lnTo>
-                    <a:pt x="1107528" y="15279"/>
-                  </a:lnTo>
-                  <a:lnTo>
-                    <a:pt x="1107528" y="0"/>
-                  </a:lnTo>
-                  <a:close/>
-                </a:path>
-              </a:pathLst>
-            </a:custGeom>
-            <a:solidFill>
-              <a:srgbClr val="DADADA"/>
-            </a:solidFill>
-          </p:spPr>
-          <p:txBody>
-            <a:bodyPr wrap="square" lIns="0" tIns="0" rIns="0" bIns="0" rtlCol="0"/>
-            <a:lstStyle/>
-            <a:p/>
-          </p:txBody>
-        </p:sp>
-        <p:sp>
-          <p:nvSpPr>
-            <p:cNvPr id="40" name="object 40" descr=""/>
-            <p:cNvSpPr/>
-            <p:nvPr/>
-          </p:nvSpPr>
-          <p:spPr>
-            <a:xfrm>
-              <a:off x="73571" y="2713124"/>
-              <a:ext cx="775335" cy="15875"/>
-            </a:xfrm>
-            <a:custGeom>
-              <a:avLst/>
-              <a:gdLst/>
-              <a:ahLst/>
-              <a:cxnLst/>
-              <a:rect l="l" t="t" r="r" b="b"/>
-              <a:pathLst>
-                <a:path w="775335" h="15875">
-                  <a:moveTo>
-                    <a:pt x="775270" y="0"/>
-                  </a:moveTo>
-                  <a:lnTo>
-                    <a:pt x="0" y="0"/>
-                  </a:lnTo>
-                  <a:lnTo>
-                    <a:pt x="0" y="15279"/>
-                  </a:lnTo>
-                  <a:lnTo>
-                    <a:pt x="775270" y="15279"/>
-                  </a:lnTo>
-                  <a:lnTo>
-                    <a:pt x="775270" y="0"/>
-                  </a:lnTo>
-                  <a:close/>
-                </a:path>
-              </a:pathLst>
-            </a:custGeom>
-            <a:solidFill>
-              <a:srgbClr val="000000"/>
-            </a:solidFill>
-          </p:spPr>
-          <p:txBody>
-            <a:bodyPr wrap="square" lIns="0" tIns="0" rIns="0" bIns="0" rtlCol="0"/>
-            <a:lstStyle/>
-            <a:p/>
-          </p:txBody>
-        </p:sp>
-        <p:pic>
-          <p:nvPicPr>
-            <p:cNvPr id="41" name="object 41" descr=""/>
-            <p:cNvPicPr/>
-            <p:nvPr/>
-          </p:nvPicPr>
-          <p:blipFill>
-            <a:blip r:embed="rId15" cstate="print"/>
-            <a:stretch>
-              <a:fillRect/>
-            </a:stretch>
-          </p:blipFill>
-          <p:spPr>
-            <a:xfrm>
-              <a:off x="73571" y="2762783"/>
-              <a:ext cx="106933" cy="106933"/>
-            </a:xfrm>
-            <a:prstGeom prst="rect">
-              <a:avLst/>
-            </a:prstGeom>
-          </p:spPr>
-        </p:pic>
-      </p:grpSp>
       <p:sp>
         <p:nvSpPr>
-          <p:cNvPr id="42" name="object 42" descr=""/>
+          <p:cNvPr id="38" name="object 38" descr=""/>
           <p:cNvSpPr txBox="1"/>
           <p:nvPr/>
         </p:nvSpPr>
         <p:spPr>
           <a:xfrm>
-            <a:off x="186905" y="2765352"/>
-            <a:ext cx="869315" cy="94615"/>
+            <a:off x="1000963" y="2514184"/>
+            <a:ext cx="192405" cy="94615"/>
           </a:xfrm>
           <a:prstGeom prst="rect">
             <a:avLst/>
@@ -6343,32 +6238,14 @@
               </a:spcBef>
             </a:pPr>
             <a:r>
-              <a:rPr dirty="0" sz="450">
-                <a:latin typeface="Verdana"/>
-                <a:cs typeface="Verdana"/>
-              </a:rPr>
-              <a:t>Angular </a:t>
-            </a:r>
-            <a:r>
-              <a:rPr dirty="0" sz="450" spc="-65">
-                <a:latin typeface="Verdana"/>
-                <a:cs typeface="Verdana"/>
-              </a:rPr>
-              <a:t>v.5</a:t>
-            </a:r>
-            <a:r>
-              <a:rPr dirty="0" sz="450" spc="-20">
-                <a:latin typeface="Verdana"/>
-                <a:cs typeface="Verdana"/>
-              </a:rPr>
-              <a:t> (basic </a:t>
-            </a:r>
-            <a:r>
-              <a:rPr dirty="0" sz="450" spc="-10">
-                <a:latin typeface="Verdana"/>
-                <a:cs typeface="Verdana"/>
-              </a:rPr>
-              <a:t>knowledge)</a:t>
+              <a:rPr dirty="0" sz="450" spc="-40">
+                <a:solidFill>
+                  <a:srgbClr val="7F7F7F"/>
+                </a:solidFill>
+                <a:latin typeface="Verdana"/>
+                <a:cs typeface="Verdana"/>
+              </a:rPr>
+              <a:t>0.5yr+</a:t>
             </a:r>
             <a:endParaRPr sz="450">
               <a:latin typeface="Verdana"/>
@@ -6379,27 +6256,27 @@
       </p:sp>
       <p:grpSp>
         <p:nvGrpSpPr>
-          <p:cNvPr id="43" name="object 43" descr=""/>
+          <p:cNvPr id="39" name="object 39" descr=""/>
           <p:cNvGrpSpPr/>
           <p:nvPr/>
         </p:nvGrpSpPr>
         <p:grpSpPr>
           <a:xfrm>
-            <a:off x="73571" y="2892626"/>
-            <a:ext cx="1108075" cy="15875"/>
-            <a:chOff x="73571" y="2892626"/>
-            <a:chExt cx="1108075" cy="15875"/>
+            <a:off x="74167" y="2515425"/>
+            <a:ext cx="1108075" cy="278765"/>
+            <a:chOff x="74167" y="2515425"/>
+            <a:chExt cx="1108075" cy="278765"/>
           </a:xfrm>
         </p:grpSpPr>
         <p:sp>
           <p:nvSpPr>
-            <p:cNvPr id="44" name="object 44" descr=""/>
+            <p:cNvPr id="40" name="object 40" descr=""/>
             <p:cNvSpPr/>
             <p:nvPr/>
           </p:nvSpPr>
           <p:spPr>
             <a:xfrm>
-              <a:off x="73571" y="2892626"/>
+              <a:off x="74167" y="2641463"/>
               <a:ext cx="1108075" cy="15875"/>
             </a:xfrm>
             <a:custGeom>
@@ -6417,10 +6294,268 @@
                     <a:pt x="0" y="0"/>
                   </a:lnTo>
                   <a:lnTo>
-                    <a:pt x="0" y="15279"/>
-                  </a:lnTo>
-                  <a:lnTo>
-                    <a:pt x="1107528" y="15279"/>
+                    <a:pt x="0" y="15274"/>
+                  </a:lnTo>
+                  <a:lnTo>
+                    <a:pt x="1107528" y="15274"/>
+                  </a:lnTo>
+                  <a:lnTo>
+                    <a:pt x="1107528" y="0"/>
+                  </a:lnTo>
+                  <a:close/>
+                </a:path>
+              </a:pathLst>
+            </a:custGeom>
+            <a:solidFill>
+              <a:srgbClr val="DADADA"/>
+            </a:solidFill>
+          </p:spPr>
+          <p:txBody>
+            <a:bodyPr wrap="square" lIns="0" tIns="0" rIns="0" bIns="0" rtlCol="0"/>
+            <a:lstStyle/>
+            <a:p/>
+          </p:txBody>
+        </p:sp>
+        <p:pic>
+          <p:nvPicPr>
+            <p:cNvPr id="41" name="object 41" descr=""/>
+            <p:cNvPicPr/>
+            <p:nvPr/>
+          </p:nvPicPr>
+          <p:blipFill>
+            <a:blip r:embed="rId14" cstate="print"/>
+            <a:stretch>
+              <a:fillRect/>
+            </a:stretch>
+          </p:blipFill>
+          <p:spPr>
+            <a:xfrm>
+              <a:off x="77990" y="2515425"/>
+              <a:ext cx="98717" cy="98717"/>
+            </a:xfrm>
+            <a:prstGeom prst="rect">
+              <a:avLst/>
+            </a:prstGeom>
+          </p:spPr>
+        </p:pic>
+        <p:sp>
+          <p:nvSpPr>
+            <p:cNvPr id="42" name="object 42" descr=""/>
+            <p:cNvSpPr/>
+            <p:nvPr/>
+          </p:nvSpPr>
+          <p:spPr>
+            <a:xfrm>
+              <a:off x="74167" y="2641463"/>
+              <a:ext cx="775335" cy="15875"/>
+            </a:xfrm>
+            <a:custGeom>
+              <a:avLst/>
+              <a:gdLst/>
+              <a:ahLst/>
+              <a:cxnLst/>
+              <a:rect l="l" t="t" r="r" b="b"/>
+              <a:pathLst>
+                <a:path w="775335" h="15875">
+                  <a:moveTo>
+                    <a:pt x="775270" y="0"/>
+                  </a:moveTo>
+                  <a:lnTo>
+                    <a:pt x="0" y="0"/>
+                  </a:lnTo>
+                  <a:lnTo>
+                    <a:pt x="0" y="15274"/>
+                  </a:lnTo>
+                  <a:lnTo>
+                    <a:pt x="775270" y="15274"/>
+                  </a:lnTo>
+                  <a:lnTo>
+                    <a:pt x="775270" y="0"/>
+                  </a:lnTo>
+                  <a:close/>
+                </a:path>
+              </a:pathLst>
+            </a:custGeom>
+            <a:solidFill>
+              <a:srgbClr val="000000"/>
+            </a:solidFill>
+          </p:spPr>
+          <p:txBody>
+            <a:bodyPr wrap="square" lIns="0" tIns="0" rIns="0" bIns="0" rtlCol="0"/>
+            <a:lstStyle/>
+            <a:p/>
+          </p:txBody>
+        </p:sp>
+        <p:pic>
+          <p:nvPicPr>
+            <p:cNvPr id="43" name="object 43" descr=""/>
+            <p:cNvPicPr/>
+            <p:nvPr/>
+          </p:nvPicPr>
+          <p:blipFill>
+            <a:blip r:embed="rId15" cstate="print"/>
+            <a:stretch>
+              <a:fillRect/>
+            </a:stretch>
+          </p:blipFill>
+          <p:spPr>
+            <a:xfrm>
+              <a:off x="83083" y="2695562"/>
+              <a:ext cx="89115" cy="98031"/>
+            </a:xfrm>
+            <a:prstGeom prst="rect">
+              <a:avLst/>
+            </a:prstGeom>
+          </p:spPr>
+        </p:pic>
+      </p:grpSp>
+      <p:sp>
+        <p:nvSpPr>
+          <p:cNvPr id="44" name="object 44" descr=""/>
+          <p:cNvSpPr txBox="1"/>
+          <p:nvPr/>
+        </p:nvSpPr>
+        <p:spPr>
+          <a:xfrm>
+            <a:off x="187502" y="2693686"/>
+            <a:ext cx="340995" cy="94615"/>
+          </a:xfrm>
+          <a:prstGeom prst="rect">
+            <a:avLst/>
+          </a:prstGeom>
+        </p:spPr>
+        <p:txBody>
+          <a:bodyPr wrap="square" lIns="0" tIns="12700" rIns="0" bIns="0" rtlCol="0" vert="horz">
+            <a:spAutoFit/>
+          </a:bodyPr>
+          <a:lstStyle/>
+          <a:p>
+            <a:pPr marL="12700">
+              <a:lnSpc>
+                <a:spcPct val="100000"/>
+              </a:lnSpc>
+              <a:spcBef>
+                <a:spcPts val="100"/>
+              </a:spcBef>
+            </a:pPr>
+            <a:r>
+              <a:rPr dirty="0" sz="450">
+                <a:latin typeface="Verdana"/>
+                <a:cs typeface="Verdana"/>
+              </a:rPr>
+              <a:t>Angular</a:t>
+            </a:r>
+            <a:r>
+              <a:rPr dirty="0" sz="450" spc="-10">
+                <a:latin typeface="Verdana"/>
+                <a:cs typeface="Verdana"/>
+              </a:rPr>
+              <a:t> </a:t>
+            </a:r>
+            <a:r>
+              <a:rPr dirty="0" sz="450" spc="-35">
+                <a:latin typeface="Verdana"/>
+                <a:cs typeface="Verdana"/>
+              </a:rPr>
+              <a:t>v.5</a:t>
+            </a:r>
+            <a:endParaRPr sz="450">
+              <a:latin typeface="Verdana"/>
+              <a:cs typeface="Verdana"/>
+            </a:endParaRPr>
+          </a:p>
+        </p:txBody>
+      </p:sp>
+      <p:sp>
+        <p:nvSpPr>
+          <p:cNvPr id="45" name="object 45" descr=""/>
+          <p:cNvSpPr txBox="1"/>
+          <p:nvPr/>
+        </p:nvSpPr>
+        <p:spPr>
+          <a:xfrm>
+            <a:off x="1000963" y="2693686"/>
+            <a:ext cx="192405" cy="94615"/>
+          </a:xfrm>
+          <a:prstGeom prst="rect">
+            <a:avLst/>
+          </a:prstGeom>
+        </p:spPr>
+        <p:txBody>
+          <a:bodyPr wrap="square" lIns="0" tIns="12700" rIns="0" bIns="0" rtlCol="0" vert="horz">
+            <a:spAutoFit/>
+          </a:bodyPr>
+          <a:lstStyle/>
+          <a:p>
+            <a:pPr marL="12700">
+              <a:lnSpc>
+                <a:spcPct val="100000"/>
+              </a:lnSpc>
+              <a:spcBef>
+                <a:spcPts val="100"/>
+              </a:spcBef>
+            </a:pPr>
+            <a:r>
+              <a:rPr dirty="0" sz="450" spc="-40">
+                <a:solidFill>
+                  <a:srgbClr val="7F7F7F"/>
+                </a:solidFill>
+                <a:latin typeface="Verdana"/>
+                <a:cs typeface="Verdana"/>
+              </a:rPr>
+              <a:t>0.5yr+</a:t>
+            </a:r>
+            <a:endParaRPr sz="450">
+              <a:latin typeface="Verdana"/>
+              <a:cs typeface="Verdana"/>
+            </a:endParaRPr>
+          </a:p>
+        </p:txBody>
+      </p:sp>
+      <p:grpSp>
+        <p:nvGrpSpPr>
+          <p:cNvPr id="46" name="object 46" descr=""/>
+          <p:cNvGrpSpPr/>
+          <p:nvPr/>
+        </p:nvGrpSpPr>
+        <p:grpSpPr>
+          <a:xfrm>
+            <a:off x="74167" y="2820952"/>
+            <a:ext cx="1108075" cy="15875"/>
+            <a:chOff x="74167" y="2820952"/>
+            <a:chExt cx="1108075" cy="15875"/>
+          </a:xfrm>
+        </p:grpSpPr>
+        <p:sp>
+          <p:nvSpPr>
+            <p:cNvPr id="47" name="object 47" descr=""/>
+            <p:cNvSpPr/>
+            <p:nvPr/>
+          </p:nvSpPr>
+          <p:spPr>
+            <a:xfrm>
+              <a:off x="74167" y="2820952"/>
+              <a:ext cx="1108075" cy="15875"/>
+            </a:xfrm>
+            <a:custGeom>
+              <a:avLst/>
+              <a:gdLst/>
+              <a:ahLst/>
+              <a:cxnLst/>
+              <a:rect l="l" t="t" r="r" b="b"/>
+              <a:pathLst>
+                <a:path w="1108075" h="15875">
+                  <a:moveTo>
+                    <a:pt x="1107528" y="0"/>
+                  </a:moveTo>
+                  <a:lnTo>
+                    <a:pt x="0" y="0"/>
+                  </a:lnTo>
+                  <a:lnTo>
+                    <a:pt x="0" y="15274"/>
+                  </a:lnTo>
+                  <a:lnTo>
+                    <a:pt x="1107528" y="15274"/>
                   </a:lnTo>
                   <a:lnTo>
                     <a:pt x="1107528" y="0"/>
@@ -6441,13 +6576,13 @@
         </p:sp>
         <p:sp>
           <p:nvSpPr>
-            <p:cNvPr id="45" name="object 45" descr=""/>
+            <p:cNvPr id="48" name="object 48" descr=""/>
             <p:cNvSpPr/>
             <p:nvPr/>
           </p:nvSpPr>
           <p:spPr>
             <a:xfrm>
-              <a:off x="73571" y="2892626"/>
+              <a:off x="74167" y="2820952"/>
               <a:ext cx="554355" cy="15875"/>
             </a:xfrm>
             <a:custGeom>
@@ -6465,10 +6600,10 @@
                     <a:pt x="0" y="0"/>
                   </a:lnTo>
                   <a:lnTo>
-                    <a:pt x="0" y="15279"/>
-                  </a:lnTo>
-                  <a:lnTo>
-                    <a:pt x="553764" y="15279"/>
+                    <a:pt x="0" y="15274"/>
+                  </a:lnTo>
+                  <a:lnTo>
+                    <a:pt x="553764" y="15274"/>
                   </a:lnTo>
                   <a:lnTo>
                     <a:pt x="553764" y="0"/>
@@ -6490,7 +6625,7 @@
       </p:grpSp>
       <p:pic>
         <p:nvPicPr>
-          <p:cNvPr id="46" name="object 46" descr=""/>
+          <p:cNvPr id="49" name="object 49" descr=""/>
           <p:cNvPicPr/>
           <p:nvPr/>
         </p:nvPicPr>
@@ -6502,8 +6637,8 @@
         </p:blipFill>
         <p:spPr>
           <a:xfrm>
-            <a:off x="73571" y="3175241"/>
-            <a:ext cx="106933" cy="106933"/>
+            <a:off x="78625" y="3103562"/>
+            <a:ext cx="96329" cy="106934"/>
           </a:xfrm>
           <a:prstGeom prst="rect">
             <a:avLst/>
@@ -6512,13 +6647,13 @@
       </p:pic>
       <p:sp>
         <p:nvSpPr>
-          <p:cNvPr id="47" name="object 47" descr=""/>
+          <p:cNvPr id="50" name="object 50" descr=""/>
           <p:cNvSpPr txBox="1"/>
           <p:nvPr/>
         </p:nvSpPr>
         <p:spPr>
           <a:xfrm>
-            <a:off x="186905" y="2986867"/>
+            <a:off x="187502" y="2915186"/>
             <a:ext cx="806450" cy="285115"/>
           </a:xfrm>
           <a:prstGeom prst="rect">
@@ -6602,149 +6737,16 @@
           </a:p>
         </p:txBody>
       </p:sp>
-      <p:grpSp>
-        <p:nvGrpSpPr>
-          <p:cNvPr id="48" name="object 48" descr=""/>
-          <p:cNvGrpSpPr/>
-          <p:nvPr/>
-        </p:nvGrpSpPr>
-        <p:grpSpPr>
-          <a:xfrm>
-            <a:off x="73571" y="3305089"/>
-            <a:ext cx="1108075" cy="156845"/>
-            <a:chOff x="73571" y="3305089"/>
-            <a:chExt cx="1108075" cy="156845"/>
-          </a:xfrm>
-        </p:grpSpPr>
-        <p:sp>
-          <p:nvSpPr>
-            <p:cNvPr id="49" name="object 49" descr=""/>
-            <p:cNvSpPr/>
-            <p:nvPr/>
-          </p:nvSpPr>
-          <p:spPr>
-            <a:xfrm>
-              <a:off x="73571" y="3305089"/>
-              <a:ext cx="1108075" cy="15875"/>
-            </a:xfrm>
-            <a:custGeom>
-              <a:avLst/>
-              <a:gdLst/>
-              <a:ahLst/>
-              <a:cxnLst/>
-              <a:rect l="l" t="t" r="r" b="b"/>
-              <a:pathLst>
-                <a:path w="1108075" h="15875">
-                  <a:moveTo>
-                    <a:pt x="1107528" y="0"/>
-                  </a:moveTo>
-                  <a:lnTo>
-                    <a:pt x="0" y="0"/>
-                  </a:lnTo>
-                  <a:lnTo>
-                    <a:pt x="0" y="15274"/>
-                  </a:lnTo>
-                  <a:lnTo>
-                    <a:pt x="1107528" y="15274"/>
-                  </a:lnTo>
-                  <a:lnTo>
-                    <a:pt x="1107528" y="0"/>
-                  </a:lnTo>
-                  <a:close/>
-                </a:path>
-              </a:pathLst>
-            </a:custGeom>
-            <a:solidFill>
-              <a:srgbClr val="DADADA"/>
-            </a:solidFill>
-          </p:spPr>
-          <p:txBody>
-            <a:bodyPr wrap="square" lIns="0" tIns="0" rIns="0" bIns="0" rtlCol="0"/>
-            <a:lstStyle/>
-            <a:p/>
-          </p:txBody>
-        </p:sp>
-        <p:sp>
-          <p:nvSpPr>
-            <p:cNvPr id="50" name="object 50" descr=""/>
-            <p:cNvSpPr/>
-            <p:nvPr/>
-          </p:nvSpPr>
-          <p:spPr>
-            <a:xfrm>
-              <a:off x="73571" y="3305089"/>
-              <a:ext cx="833119" cy="15875"/>
-            </a:xfrm>
-            <a:custGeom>
-              <a:avLst/>
-              <a:gdLst/>
-              <a:ahLst/>
-              <a:cxnLst/>
-              <a:rect l="l" t="t" r="r" b="b"/>
-              <a:pathLst>
-                <a:path w="833119" h="15875">
-                  <a:moveTo>
-                    <a:pt x="832554" y="0"/>
-                  </a:moveTo>
-                  <a:lnTo>
-                    <a:pt x="0" y="0"/>
-                  </a:lnTo>
-                  <a:lnTo>
-                    <a:pt x="0" y="15274"/>
-                  </a:lnTo>
-                  <a:lnTo>
-                    <a:pt x="832554" y="15274"/>
-                  </a:lnTo>
-                  <a:lnTo>
-                    <a:pt x="832554" y="0"/>
-                  </a:lnTo>
-                  <a:close/>
-                </a:path>
-              </a:pathLst>
-            </a:custGeom>
-            <a:solidFill>
-              <a:srgbClr val="000000"/>
-            </a:solidFill>
-          </p:spPr>
-          <p:txBody>
-            <a:bodyPr wrap="square" lIns="0" tIns="0" rIns="0" bIns="0" rtlCol="0"/>
-            <a:lstStyle/>
-            <a:p/>
-          </p:txBody>
-        </p:sp>
-        <p:pic>
-          <p:nvPicPr>
-            <p:cNvPr id="51" name="object 51" descr=""/>
-            <p:cNvPicPr/>
-            <p:nvPr/>
-          </p:nvPicPr>
-          <p:blipFill>
-            <a:blip r:embed="rId17" cstate="print"/>
-            <a:stretch>
-              <a:fillRect/>
-            </a:stretch>
-          </p:blipFill>
-          <p:spPr>
-            <a:xfrm>
-              <a:off x="73571" y="3354743"/>
-              <a:ext cx="106933" cy="106933"/>
-            </a:xfrm>
-            <a:prstGeom prst="rect">
-              <a:avLst/>
-            </a:prstGeom>
-          </p:spPr>
-        </p:pic>
-      </p:grpSp>
       <p:sp>
         <p:nvSpPr>
-          <p:cNvPr id="52" name="object 52" descr=""/>
+          <p:cNvPr id="51" name="object 51" descr=""/>
           <p:cNvSpPr txBox="1"/>
           <p:nvPr/>
         </p:nvSpPr>
         <p:spPr>
           <a:xfrm>
-            <a:off x="186905" y="3357312"/>
-            <a:ext cx="582930" cy="94615"/>
+            <a:off x="1062075" y="3106144"/>
+            <a:ext cx="131445" cy="94615"/>
           </a:xfrm>
           <a:prstGeom prst="rect">
             <a:avLst/>
@@ -6765,39 +6767,14 @@
               </a:spcBef>
             </a:pPr>
             <a:r>
-              <a:rPr dirty="0" sz="450" spc="-20">
-                <a:latin typeface="Verdana"/>
-                <a:cs typeface="Verdana"/>
-              </a:rPr>
-              <a:t>Version</a:t>
-            </a:r>
-            <a:r>
-              <a:rPr dirty="0" sz="450" spc="5">
-                <a:latin typeface="Verdana"/>
-                <a:cs typeface="Verdana"/>
-              </a:rPr>
-              <a:t> </a:t>
-            </a:r>
-            <a:r>
-              <a:rPr dirty="0" sz="450" spc="-10">
-                <a:latin typeface="Verdana"/>
-                <a:cs typeface="Verdana"/>
-              </a:rPr>
-              <a:t>control</a:t>
-            </a:r>
-            <a:r>
-              <a:rPr dirty="0" sz="450" spc="10">
-                <a:latin typeface="Verdana"/>
-                <a:cs typeface="Verdana"/>
-              </a:rPr>
-              <a:t> </a:t>
-            </a:r>
-            <a:r>
-              <a:rPr dirty="0" sz="450" spc="-10">
-                <a:latin typeface="Verdana"/>
-                <a:cs typeface="Verdana"/>
-              </a:rPr>
-              <a:t>(Git)</a:t>
+              <a:rPr dirty="0" sz="450" spc="-60">
+                <a:solidFill>
+                  <a:srgbClr val="7F7F7F"/>
+                </a:solidFill>
+                <a:latin typeface="Verdana"/>
+                <a:cs typeface="Verdana"/>
+              </a:rPr>
+              <a:t>1yr+</a:t>
             </a:r>
             <a:endParaRPr sz="450">
               <a:latin typeface="Verdana"/>
@@ -6808,27 +6785,27 @@
       </p:sp>
       <p:grpSp>
         <p:nvGrpSpPr>
-          <p:cNvPr id="53" name="object 53" descr=""/>
+          <p:cNvPr id="52" name="object 52" descr=""/>
           <p:cNvGrpSpPr/>
           <p:nvPr/>
         </p:nvGrpSpPr>
         <p:grpSpPr>
           <a:xfrm>
-            <a:off x="73571" y="3484591"/>
-            <a:ext cx="1108075" cy="156845"/>
-            <a:chOff x="73571" y="3484591"/>
-            <a:chExt cx="1108075" cy="156845"/>
+            <a:off x="74167" y="3233418"/>
+            <a:ext cx="1108075" cy="328930"/>
+            <a:chOff x="74167" y="3233418"/>
+            <a:chExt cx="1108075" cy="328930"/>
           </a:xfrm>
         </p:grpSpPr>
         <p:sp>
           <p:nvSpPr>
-            <p:cNvPr id="54" name="object 54" descr=""/>
+            <p:cNvPr id="53" name="object 53" descr=""/>
             <p:cNvSpPr/>
             <p:nvPr/>
           </p:nvSpPr>
           <p:spPr>
             <a:xfrm>
-              <a:off x="73571" y="3484591"/>
+              <a:off x="74167" y="3233418"/>
               <a:ext cx="1108075" cy="15875"/>
             </a:xfrm>
             <a:custGeom>
@@ -6846,10 +6823,10 @@
                     <a:pt x="0" y="0"/>
                   </a:lnTo>
                   <a:lnTo>
-                    <a:pt x="0" y="15274"/>
-                  </a:lnTo>
-                  <a:lnTo>
-                    <a:pt x="1107528" y="15274"/>
+                    <a:pt x="0" y="15279"/>
+                  </a:lnTo>
+                  <a:lnTo>
+                    <a:pt x="1107528" y="15279"/>
                   </a:lnTo>
                   <a:lnTo>
                     <a:pt x="1107528" y="0"/>
@@ -6870,14 +6847,14 @@
         </p:sp>
         <p:sp>
           <p:nvSpPr>
-            <p:cNvPr id="55" name="object 55" descr=""/>
+            <p:cNvPr id="54" name="object 54" descr=""/>
             <p:cNvSpPr/>
             <p:nvPr/>
           </p:nvSpPr>
           <p:spPr>
             <a:xfrm>
-              <a:off x="73571" y="3484591"/>
-              <a:ext cx="996950" cy="15875"/>
+              <a:off x="74167" y="3233418"/>
+              <a:ext cx="833119" cy="15875"/>
             </a:xfrm>
             <a:custGeom>
               <a:avLst/>
@@ -6886,21 +6863,21 @@
               <a:cxnLst/>
               <a:rect l="l" t="t" r="r" b="b"/>
               <a:pathLst>
-                <a:path w="996950" h="15875">
+                <a:path w="833119" h="15875">
                   <a:moveTo>
-                    <a:pt x="996776" y="0"/>
+                    <a:pt x="832554" y="0"/>
                   </a:moveTo>
                   <a:lnTo>
                     <a:pt x="0" y="0"/>
                   </a:lnTo>
                   <a:lnTo>
-                    <a:pt x="0" y="15274"/>
-                  </a:lnTo>
-                  <a:lnTo>
-                    <a:pt x="996776" y="15274"/>
-                  </a:lnTo>
-                  <a:lnTo>
-                    <a:pt x="996776" y="0"/>
+                    <a:pt x="0" y="15279"/>
+                  </a:lnTo>
+                  <a:lnTo>
+                    <a:pt x="832554" y="15279"/>
+                  </a:lnTo>
+                  <a:lnTo>
+                    <a:pt x="832554" y="0"/>
                   </a:lnTo>
                   <a:close/>
                 </a:path>
@@ -6918,7 +6895,125 @@
         </p:sp>
         <p:pic>
           <p:nvPicPr>
+            <p:cNvPr id="55" name="object 55" descr=""/>
+            <p:cNvPicPr/>
+            <p:nvPr/>
+          </p:nvPicPr>
+          <p:blipFill>
+            <a:blip r:embed="rId17" cstate="print"/>
+            <a:stretch>
+              <a:fillRect/>
+            </a:stretch>
+          </p:blipFill>
+          <p:spPr>
+            <a:xfrm>
+              <a:off x="80200" y="3289096"/>
+              <a:ext cx="94869" cy="94869"/>
+            </a:xfrm>
+            <a:prstGeom prst="rect">
+              <a:avLst/>
+            </a:prstGeom>
+          </p:spPr>
+        </p:pic>
+        <p:sp>
+          <p:nvSpPr>
             <p:cNvPr id="56" name="object 56" descr=""/>
+            <p:cNvSpPr/>
+            <p:nvPr/>
+          </p:nvSpPr>
+          <p:spPr>
+            <a:xfrm>
+              <a:off x="74167" y="3412912"/>
+              <a:ext cx="1108075" cy="15875"/>
+            </a:xfrm>
+            <a:custGeom>
+              <a:avLst/>
+              <a:gdLst/>
+              <a:ahLst/>
+              <a:cxnLst/>
+              <a:rect l="l" t="t" r="r" b="b"/>
+              <a:pathLst>
+                <a:path w="1108075" h="15875">
+                  <a:moveTo>
+                    <a:pt x="1107528" y="0"/>
+                  </a:moveTo>
+                  <a:lnTo>
+                    <a:pt x="0" y="0"/>
+                  </a:lnTo>
+                  <a:lnTo>
+                    <a:pt x="0" y="15274"/>
+                  </a:lnTo>
+                  <a:lnTo>
+                    <a:pt x="1107528" y="15274"/>
+                  </a:lnTo>
+                  <a:lnTo>
+                    <a:pt x="1107528" y="0"/>
+                  </a:lnTo>
+                  <a:close/>
+                </a:path>
+              </a:pathLst>
+            </a:custGeom>
+            <a:solidFill>
+              <a:srgbClr val="DADADA"/>
+            </a:solidFill>
+          </p:spPr>
+          <p:txBody>
+            <a:bodyPr wrap="square" lIns="0" tIns="0" rIns="0" bIns="0" rtlCol="0"/>
+            <a:lstStyle/>
+            <a:p/>
+          </p:txBody>
+        </p:sp>
+        <p:sp>
+          <p:nvSpPr>
+            <p:cNvPr id="57" name="object 57" descr=""/>
+            <p:cNvSpPr/>
+            <p:nvPr/>
+          </p:nvSpPr>
+          <p:spPr>
+            <a:xfrm>
+              <a:off x="74167" y="3412912"/>
+              <a:ext cx="996950" cy="15875"/>
+            </a:xfrm>
+            <a:custGeom>
+              <a:avLst/>
+              <a:gdLst/>
+              <a:ahLst/>
+              <a:cxnLst/>
+              <a:rect l="l" t="t" r="r" b="b"/>
+              <a:pathLst>
+                <a:path w="996950" h="15875">
+                  <a:moveTo>
+                    <a:pt x="996776" y="0"/>
+                  </a:moveTo>
+                  <a:lnTo>
+                    <a:pt x="0" y="0"/>
+                  </a:lnTo>
+                  <a:lnTo>
+                    <a:pt x="0" y="15274"/>
+                  </a:lnTo>
+                  <a:lnTo>
+                    <a:pt x="996776" y="15274"/>
+                  </a:lnTo>
+                  <a:lnTo>
+                    <a:pt x="996776" y="0"/>
+                  </a:lnTo>
+                  <a:close/>
+                </a:path>
+              </a:pathLst>
+            </a:custGeom>
+            <a:solidFill>
+              <a:srgbClr val="000000"/>
+            </a:solidFill>
+          </p:spPr>
+          <p:txBody>
+            <a:bodyPr wrap="square" lIns="0" tIns="0" rIns="0" bIns="0" rtlCol="0"/>
+            <a:lstStyle/>
+            <a:p/>
+          </p:txBody>
+        </p:sp>
+        <p:pic>
+          <p:nvPicPr>
+            <p:cNvPr id="58" name="object 58" descr=""/>
             <p:cNvPicPr/>
             <p:nvPr/>
           </p:nvPicPr>
@@ -6930,8 +7025,8 @@
           </p:blipFill>
           <p:spPr>
             <a:xfrm>
-              <a:off x="73571" y="3534232"/>
-              <a:ext cx="106933" cy="106933"/>
+              <a:off x="81813" y="3470198"/>
+              <a:ext cx="91655" cy="91655"/>
             </a:xfrm>
             <a:prstGeom prst="rect">
               <a:avLst/>
@@ -6941,14 +7036,14 @@
       </p:grpSp>
       <p:sp>
         <p:nvSpPr>
-          <p:cNvPr id="57" name="object 57" descr=""/>
+          <p:cNvPr id="59" name="object 59" descr=""/>
           <p:cNvSpPr txBox="1"/>
           <p:nvPr/>
         </p:nvSpPr>
         <p:spPr>
           <a:xfrm>
-            <a:off x="186905" y="3536813"/>
-            <a:ext cx="819785" cy="94615"/>
+            <a:off x="187502" y="3285646"/>
+            <a:ext cx="1005840" cy="273685"/>
           </a:xfrm>
           <a:prstGeom prst="rect">
             <a:avLst/>
@@ -6967,48 +7062,152 @@
               <a:spcBef>
                 <a:spcPts val="100"/>
               </a:spcBef>
+              <a:tabLst>
+                <a:tab pos="845185" algn="l"/>
+              </a:tabLst>
             </a:pPr>
             <a:r>
+              <a:rPr dirty="0" sz="450" spc="-20">
+                <a:latin typeface="Verdana"/>
+                <a:cs typeface="Verdana"/>
+              </a:rPr>
+              <a:t>Version</a:t>
+            </a:r>
+            <a:r>
+              <a:rPr dirty="0" sz="450" spc="5">
+                <a:latin typeface="Verdana"/>
+                <a:cs typeface="Verdana"/>
+              </a:rPr>
+              <a:t> </a:t>
+            </a:r>
+            <a:r>
               <a:rPr dirty="0" sz="450" spc="-10">
                 <a:latin typeface="Verdana"/>
                 <a:cs typeface="Verdana"/>
               </a:rPr>
+              <a:t>control</a:t>
+            </a:r>
+            <a:r>
+              <a:rPr dirty="0" sz="450" spc="10">
+                <a:latin typeface="Verdana"/>
+                <a:cs typeface="Verdana"/>
+              </a:rPr>
+              <a:t> </a:t>
+            </a:r>
+            <a:r>
+              <a:rPr dirty="0" sz="450" spc="-10">
+                <a:latin typeface="Verdana"/>
+                <a:cs typeface="Verdana"/>
+              </a:rPr>
+              <a:t>(Git)</a:t>
+            </a:r>
+            <a:r>
+              <a:rPr dirty="0" sz="450">
+                <a:latin typeface="Verdana"/>
+                <a:cs typeface="Verdana"/>
+              </a:rPr>
+              <a:t>	</a:t>
+            </a:r>
+            <a:r>
+              <a:rPr dirty="0" sz="450" spc="-65">
+                <a:solidFill>
+                  <a:srgbClr val="7F7F7F"/>
+                </a:solidFill>
+                <a:latin typeface="Verdana"/>
+                <a:cs typeface="Verdana"/>
+              </a:rPr>
+              <a:t>1.5yr+</a:t>
+            </a:r>
+            <a:endParaRPr sz="450">
+              <a:latin typeface="Verdana"/>
+              <a:cs typeface="Verdana"/>
+            </a:endParaRPr>
+          </a:p>
+          <a:p>
+            <a:pPr>
+              <a:lnSpc>
+                <a:spcPct val="100000"/>
+              </a:lnSpc>
+              <a:spcBef>
+                <a:spcPts val="325"/>
+              </a:spcBef>
+            </a:pPr>
+            <a:endParaRPr sz="450">
+              <a:latin typeface="Verdana"/>
+              <a:cs typeface="Verdana"/>
+            </a:endParaRPr>
+          </a:p>
+          <a:p>
+            <a:pPr marL="12700">
+              <a:lnSpc>
+                <a:spcPct val="100000"/>
+              </a:lnSpc>
+            </a:pPr>
+            <a:r>
+              <a:rPr dirty="0" sz="450" spc="-10">
+                <a:latin typeface="Verdana"/>
+                <a:cs typeface="Verdana"/>
+              </a:rPr>
               <a:t>Graphics</a:t>
             </a:r>
             <a:r>
+              <a:rPr dirty="0" sz="450" spc="-35">
+                <a:latin typeface="Verdana"/>
+                <a:cs typeface="Verdana"/>
+              </a:rPr>
+              <a:t> </a:t>
+            </a:r>
+            <a:r>
+              <a:rPr dirty="0" sz="450" spc="-10">
+                <a:latin typeface="Verdana"/>
+                <a:cs typeface="Verdana"/>
+              </a:rPr>
+              <a:t>editors</a:t>
+            </a:r>
+            <a:r>
+              <a:rPr dirty="0" sz="450" spc="-35">
+                <a:latin typeface="Verdana"/>
+                <a:cs typeface="Verdana"/>
+              </a:rPr>
+              <a:t> </a:t>
+            </a:r>
+            <a:r>
+              <a:rPr dirty="0" sz="450" spc="-30">
+                <a:latin typeface="Verdana"/>
+                <a:cs typeface="Verdana"/>
+              </a:rPr>
+              <a:t>(Ps,</a:t>
+            </a:r>
+            <a:r>
+              <a:rPr dirty="0" sz="450" spc="-25">
+                <a:latin typeface="Verdana"/>
+                <a:cs typeface="Verdana"/>
+              </a:rPr>
+              <a:t> </a:t>
+            </a:r>
+            <a:r>
+              <a:rPr dirty="0" sz="450">
+                <a:latin typeface="Verdana"/>
+                <a:cs typeface="Verdana"/>
+              </a:rPr>
+              <a:t>Figma)</a:t>
+            </a:r>
+            <a:r>
+              <a:rPr dirty="0" sz="450" spc="440">
+                <a:latin typeface="Verdana"/>
+                <a:cs typeface="Verdana"/>
+              </a:rPr>
+              <a:t> </a:t>
+            </a:r>
+            <a:r>
               <a:rPr dirty="0" sz="450" spc="-20">
-                <a:latin typeface="Verdana"/>
-                <a:cs typeface="Verdana"/>
-              </a:rPr>
-              <a:t> </a:t>
-            </a:r>
-            <a:r>
-              <a:rPr dirty="0" sz="450" spc="-10">
-                <a:latin typeface="Verdana"/>
-                <a:cs typeface="Verdana"/>
-              </a:rPr>
-              <a:t>editors</a:t>
-            </a:r>
-            <a:r>
-              <a:rPr dirty="0" sz="450" spc="-15">
-                <a:latin typeface="Verdana"/>
-                <a:cs typeface="Verdana"/>
-              </a:rPr>
-              <a:t> </a:t>
-            </a:r>
-            <a:r>
-              <a:rPr dirty="0" sz="450" spc="-30">
-                <a:latin typeface="Verdana"/>
-                <a:cs typeface="Verdana"/>
-              </a:rPr>
-              <a:t>(Ps,</a:t>
-            </a:r>
-            <a:r>
-              <a:rPr dirty="0" sz="450" spc="-10">
-                <a:latin typeface="Verdana"/>
-                <a:cs typeface="Verdana"/>
-              </a:rPr>
-              <a:t> Figma)</a:t>
+                <a:solidFill>
+                  <a:srgbClr val="7F7F7F"/>
+                </a:solidFill>
+                <a:latin typeface="Verdana"/>
+                <a:cs typeface="Verdana"/>
+              </a:rPr>
+              <a:t>2yr+</a:t>
             </a:r>
             <a:endParaRPr sz="450">
               <a:latin typeface="Verdana"/>
@@ -7019,27 +7218,27 @@
       </p:sp>
       <p:grpSp>
         <p:nvGrpSpPr>
-          <p:cNvPr id="58" name="object 58" descr=""/>
+          <p:cNvPr id="60" name="object 60" descr=""/>
           <p:cNvGrpSpPr/>
           <p:nvPr/>
         </p:nvGrpSpPr>
         <p:grpSpPr>
           <a:xfrm>
-            <a:off x="73571" y="3664080"/>
+            <a:off x="74167" y="3592414"/>
             <a:ext cx="1108075" cy="15875"/>
-            <a:chOff x="73571" y="3664080"/>
+            <a:chOff x="74167" y="3592414"/>
             <a:chExt cx="1108075" cy="15875"/>
           </a:xfrm>
         </p:grpSpPr>
         <p:sp>
           <p:nvSpPr>
-            <p:cNvPr id="59" name="object 59" descr=""/>
+            <p:cNvPr id="61" name="object 61" descr=""/>
             <p:cNvSpPr/>
             <p:nvPr/>
           </p:nvSpPr>
           <p:spPr>
             <a:xfrm>
-              <a:off x="73571" y="3664080"/>
+              <a:off x="74167" y="3592414"/>
               <a:ext cx="1108075" cy="15875"/>
             </a:xfrm>
             <a:custGeom>
@@ -7081,13 +7280,13 @@
         </p:sp>
         <p:sp>
           <p:nvSpPr>
-            <p:cNvPr id="60" name="object 60" descr=""/>
+            <p:cNvPr id="62" name="object 62" descr=""/>
             <p:cNvSpPr/>
             <p:nvPr/>
           </p:nvSpPr>
           <p:spPr>
             <a:xfrm>
-              <a:off x="73571" y="3664080"/>
+              <a:off x="74167" y="3592414"/>
               <a:ext cx="943610" cy="15875"/>
             </a:xfrm>
             <a:custGeom>
@@ -7130,7 +7329,7 @@
       </p:grpSp>
       <p:pic>
         <p:nvPicPr>
-          <p:cNvPr id="61" name="object 61" descr=""/>
+          <p:cNvPr id="63" name="object 63" descr=""/>
           <p:cNvPicPr/>
           <p:nvPr/>
         </p:nvPicPr>
@@ -7142,8 +7341,8 @@
         </p:blipFill>
         <p:spPr>
           <a:xfrm>
-            <a:off x="73571" y="3946690"/>
-            <a:ext cx="106933" cy="106934"/>
+            <a:off x="76682" y="3884205"/>
+            <a:ext cx="101917" cy="88557"/>
           </a:xfrm>
           <a:prstGeom prst="rect">
             <a:avLst/>
@@ -7152,13 +7351,13 @@
       </p:pic>
       <p:sp>
         <p:nvSpPr>
-          <p:cNvPr id="62" name="object 62" descr=""/>
+          <p:cNvPr id="64" name="object 64" descr=""/>
           <p:cNvSpPr txBox="1"/>
           <p:nvPr/>
         </p:nvSpPr>
         <p:spPr>
           <a:xfrm>
-            <a:off x="186905" y="3758316"/>
+            <a:off x="187502" y="3686636"/>
             <a:ext cx="799465" cy="285115"/>
           </a:xfrm>
           <a:prstGeom prst="rect">
@@ -7300,27 +7499,27 @@
       </p:sp>
       <p:grpSp>
         <p:nvGrpSpPr>
-          <p:cNvPr id="63" name="object 63" descr=""/>
+          <p:cNvPr id="65" name="object 65" descr=""/>
           <p:cNvGrpSpPr/>
           <p:nvPr/>
         </p:nvGrpSpPr>
         <p:grpSpPr>
           <a:xfrm>
-            <a:off x="73571" y="4076545"/>
-            <a:ext cx="1108075" cy="156845"/>
-            <a:chOff x="73571" y="4076545"/>
-            <a:chExt cx="1108075" cy="156845"/>
+            <a:off x="74167" y="4004867"/>
+            <a:ext cx="1108075" cy="15875"/>
+            <a:chOff x="74167" y="4004867"/>
+            <a:chExt cx="1108075" cy="15875"/>
           </a:xfrm>
         </p:grpSpPr>
         <p:sp>
           <p:nvSpPr>
-            <p:cNvPr id="64" name="object 64" descr=""/>
+            <p:cNvPr id="66" name="object 66" descr=""/>
             <p:cNvSpPr/>
             <p:nvPr/>
           </p:nvSpPr>
           <p:spPr>
             <a:xfrm>
-              <a:off x="73571" y="4076545"/>
+              <a:off x="74167" y="4004867"/>
               <a:ext cx="1108075" cy="15875"/>
             </a:xfrm>
             <a:custGeom>
@@ -7362,13 +7561,13 @@
         </p:sp>
         <p:sp>
           <p:nvSpPr>
-            <p:cNvPr id="65" name="object 65" descr=""/>
+            <p:cNvPr id="67" name="object 67" descr=""/>
             <p:cNvSpPr/>
             <p:nvPr/>
           </p:nvSpPr>
           <p:spPr>
             <a:xfrm>
-              <a:off x="73571" y="4076545"/>
+              <a:off x="74167" y="4004867"/>
               <a:ext cx="996950" cy="15875"/>
             </a:xfrm>
             <a:custGeom>
@@ -7408,38 +7607,382 @@
             <a:p/>
           </p:txBody>
         </p:sp>
-        <p:pic>
-          <p:nvPicPr>
-            <p:cNvPr id="66" name="object 66" descr=""/>
-            <p:cNvPicPr/>
-            <p:nvPr/>
-          </p:nvPicPr>
-          <p:blipFill>
-            <a:blip r:embed="rId20" cstate="print"/>
-            <a:stretch>
-              <a:fillRect/>
-            </a:stretch>
-          </p:blipFill>
-          <p:spPr>
-            <a:xfrm>
-              <a:off x="73571" y="4126191"/>
-              <a:ext cx="106933" cy="106934"/>
-            </a:xfrm>
-            <a:prstGeom prst="rect">
-              <a:avLst/>
-            </a:prstGeom>
-          </p:spPr>
-        </p:pic>
       </p:grpSp>
       <p:sp>
         <p:nvSpPr>
-          <p:cNvPr id="67" name="object 67" descr=""/>
+          <p:cNvPr id="68" name="object 68" descr=""/>
+          <p:cNvSpPr/>
+          <p:nvPr/>
+        </p:nvSpPr>
+        <p:spPr>
+          <a:xfrm>
+            <a:off x="89814" y="4079227"/>
+            <a:ext cx="76200" cy="59055"/>
+          </a:xfrm>
+          <a:custGeom>
+            <a:avLst/>
+            <a:gdLst/>
+            <a:ahLst/>
+            <a:cxnLst/>
+            <a:rect l="l" t="t" r="r" b="b"/>
+            <a:pathLst>
+              <a:path w="76200" h="59054">
+                <a:moveTo>
+                  <a:pt x="190" y="46647"/>
+                </a:moveTo>
+                <a:lnTo>
+                  <a:pt x="0" y="55143"/>
+                </a:lnTo>
+                <a:lnTo>
+                  <a:pt x="64719" y="55143"/>
+                </a:lnTo>
+                <a:lnTo>
+                  <a:pt x="64719" y="59016"/>
+                </a:lnTo>
+                <a:lnTo>
+                  <a:pt x="75679" y="50939"/>
+                </a:lnTo>
+                <a:lnTo>
+                  <a:pt x="69914" y="46697"/>
+                </a:lnTo>
+                <a:lnTo>
+                  <a:pt x="53807" y="46672"/>
+                </a:lnTo>
+                <a:lnTo>
+                  <a:pt x="26136" y="46672"/>
+                </a:lnTo>
+                <a:lnTo>
+                  <a:pt x="190" y="46647"/>
+                </a:lnTo>
+                <a:close/>
+              </a:path>
+              <a:path w="76200" h="59054">
+                <a:moveTo>
+                  <a:pt x="64719" y="42875"/>
+                </a:moveTo>
+                <a:lnTo>
+                  <a:pt x="64757" y="46456"/>
+                </a:lnTo>
+                <a:lnTo>
+                  <a:pt x="64554" y="46697"/>
+                </a:lnTo>
+                <a:lnTo>
+                  <a:pt x="69914" y="46697"/>
+                </a:lnTo>
+                <a:lnTo>
+                  <a:pt x="64719" y="42875"/>
+                </a:lnTo>
+                <a:close/>
+              </a:path>
+              <a:path w="76200" h="59054">
+                <a:moveTo>
+                  <a:pt x="60566" y="46659"/>
+                </a:moveTo>
+                <a:lnTo>
+                  <a:pt x="53809" y="46672"/>
+                </a:lnTo>
+                <a:lnTo>
+                  <a:pt x="61895" y="46672"/>
+                </a:lnTo>
+                <a:lnTo>
+                  <a:pt x="60566" y="46659"/>
+                </a:lnTo>
+                <a:close/>
+              </a:path>
+              <a:path w="76200" h="59054">
+                <a:moveTo>
+                  <a:pt x="51657" y="15938"/>
+                </a:moveTo>
+                <a:lnTo>
+                  <a:pt x="29222" y="15938"/>
+                </a:lnTo>
+                <a:lnTo>
+                  <a:pt x="37236" y="17106"/>
+                </a:lnTo>
+                <a:lnTo>
+                  <a:pt x="44040" y="19954"/>
+                </a:lnTo>
+                <a:lnTo>
+                  <a:pt x="48474" y="25415"/>
+                </a:lnTo>
+                <a:lnTo>
+                  <a:pt x="49943" y="32273"/>
+                </a:lnTo>
+                <a:lnTo>
+                  <a:pt x="47853" y="39306"/>
+                </a:lnTo>
+                <a:lnTo>
+                  <a:pt x="44843" y="44259"/>
+                </a:lnTo>
+                <a:lnTo>
+                  <a:pt x="40309" y="46647"/>
+                </a:lnTo>
+                <a:lnTo>
+                  <a:pt x="26136" y="46672"/>
+                </a:lnTo>
+                <a:lnTo>
+                  <a:pt x="53807" y="46672"/>
+                </a:lnTo>
+                <a:lnTo>
+                  <a:pt x="53365" y="46634"/>
+                </a:lnTo>
+                <a:lnTo>
+                  <a:pt x="53340" y="46443"/>
+                </a:lnTo>
+                <a:lnTo>
+                  <a:pt x="53555" y="46088"/>
+                </a:lnTo>
+                <a:lnTo>
+                  <a:pt x="57810" y="40347"/>
+                </a:lnTo>
+                <a:lnTo>
+                  <a:pt x="59283" y="34124"/>
+                </a:lnTo>
+                <a:lnTo>
+                  <a:pt x="57988" y="27317"/>
+                </a:lnTo>
+                <a:lnTo>
+                  <a:pt x="54014" y="18068"/>
+                </a:lnTo>
+                <a:lnTo>
+                  <a:pt x="51657" y="15938"/>
+                </a:lnTo>
+                <a:close/>
+              </a:path>
+              <a:path w="76200" h="59054">
+                <a:moveTo>
+                  <a:pt x="14973" y="0"/>
+                </a:moveTo>
+                <a:lnTo>
+                  <a:pt x="6362" y="1625"/>
+                </a:lnTo>
+                <a:lnTo>
+                  <a:pt x="2324" y="5638"/>
+                </a:lnTo>
+                <a:lnTo>
+                  <a:pt x="210" y="15697"/>
+                </a:lnTo>
+                <a:lnTo>
+                  <a:pt x="175" y="15938"/>
+                </a:lnTo>
+                <a:lnTo>
+                  <a:pt x="2380" y="21323"/>
+                </a:lnTo>
+                <a:lnTo>
+                  <a:pt x="8308" y="25415"/>
+                </a:lnTo>
+                <a:lnTo>
+                  <a:pt x="10160" y="26136"/>
+                </a:lnTo>
+                <a:lnTo>
+                  <a:pt x="12204" y="26479"/>
+                </a:lnTo>
+                <a:lnTo>
+                  <a:pt x="12255" y="26682"/>
+                </a:lnTo>
+                <a:lnTo>
+                  <a:pt x="11823" y="28841"/>
+                </a:lnTo>
+                <a:lnTo>
+                  <a:pt x="11734" y="33261"/>
+                </a:lnTo>
+                <a:lnTo>
+                  <a:pt x="11455" y="33566"/>
+                </a:lnTo>
+                <a:lnTo>
+                  <a:pt x="10261" y="33820"/>
+                </a:lnTo>
+                <a:lnTo>
+                  <a:pt x="9245" y="33959"/>
+                </a:lnTo>
+                <a:lnTo>
+                  <a:pt x="8470" y="34099"/>
+                </a:lnTo>
+                <a:lnTo>
+                  <a:pt x="17805" y="43713"/>
+                </a:lnTo>
+                <a:lnTo>
+                  <a:pt x="23746" y="32219"/>
+                </a:lnTo>
+                <a:lnTo>
+                  <a:pt x="20167" y="32219"/>
+                </a:lnTo>
+                <a:lnTo>
+                  <a:pt x="20256" y="30327"/>
+                </a:lnTo>
+                <a:lnTo>
+                  <a:pt x="21659" y="21894"/>
+                </a:lnTo>
+                <a:lnTo>
+                  <a:pt x="13843" y="21894"/>
+                </a:lnTo>
+                <a:lnTo>
+                  <a:pt x="9245" y="21513"/>
+                </a:lnTo>
+                <a:lnTo>
+                  <a:pt x="5791" y="17856"/>
+                </a:lnTo>
+                <a:lnTo>
+                  <a:pt x="5672" y="11571"/>
+                </a:lnTo>
+                <a:lnTo>
+                  <a:pt x="5715" y="8343"/>
+                </a:lnTo>
+                <a:lnTo>
+                  <a:pt x="10248" y="4381"/>
+                </a:lnTo>
+                <a:lnTo>
+                  <a:pt x="23816" y="4381"/>
+                </a:lnTo>
+                <a:lnTo>
+                  <a:pt x="23417" y="2768"/>
+                </a:lnTo>
+                <a:lnTo>
+                  <a:pt x="21869" y="2768"/>
+                </a:lnTo>
+                <a:lnTo>
+                  <a:pt x="21551" y="2717"/>
+                </a:lnTo>
+                <a:lnTo>
+                  <a:pt x="18122" y="609"/>
+                </a:lnTo>
+                <a:lnTo>
+                  <a:pt x="14973" y="0"/>
+                </a:lnTo>
+                <a:close/>
+              </a:path>
+              <a:path w="76200" h="59054">
+                <a:moveTo>
+                  <a:pt x="24015" y="31699"/>
+                </a:moveTo>
+                <a:lnTo>
+                  <a:pt x="20167" y="32219"/>
+                </a:lnTo>
+                <a:lnTo>
+                  <a:pt x="23746" y="32219"/>
+                </a:lnTo>
+                <a:lnTo>
+                  <a:pt x="24015" y="31699"/>
+                </a:lnTo>
+                <a:close/>
+              </a:path>
+              <a:path w="76200" h="59054">
+                <a:moveTo>
+                  <a:pt x="37562" y="8552"/>
+                </a:moveTo>
+                <a:lnTo>
+                  <a:pt x="27381" y="9740"/>
+                </a:lnTo>
+                <a:lnTo>
+                  <a:pt x="21463" y="11785"/>
+                </a:lnTo>
+                <a:lnTo>
+                  <a:pt x="17119" y="15697"/>
+                </a:lnTo>
+                <a:lnTo>
+                  <a:pt x="14020" y="21628"/>
+                </a:lnTo>
+                <a:lnTo>
+                  <a:pt x="13843" y="21894"/>
+                </a:lnTo>
+                <a:lnTo>
+                  <a:pt x="21659" y="21894"/>
+                </a:lnTo>
+                <a:lnTo>
+                  <a:pt x="21772" y="21310"/>
+                </a:lnTo>
+                <a:lnTo>
+                  <a:pt x="29222" y="15938"/>
+                </a:lnTo>
+                <a:lnTo>
+                  <a:pt x="51657" y="15938"/>
+                </a:lnTo>
+                <a:lnTo>
+                  <a:pt x="46823" y="11571"/>
+                </a:lnTo>
+                <a:lnTo>
+                  <a:pt x="37562" y="8552"/>
+                </a:lnTo>
+                <a:close/>
+              </a:path>
+              <a:path w="76200" h="59054">
+                <a:moveTo>
+                  <a:pt x="23816" y="4381"/>
+                </a:moveTo>
+                <a:lnTo>
+                  <a:pt x="10248" y="4381"/>
+                </a:lnTo>
+                <a:lnTo>
+                  <a:pt x="16598" y="5422"/>
+                </a:lnTo>
+                <a:lnTo>
+                  <a:pt x="17653" y="5791"/>
+                </a:lnTo>
+                <a:lnTo>
+                  <a:pt x="18605" y="6502"/>
+                </a:lnTo>
+                <a:lnTo>
+                  <a:pt x="17335" y="8089"/>
+                </a:lnTo>
+                <a:lnTo>
+                  <a:pt x="24650" y="8597"/>
+                </a:lnTo>
+                <a:lnTo>
+                  <a:pt x="24758" y="8432"/>
+                </a:lnTo>
+                <a:lnTo>
+                  <a:pt x="24742" y="8089"/>
+                </a:lnTo>
+                <a:lnTo>
+                  <a:pt x="24498" y="7239"/>
+                </a:lnTo>
+                <a:lnTo>
+                  <a:pt x="23816" y="4381"/>
+                </a:lnTo>
+                <a:close/>
+              </a:path>
+              <a:path w="76200" h="59054">
+                <a:moveTo>
+                  <a:pt x="23037" y="1231"/>
+                </a:moveTo>
+                <a:lnTo>
+                  <a:pt x="22694" y="1625"/>
+                </a:lnTo>
+                <a:lnTo>
+                  <a:pt x="22402" y="1892"/>
+                </a:lnTo>
+                <a:lnTo>
+                  <a:pt x="21869" y="2768"/>
+                </a:lnTo>
+                <a:lnTo>
+                  <a:pt x="23417" y="2768"/>
+                </a:lnTo>
+                <a:lnTo>
+                  <a:pt x="23037" y="1231"/>
+                </a:lnTo>
+                <a:close/>
+              </a:path>
+            </a:pathLst>
+          </a:custGeom>
+          <a:solidFill>
+            <a:srgbClr val="000000"/>
+          </a:solidFill>
+        </p:spPr>
+        <p:txBody>
+          <a:bodyPr wrap="square" lIns="0" tIns="0" rIns="0" bIns="0" rtlCol="0"/>
+          <a:lstStyle/>
+          <a:p/>
+        </p:txBody>
+      </p:sp>
+      <p:sp>
+        <p:nvSpPr>
+          <p:cNvPr id="69" name="object 69" descr=""/>
           <p:cNvSpPr txBox="1"/>
           <p:nvPr/>
         </p:nvSpPr>
         <p:spPr>
           <a:xfrm>
-            <a:off x="186905" y="4128761"/>
+            <a:off x="187502" y="4057094"/>
             <a:ext cx="662940" cy="94615"/>
           </a:xfrm>
           <a:prstGeom prst="rect">
@@ -7497,27 +8040,27 @@
       </p:sp>
       <p:grpSp>
         <p:nvGrpSpPr>
-          <p:cNvPr id="68" name="object 68" descr=""/>
+          <p:cNvPr id="70" name="object 70" descr=""/>
           <p:cNvGrpSpPr/>
           <p:nvPr/>
         </p:nvGrpSpPr>
         <p:grpSpPr>
           <a:xfrm>
-            <a:off x="73571" y="4256034"/>
+            <a:off x="74167" y="4184356"/>
             <a:ext cx="1108075" cy="156845"/>
-            <a:chOff x="73571" y="4256034"/>
+            <a:chOff x="74167" y="4184356"/>
             <a:chExt cx="1108075" cy="156845"/>
           </a:xfrm>
         </p:grpSpPr>
         <p:sp>
           <p:nvSpPr>
-            <p:cNvPr id="69" name="object 69" descr=""/>
+            <p:cNvPr id="71" name="object 71" descr=""/>
             <p:cNvSpPr/>
             <p:nvPr/>
           </p:nvSpPr>
           <p:spPr>
             <a:xfrm>
-              <a:off x="73571" y="4256034"/>
+              <a:off x="74167" y="4184356"/>
               <a:ext cx="1108075" cy="15875"/>
             </a:xfrm>
             <a:custGeom>
@@ -7559,13 +8102,13 @@
         </p:sp>
         <p:sp>
           <p:nvSpPr>
-            <p:cNvPr id="70" name="object 70" descr=""/>
+            <p:cNvPr id="72" name="object 72" descr=""/>
             <p:cNvSpPr/>
             <p:nvPr/>
           </p:nvSpPr>
           <p:spPr>
             <a:xfrm>
-              <a:off x="73571" y="4256034"/>
+              <a:off x="74167" y="4184356"/>
               <a:ext cx="996950" cy="15875"/>
             </a:xfrm>
             <a:custGeom>
@@ -7607,20 +8150,20 @@
         </p:sp>
         <p:pic>
           <p:nvPicPr>
-            <p:cNvPr id="71" name="object 71" descr=""/>
+            <p:cNvPr id="73" name="object 73" descr=""/>
             <p:cNvPicPr/>
             <p:nvPr/>
           </p:nvPicPr>
           <p:blipFill>
-            <a:blip r:embed="rId21" cstate="print"/>
+            <a:blip r:embed="rId20" cstate="print"/>
             <a:stretch>
               <a:fillRect/>
             </a:stretch>
           </p:blipFill>
           <p:spPr>
             <a:xfrm>
-              <a:off x="73571" y="4305680"/>
-              <a:ext cx="106933" cy="106934"/>
+              <a:off x="74167" y="4234014"/>
+              <a:ext cx="106934" cy="106934"/>
             </a:xfrm>
             <a:prstGeom prst="rect">
               <a:avLst/>
@@ -7630,13 +8173,13 @@
       </p:grpSp>
       <p:sp>
         <p:nvSpPr>
-          <p:cNvPr id="72" name="object 72" descr=""/>
+          <p:cNvPr id="74" name="object 74" descr=""/>
           <p:cNvSpPr txBox="1"/>
           <p:nvPr/>
         </p:nvSpPr>
         <p:spPr>
           <a:xfrm>
-            <a:off x="186905" y="4308262"/>
+            <a:off x="187502" y="4236584"/>
             <a:ext cx="624840" cy="94615"/>
           </a:xfrm>
           <a:prstGeom prst="rect">
@@ -7708,27 +8251,27 @@
       </p:sp>
       <p:grpSp>
         <p:nvGrpSpPr>
-          <p:cNvPr id="73" name="object 73" descr=""/>
+          <p:cNvPr id="75" name="object 75" descr=""/>
           <p:cNvGrpSpPr/>
           <p:nvPr/>
         </p:nvGrpSpPr>
         <p:grpSpPr>
           <a:xfrm>
-            <a:off x="73571" y="4435536"/>
+            <a:off x="74167" y="4363858"/>
             <a:ext cx="1108075" cy="15875"/>
-            <a:chOff x="73571" y="4435536"/>
+            <a:chOff x="74167" y="4363858"/>
             <a:chExt cx="1108075" cy="15875"/>
           </a:xfrm>
         </p:grpSpPr>
         <p:sp>
           <p:nvSpPr>
-            <p:cNvPr id="74" name="object 74" descr=""/>
+            <p:cNvPr id="76" name="object 76" descr=""/>
             <p:cNvSpPr/>
             <p:nvPr/>
           </p:nvSpPr>
           <p:spPr>
             <a:xfrm>
-              <a:off x="73571" y="4435536"/>
+              <a:off x="74167" y="4363858"/>
               <a:ext cx="1108075" cy="15875"/>
             </a:xfrm>
             <a:custGeom>
@@ -7770,13 +8313,13 @@
         </p:sp>
         <p:sp>
           <p:nvSpPr>
-            <p:cNvPr id="75" name="object 75" descr=""/>
+            <p:cNvPr id="77" name="object 77" descr=""/>
             <p:cNvSpPr/>
             <p:nvPr/>
           </p:nvSpPr>
           <p:spPr>
             <a:xfrm>
-              <a:off x="73571" y="4435536"/>
+              <a:off x="74167" y="4363858"/>
               <a:ext cx="833119" cy="15875"/>
             </a:xfrm>
             <a:custGeom>
@@ -7817,24 +8360,107 @@
           </p:txBody>
         </p:sp>
       </p:grpSp>
+      <p:sp>
+        <p:nvSpPr>
+          <p:cNvPr id="78" name="object 78" descr=""/>
+          <p:cNvSpPr txBox="1"/>
+          <p:nvPr/>
+        </p:nvSpPr>
+        <p:spPr>
+          <a:xfrm>
+            <a:off x="105387" y="5037986"/>
+            <a:ext cx="1044575" cy="332105"/>
+          </a:xfrm>
+          <a:prstGeom prst="rect">
+            <a:avLst/>
+          </a:prstGeom>
+        </p:spPr>
+        <p:txBody>
+          <a:bodyPr wrap="square" lIns="0" tIns="61594" rIns="0" bIns="0" rtlCol="0" vert="horz">
+            <a:spAutoFit/>
+          </a:bodyPr>
+          <a:lstStyle/>
+          <a:p>
+            <a:pPr algn="ctr">
+              <a:lnSpc>
+                <a:spcPct val="100000"/>
+              </a:lnSpc>
+              <a:spcBef>
+                <a:spcPts val="484"/>
+              </a:spcBef>
+            </a:pPr>
+            <a:r>
+              <a:rPr dirty="0" sz="850" b="1">
+                <a:latin typeface="Tahoma"/>
+                <a:cs typeface="Tahoma"/>
+              </a:rPr>
+              <a:t>WORK</a:t>
+            </a:r>
+            <a:r>
+              <a:rPr dirty="0" sz="850" spc="195" b="1">
+                <a:latin typeface="Tahoma"/>
+                <a:cs typeface="Tahoma"/>
+              </a:rPr>
+              <a:t> </a:t>
+            </a:r>
+            <a:r>
+              <a:rPr dirty="0" sz="850" spc="-10" b="1">
+                <a:latin typeface="Tahoma"/>
+                <a:cs typeface="Tahoma"/>
+              </a:rPr>
+              <a:t>EXAMPLES</a:t>
+            </a:r>
+            <a:endParaRPr sz="850">
+              <a:latin typeface="Tahoma"/>
+              <a:cs typeface="Tahoma"/>
+            </a:endParaRPr>
+          </a:p>
+          <a:p>
+            <a:pPr algn="ctr" marL="1270">
+              <a:lnSpc>
+                <a:spcPct val="100000"/>
+              </a:lnSpc>
+              <a:spcBef>
+                <a:spcPts val="285"/>
+              </a:spcBef>
+            </a:pPr>
+            <a:r>
+              <a:rPr dirty="0" u="sng" sz="600" spc="-10">
+                <a:uFill>
+                  <a:solidFill>
+                    <a:srgbClr val="000000"/>
+                  </a:solidFill>
+                </a:uFill>
+                <a:latin typeface="Verdana"/>
+                <a:cs typeface="Verdana"/>
+              </a:rPr>
+              <a:t>LAYOUT</a:t>
+            </a:r>
+            <a:endParaRPr sz="600">
+              <a:latin typeface="Verdana"/>
+              <a:cs typeface="Verdana"/>
+            </a:endParaRPr>
+          </a:p>
+        </p:txBody>
+      </p:sp>
       <p:pic>
         <p:nvPicPr>
-          <p:cNvPr id="76" name="object 76" descr="">
-            <a:hlinkClick r:id="rId22"/>
+          <p:cNvPr id="79" name="object 79" descr="">
+            <a:hlinkClick r:id="rId21"/>
           </p:cNvPr>
           <p:cNvPicPr/>
           <p:nvPr/>
         </p:nvPicPr>
         <p:blipFill>
-          <a:blip r:embed="rId23" cstate="print"/>
+          <a:blip r:embed="rId22" cstate="print"/>
           <a:stretch>
             <a:fillRect/>
           </a:stretch>
         </p:blipFill>
         <p:spPr>
           <a:xfrm>
-            <a:off x="156984" y="5385722"/>
-            <a:ext cx="432624" cy="306748"/>
+            <a:off x="256578" y="5409831"/>
+            <a:ext cx="344633" cy="229755"/>
           </a:xfrm>
           <a:prstGeom prst="rect">
             <a:avLst/>
@@ -7843,22 +8469,142 @@
       </p:pic>
       <p:pic>
         <p:nvPicPr>
-          <p:cNvPr id="77" name="object 77" descr="">
-            <a:hlinkClick r:id="rId24"/>
+          <p:cNvPr id="80" name="object 80" descr="">
+            <a:hlinkClick r:id="rId23"/>
           </p:cNvPr>
           <p:cNvPicPr/>
           <p:nvPr/>
         </p:nvPicPr>
         <p:blipFill>
-          <a:blip r:embed="rId25" cstate="print"/>
+          <a:blip r:embed="rId24" cstate="print"/>
           <a:stretch>
             <a:fillRect/>
           </a:stretch>
         </p:blipFill>
         <p:spPr>
           <a:xfrm>
-            <a:off x="665378" y="5385722"/>
-            <a:ext cx="432624" cy="306748"/>
+            <a:off x="653757" y="5409831"/>
+            <a:ext cx="344633" cy="229755"/>
+          </a:xfrm>
+          <a:prstGeom prst="rect">
+            <a:avLst/>
+          </a:prstGeom>
+        </p:spPr>
+      </p:pic>
+      <p:sp>
+        <p:nvSpPr>
+          <p:cNvPr id="81" name="object 81" descr=""/>
+          <p:cNvSpPr txBox="1"/>
+          <p:nvPr/>
+        </p:nvSpPr>
+        <p:spPr>
+          <a:xfrm>
+            <a:off x="328802" y="5680198"/>
+            <a:ext cx="599440" cy="117475"/>
+          </a:xfrm>
+          <a:prstGeom prst="rect">
+            <a:avLst/>
+          </a:prstGeom>
+        </p:spPr>
+        <p:txBody>
+          <a:bodyPr wrap="square" lIns="0" tIns="12700" rIns="0" bIns="0" rtlCol="0" vert="horz">
+            <a:spAutoFit/>
+          </a:bodyPr>
+          <a:lstStyle/>
+          <a:p>
+            <a:pPr marL="12700">
+              <a:lnSpc>
+                <a:spcPct val="100000"/>
+              </a:lnSpc>
+              <a:spcBef>
+                <a:spcPts val="100"/>
+              </a:spcBef>
+            </a:pPr>
+            <a:r>
+              <a:rPr dirty="0" u="sng" sz="600">
+                <a:uFill>
+                  <a:solidFill>
+                    <a:srgbClr val="000000"/>
+                  </a:solidFill>
+                </a:uFill>
+                <a:latin typeface="Verdana"/>
+                <a:cs typeface="Verdana"/>
+              </a:rPr>
+              <a:t>WEB-APPS</a:t>
+            </a:r>
+            <a:r>
+              <a:rPr dirty="0" u="sng" sz="600" spc="5">
+                <a:uFill>
+                  <a:solidFill>
+                    <a:srgbClr val="000000"/>
+                  </a:solidFill>
+                </a:uFill>
+                <a:latin typeface="Verdana"/>
+                <a:cs typeface="Verdana"/>
+              </a:rPr>
+              <a:t> </a:t>
+            </a:r>
+            <a:r>
+              <a:rPr dirty="0" u="sng" sz="600" spc="-95">
+                <a:uFill>
+                  <a:solidFill>
+                    <a:srgbClr val="000000"/>
+                  </a:solidFill>
+                </a:uFill>
+                <a:latin typeface="Verdana"/>
+                <a:cs typeface="Verdana"/>
+              </a:rPr>
+              <a:t>/</a:t>
+            </a:r>
+            <a:r>
+              <a:rPr dirty="0" u="sng" sz="600">
+                <a:uFill>
+                  <a:solidFill>
+                    <a:srgbClr val="000000"/>
+                  </a:solidFill>
+                </a:uFill>
+                <a:latin typeface="Verdana"/>
+                <a:cs typeface="Verdana"/>
+              </a:rPr>
+              <a:t> </a:t>
+            </a:r>
+            <a:r>
+              <a:rPr dirty="0" u="sng" sz="600" spc="-25">
+                <a:uFill>
+                  <a:solidFill>
+                    <a:srgbClr val="000000"/>
+                  </a:solidFill>
+                </a:uFill>
+                <a:latin typeface="Verdana"/>
+                <a:cs typeface="Verdana"/>
+              </a:rPr>
+              <a:t>JS</a:t>
+            </a:r>
+            <a:endParaRPr sz="600">
+              <a:latin typeface="Verdana"/>
+              <a:cs typeface="Verdana"/>
+            </a:endParaRPr>
+          </a:p>
+        </p:txBody>
+      </p:sp>
+      <p:pic>
+        <p:nvPicPr>
+          <p:cNvPr id="82" name="object 82" descr="">
+            <a:hlinkClick r:id="rId25"/>
+          </p:cNvPr>
+          <p:cNvPicPr/>
+          <p:nvPr/>
+        </p:nvPicPr>
+        <p:blipFill>
+          <a:blip r:embed="rId26" cstate="print"/>
+          <a:stretch>
+            <a:fillRect/>
+          </a:stretch>
+        </p:blipFill>
+        <p:spPr>
+          <a:xfrm>
+            <a:off x="256578" y="5837567"/>
+            <a:ext cx="344633" cy="229755"/>
           </a:xfrm>
           <a:prstGeom prst="rect">
             <a:avLst/>
@@ -7867,55 +8613,129 @@
       </p:pic>
       <p:pic>
         <p:nvPicPr>
-          <p:cNvPr id="78" name="object 78" descr="">
-            <a:hlinkClick r:id="rId26"/>
+          <p:cNvPr id="83" name="object 83" descr="">
+            <a:hlinkClick r:id="rId27"/>
           </p:cNvPr>
           <p:cNvPicPr/>
           <p:nvPr/>
         </p:nvPicPr>
         <p:blipFill>
-          <a:blip r:embed="rId27" cstate="print"/>
+          <a:blip r:embed="rId28" cstate="print"/>
           <a:stretch>
             <a:fillRect/>
           </a:stretch>
         </p:blipFill>
         <p:spPr>
           <a:xfrm>
-            <a:off x="153771" y="5970802"/>
-            <a:ext cx="431554" cy="305525"/>
+            <a:off x="653757" y="5837567"/>
+            <a:ext cx="344633" cy="229755"/>
           </a:xfrm>
           <a:prstGeom prst="rect">
             <a:avLst/>
           </a:prstGeom>
         </p:spPr>
       </p:pic>
-      <p:pic>
-        <p:nvPicPr>
-          <p:cNvPr id="79" name="object 79" descr="">
-            <a:hlinkClick r:id="rId28"/>
-          </p:cNvPr>
-          <p:cNvPicPr/>
+      <p:sp>
+        <p:nvSpPr>
+          <p:cNvPr id="84" name="object 84" descr=""/>
+          <p:cNvSpPr txBox="1"/>
           <p:nvPr/>
-        </p:nvPicPr>
-        <p:blipFill>
-          <a:blip r:embed="rId29" cstate="print"/>
-          <a:stretch>
-            <a:fillRect/>
-          </a:stretch>
-        </p:blipFill>
+        </p:nvSpPr>
         <p:spPr>
           <a:xfrm>
-            <a:off x="661720" y="5970802"/>
-            <a:ext cx="431542" cy="305525"/>
+            <a:off x="177952" y="6107934"/>
+            <a:ext cx="901700" cy="117475"/>
           </a:xfrm>
           <a:prstGeom prst="rect">
             <a:avLst/>
           </a:prstGeom>
         </p:spPr>
-      </p:pic>
+        <p:txBody>
+          <a:bodyPr wrap="square" lIns="0" tIns="12700" rIns="0" bIns="0" rtlCol="0" vert="horz">
+            <a:spAutoFit/>
+          </a:bodyPr>
+          <a:lstStyle/>
+          <a:p>
+            <a:pPr marL="12700">
+              <a:lnSpc>
+                <a:spcPct val="100000"/>
+              </a:lnSpc>
+              <a:spcBef>
+                <a:spcPts val="100"/>
+              </a:spcBef>
+            </a:pPr>
+            <a:r>
+              <a:rPr dirty="0" u="sng" sz="600">
+                <a:uFill>
+                  <a:solidFill>
+                    <a:srgbClr val="000000"/>
+                  </a:solidFill>
+                </a:uFill>
+                <a:latin typeface="Verdana"/>
+                <a:cs typeface="Verdana"/>
+              </a:rPr>
+              <a:t>WEB-APPS</a:t>
+            </a:r>
+            <a:r>
+              <a:rPr dirty="0" u="sng" sz="600" spc="5">
+                <a:uFill>
+                  <a:solidFill>
+                    <a:srgbClr val="000000"/>
+                  </a:solidFill>
+                </a:uFill>
+                <a:latin typeface="Verdana"/>
+                <a:cs typeface="Verdana"/>
+              </a:rPr>
+              <a:t> </a:t>
+            </a:r>
+            <a:r>
+              <a:rPr dirty="0" u="sng" sz="600" spc="-95">
+                <a:uFill>
+                  <a:solidFill>
+                    <a:srgbClr val="000000"/>
+                  </a:solidFill>
+                </a:uFill>
+                <a:latin typeface="Verdana"/>
+                <a:cs typeface="Verdana"/>
+              </a:rPr>
+              <a:t>/</a:t>
+            </a:r>
+            <a:r>
+              <a:rPr dirty="0" u="sng" sz="600">
+                <a:uFill>
+                  <a:solidFill>
+                    <a:srgbClr val="000000"/>
+                  </a:solidFill>
+                </a:uFill>
+                <a:latin typeface="Verdana"/>
+                <a:cs typeface="Verdana"/>
+              </a:rPr>
+              <a:t> </a:t>
+            </a:r>
+            <a:r>
+              <a:rPr dirty="0" u="sng" sz="600" spc="-10">
+                <a:uFill>
+                  <a:solidFill>
+                    <a:srgbClr val="000000"/>
+                  </a:solidFill>
+                </a:uFill>
+                <a:latin typeface="Verdana"/>
+                <a:cs typeface="Verdana"/>
+              </a:rPr>
+              <a:t>ANGULAR</a:t>
+            </a:r>
+            <a:endParaRPr sz="600">
+              <a:latin typeface="Verdana"/>
+              <a:cs typeface="Verdana"/>
+            </a:endParaRPr>
+          </a:p>
+        </p:txBody>
+      </p:sp>
       <p:pic>
         <p:nvPicPr>
-          <p:cNvPr id="80" name="object 80" descr=""/>
+          <p:cNvPr id="85" name="object 85" descr="">
+            <a:hlinkClick r:id="rId29"/>
+          </p:cNvPr>
           <p:cNvPicPr/>
           <p:nvPr/>
         </p:nvPicPr>
@@ -7927,8 +8747,8 @@
         </p:blipFill>
         <p:spPr>
           <a:xfrm>
-            <a:off x="409651" y="6329798"/>
-            <a:ext cx="431554" cy="324620"/>
+            <a:off x="455777" y="6265303"/>
+            <a:ext cx="344633" cy="229755"/>
           </a:xfrm>
           <a:prstGeom prst="rect">
             <a:avLst/>
@@ -7937,13 +8757,13 @@
       </p:pic>
       <p:sp>
         <p:nvSpPr>
-          <p:cNvPr id="81" name="object 81" descr=""/>
+          <p:cNvPr id="86" name="object 86" descr=""/>
           <p:cNvSpPr/>
           <p:nvPr/>
         </p:nvSpPr>
         <p:spPr>
           <a:xfrm>
-            <a:off x="1338999" y="2748813"/>
+            <a:off x="1339595" y="2749702"/>
             <a:ext cx="43815" cy="43815"/>
           </a:xfrm>
           <a:custGeom>
@@ -7985,13 +8805,13 @@
       </p:sp>
       <p:sp>
         <p:nvSpPr>
-          <p:cNvPr id="82" name="object 82" descr=""/>
+          <p:cNvPr id="87" name="object 87" descr=""/>
           <p:cNvSpPr txBox="1"/>
           <p:nvPr/>
         </p:nvSpPr>
         <p:spPr>
           <a:xfrm>
-            <a:off x="1324990" y="2406362"/>
+            <a:off x="1325587" y="2407251"/>
             <a:ext cx="2796540" cy="798830"/>
           </a:xfrm>
           <a:prstGeom prst="rect">
@@ -8455,27 +9275,27 @@
       </p:sp>
       <p:grpSp>
         <p:nvGrpSpPr>
-          <p:cNvPr id="83" name="object 83" descr=""/>
+          <p:cNvPr id="88" name="object 88" descr=""/>
           <p:cNvGrpSpPr/>
           <p:nvPr/>
         </p:nvGrpSpPr>
         <p:grpSpPr>
           <a:xfrm>
-            <a:off x="1338999" y="3252927"/>
+            <a:off x="1339595" y="3253816"/>
             <a:ext cx="43815" cy="1418590"/>
-            <a:chOff x="1338999" y="3252927"/>
+            <a:chOff x="1339595" y="3253816"/>
             <a:chExt cx="43815" cy="1418590"/>
           </a:xfrm>
         </p:grpSpPr>
         <p:sp>
           <p:nvSpPr>
-            <p:cNvPr id="84" name="object 84" descr=""/>
+            <p:cNvPr id="89" name="object 89" descr=""/>
             <p:cNvSpPr/>
             <p:nvPr/>
           </p:nvSpPr>
           <p:spPr>
             <a:xfrm>
-              <a:off x="1358690" y="3270719"/>
+              <a:off x="1359287" y="3271608"/>
               <a:ext cx="0" cy="1363980"/>
             </a:xfrm>
             <a:custGeom>
@@ -8510,13 +9330,13 @@
         </p:sp>
         <p:sp>
           <p:nvSpPr>
-            <p:cNvPr id="85" name="object 85" descr=""/>
+            <p:cNvPr id="90" name="object 90" descr=""/>
             <p:cNvSpPr/>
             <p:nvPr/>
           </p:nvSpPr>
           <p:spPr>
             <a:xfrm>
-              <a:off x="1338999" y="3252926"/>
+              <a:off x="1339596" y="3253815"/>
               <a:ext cx="43815" cy="1418590"/>
             </a:xfrm>
             <a:custGeom>
@@ -8631,13 +9451,13 @@
       </p:grpSp>
       <p:sp>
         <p:nvSpPr>
-          <p:cNvPr id="86" name="object 86" descr=""/>
+          <p:cNvPr id="91" name="object 91" descr=""/>
           <p:cNvSpPr txBox="1"/>
           <p:nvPr/>
         </p:nvSpPr>
         <p:spPr>
           <a:xfrm>
-            <a:off x="1420469" y="3207224"/>
+            <a:off x="1421066" y="3208114"/>
             <a:ext cx="2684780" cy="1672589"/>
           </a:xfrm>
           <a:prstGeom prst="rect">
@@ -9983,27 +10803,27 @@
       </p:sp>
       <p:grpSp>
         <p:nvGrpSpPr>
-          <p:cNvPr id="87" name="object 87" descr=""/>
+          <p:cNvPr id="92" name="object 92" descr=""/>
           <p:cNvGrpSpPr/>
           <p:nvPr/>
         </p:nvGrpSpPr>
         <p:grpSpPr>
           <a:xfrm>
-            <a:off x="1338999" y="5128094"/>
+            <a:off x="1339595" y="5128983"/>
             <a:ext cx="43815" cy="746125"/>
-            <a:chOff x="1338999" y="5128094"/>
+            <a:chOff x="1339595" y="5128983"/>
             <a:chExt cx="43815" cy="746125"/>
           </a:xfrm>
         </p:grpSpPr>
         <p:sp>
           <p:nvSpPr>
-            <p:cNvPr id="88" name="object 88" descr=""/>
+            <p:cNvPr id="93" name="object 93" descr=""/>
             <p:cNvSpPr/>
             <p:nvPr/>
           </p:nvSpPr>
           <p:spPr>
             <a:xfrm>
-              <a:off x="1358690" y="5153520"/>
+              <a:off x="1359287" y="5154409"/>
               <a:ext cx="0" cy="683895"/>
             </a:xfrm>
             <a:custGeom>
@@ -10038,13 +10858,13 @@
         </p:sp>
         <p:sp>
           <p:nvSpPr>
-            <p:cNvPr id="89" name="object 89" descr=""/>
+            <p:cNvPr id="94" name="object 94" descr=""/>
             <p:cNvSpPr/>
             <p:nvPr/>
           </p:nvSpPr>
           <p:spPr>
             <a:xfrm>
-              <a:off x="1338999" y="5128094"/>
+              <a:off x="1339596" y="5128983"/>
               <a:ext cx="43815" cy="746125"/>
             </a:xfrm>
             <a:custGeom>
@@ -10123,13 +10943,13 @@
       </p:grpSp>
       <p:sp>
         <p:nvSpPr>
-          <p:cNvPr id="90" name="object 90" descr=""/>
+          <p:cNvPr id="95" name="object 95" descr=""/>
           <p:cNvSpPr txBox="1"/>
           <p:nvPr/>
         </p:nvSpPr>
         <p:spPr>
           <a:xfrm>
-            <a:off x="1420469" y="5082392"/>
+            <a:off x="1421066" y="5083281"/>
             <a:ext cx="2489200" cy="1000760"/>
           </a:xfrm>
           <a:prstGeom prst="rect">
@@ -10712,14 +11532,14 @@
       </p:sp>
       <p:sp>
         <p:nvSpPr>
-          <p:cNvPr id="91" name="object 91" descr=""/>
+          <p:cNvPr id="96" name="object 96" descr=""/>
           <p:cNvSpPr/>
           <p:nvPr/>
         </p:nvSpPr>
         <p:spPr>
           <a:xfrm>
-            <a:off x="3880548" y="251523"/>
-            <a:ext cx="180975" cy="185420"/>
+            <a:off x="3743312" y="263131"/>
+            <a:ext cx="371475" cy="169545"/>
           </a:xfrm>
           <a:custGeom>
             <a:avLst/>
@@ -10728,21 +11548,87 @@
             <a:cxnLst/>
             <a:rect l="l" t="t" r="r" b="b"/>
             <a:pathLst>
-              <a:path w="180975" h="185420">
+              <a:path w="371475" h="169545">
                 <a:moveTo>
-                  <a:pt x="180975" y="0"/>
+                  <a:pt x="371475" y="0"/>
                 </a:moveTo>
                 <a:lnTo>
                   <a:pt x="0" y="0"/>
                 </a:lnTo>
                 <a:lnTo>
-                  <a:pt x="0" y="184835"/>
-                </a:lnTo>
-                <a:lnTo>
-                  <a:pt x="180975" y="184835"/>
-                </a:lnTo>
-                <a:lnTo>
-                  <a:pt x="180975" y="0"/>
+                  <a:pt x="0" y="169367"/>
+                </a:lnTo>
+                <a:lnTo>
+                  <a:pt x="371475" y="169367"/>
+                </a:lnTo>
+                <a:lnTo>
+                  <a:pt x="371475" y="0"/>
+                </a:lnTo>
+                <a:close/>
+              </a:path>
+            </a:pathLst>
+          </a:custGeom>
+          <a:solidFill>
+            <a:srgbClr val="F0F0F0"/>
+          </a:solidFill>
+        </p:spPr>
+        <p:txBody>
+          <a:bodyPr wrap="square" lIns="0" tIns="0" rIns="0" bIns="0" rtlCol="0"/>
+          <a:lstStyle/>
+          <a:p/>
+        </p:txBody>
+      </p:sp>
+      <p:sp>
+        <p:nvSpPr>
+          <p:cNvPr id="97" name="object 97" descr=""/>
+          <p:cNvSpPr/>
+          <p:nvPr/>
+        </p:nvSpPr>
+        <p:spPr>
+          <a:xfrm>
+            <a:off x="0" y="0"/>
+            <a:ext cx="3587115" cy="295275"/>
+          </a:xfrm>
+          <a:custGeom>
+            <a:avLst/>
+            <a:gdLst/>
+            <a:ahLst/>
+            <a:cxnLst/>
+            <a:rect l="l" t="t" r="r" b="b"/>
+            <a:pathLst>
+              <a:path w="3587115" h="295275">
+                <a:moveTo>
+                  <a:pt x="3491801" y="198234"/>
+                </a:moveTo>
+                <a:lnTo>
+                  <a:pt x="3351009" y="198234"/>
+                </a:lnTo>
+                <a:lnTo>
+                  <a:pt x="3351009" y="295275"/>
+                </a:lnTo>
+                <a:lnTo>
+                  <a:pt x="3491801" y="295275"/>
+                </a:lnTo>
+                <a:lnTo>
+                  <a:pt x="3491801" y="198234"/>
+                </a:lnTo>
+                <a:close/>
+              </a:path>
+              <a:path w="3587115" h="295275">
+                <a:moveTo>
+                  <a:pt x="3587051" y="0"/>
+                </a:moveTo>
+                <a:lnTo>
+                  <a:pt x="0" y="0"/>
+                </a:lnTo>
+                <a:lnTo>
+                  <a:pt x="0" y="190500"/>
+                </a:lnTo>
+                <a:lnTo>
+                  <a:pt x="3587051" y="190500"/>
+                </a:lnTo>
+                <a:lnTo>
+                  <a:pt x="3587051" y="0"/>
                 </a:lnTo>
                 <a:close/>
               </a:path>
@@ -10791,8 +11677,8 @@
         </p:nvSpPr>
         <p:spPr>
           <a:xfrm>
-            <a:off x="0" y="0"/>
-            <a:ext cx="4196715" cy="6830695"/>
+            <a:off x="-1028" y="-1930"/>
+            <a:ext cx="4201160" cy="6779259"/>
           </a:xfrm>
           <a:custGeom>
             <a:avLst/>
@@ -10801,21 +11687,60 @@
             <a:cxnLst/>
             <a:rect l="l" t="t" r="r" b="b"/>
             <a:pathLst>
-              <a:path w="4196715" h="6830695">
+              <a:path w="4201160" h="6779259">
                 <a:moveTo>
-                  <a:pt x="4196663" y="0"/>
+                  <a:pt x="4198213" y="0"/>
                 </a:moveTo>
                 <a:lnTo>
-                  <a:pt x="0" y="0"/>
-                </a:lnTo>
-                <a:lnTo>
-                  <a:pt x="0" y="6830325"/>
-                </a:lnTo>
-                <a:lnTo>
-                  <a:pt x="4196663" y="6830325"/>
-                </a:lnTo>
-                <a:lnTo>
-                  <a:pt x="4196663" y="0"/>
+                  <a:pt x="2768" y="0"/>
+                </a:lnTo>
+                <a:lnTo>
+                  <a:pt x="1866" y="368"/>
+                </a:lnTo>
+                <a:lnTo>
+                  <a:pt x="381" y="1854"/>
+                </a:lnTo>
+                <a:lnTo>
+                  <a:pt x="0" y="2768"/>
+                </a:lnTo>
+                <a:lnTo>
+                  <a:pt x="0" y="6775031"/>
+                </a:lnTo>
+                <a:lnTo>
+                  <a:pt x="0" y="6776085"/>
+                </a:lnTo>
+                <a:lnTo>
+                  <a:pt x="381" y="6776986"/>
+                </a:lnTo>
+                <a:lnTo>
+                  <a:pt x="1866" y="6778472"/>
+                </a:lnTo>
+                <a:lnTo>
+                  <a:pt x="2768" y="6778853"/>
+                </a:lnTo>
+                <a:lnTo>
+                  <a:pt x="4198213" y="6778853"/>
+                </a:lnTo>
+                <a:lnTo>
+                  <a:pt x="4199115" y="6778472"/>
+                </a:lnTo>
+                <a:lnTo>
+                  <a:pt x="4200613" y="6776986"/>
+                </a:lnTo>
+                <a:lnTo>
+                  <a:pt x="4200982" y="6776085"/>
+                </a:lnTo>
+                <a:lnTo>
+                  <a:pt x="4200982" y="2768"/>
+                </a:lnTo>
+                <a:lnTo>
+                  <a:pt x="4200613" y="1854"/>
+                </a:lnTo>
+                <a:lnTo>
+                  <a:pt x="4199115" y="368"/>
+                </a:lnTo>
+                <a:lnTo>
+                  <a:pt x="4198213" y="0"/>
                 </a:lnTo>
                 <a:close/>
               </a:path>
@@ -10831,28 +11756,63 @@
           <a:p/>
         </p:txBody>
       </p:sp>
-      <p:pic>
-        <p:nvPicPr>
+      <p:sp>
+        <p:nvSpPr>
           <p:cNvPr id="3" name="object 3" descr=""/>
-          <p:cNvPicPr/>
+          <p:cNvSpPr txBox="1"/>
           <p:nvPr/>
-        </p:nvPicPr>
-        <p:blipFill>
-          <a:blip r:embed="rId2" cstate="print"/>
-          <a:stretch>
-            <a:fillRect/>
-          </a:stretch>
-        </p:blipFill>
+        </p:nvSpPr>
         <p:spPr>
           <a:xfrm>
-            <a:off x="74764" y="4717853"/>
-            <a:ext cx="87838" cy="87838"/>
+            <a:off x="62651" y="1173854"/>
+            <a:ext cx="247650" cy="208915"/>
           </a:xfrm>
           <a:prstGeom prst="rect">
             <a:avLst/>
           </a:prstGeom>
         </p:spPr>
-      </p:pic>
+        <p:txBody>
+          <a:bodyPr wrap="square" lIns="0" tIns="11430" rIns="0" bIns="0" rtlCol="0" vert="horz">
+            <a:spAutoFit/>
+          </a:bodyPr>
+          <a:lstStyle/>
+          <a:p>
+            <a:pPr marL="12700" marR="5080">
+              <a:lnSpc>
+                <a:spcPct val="133700"/>
+              </a:lnSpc>
+              <a:spcBef>
+                <a:spcPts val="90"/>
+              </a:spcBef>
+            </a:pPr>
+            <a:r>
+              <a:rPr dirty="0" sz="450" spc="-10" b="1">
+                <a:latin typeface="Tahoma"/>
+                <a:cs typeface="Tahoma"/>
+              </a:rPr>
+              <a:t>Адрес:</a:t>
+            </a:r>
+            <a:r>
+              <a:rPr dirty="0" sz="450" spc="500" b="1">
+                <a:latin typeface="Tahoma"/>
+                <a:cs typeface="Tahoma"/>
+              </a:rPr>
+              <a:t> </a:t>
+            </a:r>
+            <a:r>
+              <a:rPr dirty="0" sz="450" spc="-10" b="1">
+                <a:latin typeface="Tahoma"/>
+                <a:cs typeface="Tahoma"/>
+              </a:rPr>
+              <a:t>Email:</a:t>
+            </a:r>
+            <a:endParaRPr sz="450">
+              <a:latin typeface="Tahoma"/>
+              <a:cs typeface="Tahoma"/>
+            </a:endParaRPr>
+          </a:p>
+        </p:txBody>
+      </p:sp>
       <p:pic>
         <p:nvPicPr>
           <p:cNvPr id="4" name="object 4" descr=""/>
@@ -10867,7 +11827,29 @@
         </p:blipFill>
         <p:spPr>
           <a:xfrm>
-            <a:off x="74764" y="4931721"/>
+            <a:off x="75349" y="4645870"/>
+            <a:ext cx="87838" cy="87838"/>
+          </a:xfrm>
+          <a:prstGeom prst="rect">
+            <a:avLst/>
+          </a:prstGeom>
+        </p:spPr>
+      </p:pic>
+      <p:pic>
+        <p:nvPicPr>
+          <p:cNvPr id="5" name="object 5" descr=""/>
+          <p:cNvPicPr/>
+          <p:nvPr/>
+        </p:nvPicPr>
+        <p:blipFill>
+          <a:blip r:embed="rId2" cstate="print"/>
+          <a:stretch>
+            <a:fillRect/>
+          </a:stretch>
+        </p:blipFill>
+        <p:spPr>
+          <a:xfrm>
+            <a:off x="75349" y="4859738"/>
             <a:ext cx="87838" cy="87838"/>
           </a:xfrm>
           <a:prstGeom prst="rect">
@@ -10877,14 +11859,14 @@
       </p:pic>
       <p:sp>
         <p:nvSpPr>
-          <p:cNvPr id="5" name="object 5" descr=""/>
+          <p:cNvPr id="6" name="object 6" descr=""/>
           <p:cNvSpPr txBox="1"/>
           <p:nvPr/>
         </p:nvSpPr>
         <p:spPr>
           <a:xfrm>
-            <a:off x="62065" y="4529479"/>
-            <a:ext cx="854075" cy="583565"/>
+            <a:off x="62649" y="4457494"/>
+            <a:ext cx="791210" cy="583565"/>
           </a:xfrm>
           <a:prstGeom prst="rect">
             <a:avLst/>
@@ -10947,53 +11929,32 @@
               </a:spcBef>
             </a:pPr>
             <a:r>
+              <a:rPr dirty="0" sz="450" spc="-65">
+                <a:latin typeface="Verdana"/>
+                <a:cs typeface="Verdana"/>
+              </a:rPr>
+              <a:t>B1</a:t>
+            </a:r>
+            <a:r>
+              <a:rPr dirty="0" sz="450" spc="-25">
+                <a:latin typeface="Verdana"/>
+                <a:cs typeface="Verdana"/>
+              </a:rPr>
+              <a:t> </a:t>
+            </a:r>
+            <a:r>
+              <a:rPr dirty="0" sz="450">
+                <a:latin typeface="Verdana"/>
+                <a:cs typeface="Verdana"/>
+              </a:rPr>
+              <a:t>(Средний</a:t>
+            </a:r>
+            <a:r>
               <a:rPr dirty="0" sz="450" spc="-10">
                 <a:latin typeface="Verdana"/>
                 <a:cs typeface="Verdana"/>
               </a:rPr>
-              <a:t>A2</a:t>
-            </a:r>
-            <a:r>
-              <a:rPr dirty="0" sz="450" spc="10">
-                <a:latin typeface="Verdana"/>
-                <a:cs typeface="Verdana"/>
-              </a:rPr>
-              <a:t> </a:t>
-            </a:r>
-            <a:r>
-              <a:rPr dirty="0" sz="450" spc="-10">
-                <a:latin typeface="Verdana"/>
-                <a:cs typeface="Verdana"/>
-              </a:rPr>
-              <a:t>(Пред.</a:t>
-            </a:r>
-            <a:r>
-              <a:rPr dirty="0" sz="450" spc="-15">
-                <a:latin typeface="Verdana"/>
-                <a:cs typeface="Verdana"/>
-              </a:rPr>
-              <a:t> </a:t>
-            </a:r>
-            <a:r>
-              <a:rPr dirty="0" sz="450">
-                <a:latin typeface="Verdana"/>
-                <a:cs typeface="Verdana"/>
-              </a:rPr>
-              <a:t>средний</a:t>
-            </a:r>
-            <a:r>
-              <a:rPr dirty="0" sz="450" spc="-15">
-                <a:latin typeface="Verdana"/>
-                <a:cs typeface="Verdana"/>
-              </a:rPr>
-              <a:t> </a:t>
-            </a:r>
-            <a:r>
-              <a:rPr dirty="0" sz="450" spc="-10">
-                <a:latin typeface="Verdana"/>
-                <a:cs typeface="Verdana"/>
-              </a:rPr>
-              <a:t>уровень)</a:t>
+              <a:t> уровень)</a:t>
             </a:r>
             <a:endParaRPr sz="450">
               <a:latin typeface="Verdana"/>
@@ -11046,114 +12007,14 @@
       </p:sp>
       <p:sp>
         <p:nvSpPr>
-          <p:cNvPr id="6" name="object 6" descr=""/>
-          <p:cNvSpPr txBox="1"/>
-          <p:nvPr/>
-        </p:nvSpPr>
-        <p:spPr>
-          <a:xfrm>
-            <a:off x="94524" y="5159624"/>
-            <a:ext cx="1067435" cy="154305"/>
-          </a:xfrm>
-          <a:prstGeom prst="rect">
-            <a:avLst/>
-          </a:prstGeom>
-        </p:spPr>
-        <p:txBody>
-          <a:bodyPr wrap="square" lIns="0" tIns="11430" rIns="0" bIns="0" rtlCol="0" vert="horz">
-            <a:spAutoFit/>
-          </a:bodyPr>
-          <a:lstStyle/>
-          <a:p>
-            <a:pPr marL="12700">
-              <a:lnSpc>
-                <a:spcPct val="100000"/>
-              </a:lnSpc>
-              <a:spcBef>
-                <a:spcPts val="90"/>
-              </a:spcBef>
-            </a:pPr>
-            <a:r>
-              <a:rPr dirty="0" sz="850" spc="10" b="1">
-                <a:latin typeface="Tahoma"/>
-                <a:cs typeface="Tahoma"/>
-              </a:rPr>
-              <a:t>ПРИМЕРЫ</a:t>
-            </a:r>
-            <a:r>
-              <a:rPr dirty="0" sz="850" spc="190" b="1">
-                <a:latin typeface="Tahoma"/>
-                <a:cs typeface="Tahoma"/>
-              </a:rPr>
-              <a:t> </a:t>
-            </a:r>
-            <a:r>
-              <a:rPr dirty="0" sz="850" spc="-10" b="1">
-                <a:latin typeface="Tahoma"/>
-                <a:cs typeface="Tahoma"/>
-              </a:rPr>
-              <a:t>РАБОТ</a:t>
-            </a:r>
-            <a:endParaRPr sz="850">
-              <a:latin typeface="Tahoma"/>
-              <a:cs typeface="Tahoma"/>
-            </a:endParaRPr>
-          </a:p>
-        </p:txBody>
-      </p:sp>
-      <p:sp>
-        <p:nvSpPr>
           <p:cNvPr id="7" name="object 7" descr=""/>
-          <p:cNvSpPr txBox="1"/>
-          <p:nvPr/>
-        </p:nvSpPr>
-        <p:spPr>
-          <a:xfrm>
-            <a:off x="319850" y="5774497"/>
-            <a:ext cx="616585" cy="154305"/>
-          </a:xfrm>
-          <a:prstGeom prst="rect">
-            <a:avLst/>
-          </a:prstGeom>
-        </p:spPr>
-        <p:txBody>
-          <a:bodyPr wrap="square" lIns="0" tIns="11430" rIns="0" bIns="0" rtlCol="0" vert="horz">
-            <a:spAutoFit/>
-          </a:bodyPr>
-          <a:lstStyle/>
-          <a:p>
-            <a:pPr marL="12700">
-              <a:lnSpc>
-                <a:spcPct val="100000"/>
-              </a:lnSpc>
-              <a:spcBef>
-                <a:spcPts val="90"/>
-              </a:spcBef>
-            </a:pPr>
-            <a:r>
-              <a:rPr dirty="0" sz="850" spc="-10" b="1">
-                <a:latin typeface="Tahoma"/>
-                <a:cs typeface="Tahoma"/>
-              </a:rPr>
-              <a:t>НАГРАДЫ</a:t>
-            </a:r>
-            <a:endParaRPr sz="850">
-              <a:latin typeface="Tahoma"/>
-              <a:cs typeface="Tahoma"/>
-            </a:endParaRPr>
-          </a:p>
-        </p:txBody>
-      </p:sp>
-      <p:sp>
-        <p:nvSpPr>
-          <p:cNvPr id="8" name="object 8" descr=""/>
           <p:cNvSpPr/>
           <p:nvPr/>
         </p:nvSpPr>
         <p:spPr>
           <a:xfrm>
-            <a:off x="1258684" y="1047724"/>
-            <a:ext cx="4445" cy="5633720"/>
+            <a:off x="1259268" y="1048308"/>
+            <a:ext cx="4445" cy="5575935"/>
           </a:xfrm>
           <a:custGeom>
             <a:avLst/>
@@ -11162,7 +12023,7 @@
             <a:cxnLst/>
             <a:rect l="l" t="t" r="r" b="b"/>
             <a:pathLst>
-              <a:path w="4444" h="5633720">
+              <a:path w="4444" h="5575934">
                 <a:moveTo>
                   <a:pt x="3819" y="0"/>
                 </a:moveTo>
@@ -11170,10 +12031,10 @@
                   <a:pt x="0" y="0"/>
                 </a:lnTo>
                 <a:lnTo>
-                  <a:pt x="0" y="5633135"/>
-                </a:lnTo>
-                <a:lnTo>
-                  <a:pt x="3819" y="5633135"/>
+                  <a:pt x="0" y="5575846"/>
+                </a:lnTo>
+                <a:lnTo>
+                  <a:pt x="3819" y="5575846"/>
                 </a:lnTo>
                 <a:lnTo>
                   <a:pt x="3819" y="0"/>
@@ -11194,13 +12055,13 @@
       </p:sp>
       <p:sp>
         <p:nvSpPr>
-          <p:cNvPr id="9" name="object 9" descr=""/>
+          <p:cNvPr id="8" name="object 8" descr=""/>
           <p:cNvSpPr txBox="1"/>
           <p:nvPr/>
         </p:nvSpPr>
         <p:spPr>
           <a:xfrm>
-            <a:off x="1326184" y="972204"/>
+            <a:off x="1326768" y="972788"/>
             <a:ext cx="2803525" cy="1456690"/>
           </a:xfrm>
           <a:prstGeom prst="rect">
@@ -12952,13 +13813,13 @@
       </p:sp>
       <p:sp>
         <p:nvSpPr>
-          <p:cNvPr id="10" name="object 10" descr=""/>
+          <p:cNvPr id="9" name="object 9" descr=""/>
           <p:cNvSpPr txBox="1"/>
           <p:nvPr/>
         </p:nvSpPr>
         <p:spPr>
           <a:xfrm>
-            <a:off x="1326184" y="4991581"/>
+            <a:off x="1326768" y="4992166"/>
             <a:ext cx="922655" cy="154305"/>
           </a:xfrm>
           <a:prstGeom prst="rect">
@@ -13009,13 +13870,13 @@
       </p:sp>
       <p:sp>
         <p:nvSpPr>
-          <p:cNvPr id="11" name="object 11" descr=""/>
+          <p:cNvPr id="10" name="object 10" descr=""/>
           <p:cNvSpPr txBox="1"/>
           <p:nvPr/>
         </p:nvSpPr>
         <p:spPr>
           <a:xfrm>
-            <a:off x="1326184" y="6194588"/>
+            <a:off x="1326768" y="6195173"/>
             <a:ext cx="1045210" cy="429895"/>
           </a:xfrm>
           <a:prstGeom prst="rect">
@@ -13179,13 +14040,13 @@
       </p:sp>
       <p:sp>
         <p:nvSpPr>
-          <p:cNvPr id="12" name="object 12" descr=""/>
+          <p:cNvPr id="11" name="object 11" descr=""/>
           <p:cNvSpPr txBox="1"/>
           <p:nvPr/>
         </p:nvSpPr>
         <p:spPr>
           <a:xfrm>
-            <a:off x="2722058" y="6359762"/>
+            <a:off x="2722642" y="6360346"/>
             <a:ext cx="1217930" cy="264795"/>
           </a:xfrm>
           <a:prstGeom prst="rect">
@@ -13335,7 +14196,7 @@
       </p:sp>
       <p:pic>
         <p:nvPicPr>
-          <p:cNvPr id="13" name="object 13" descr=""/>
+          <p:cNvPr id="12" name="object 12" descr=""/>
           <p:cNvPicPr/>
           <p:nvPr/>
         </p:nvPicPr>
@@ -13347,7 +14208,7 @@
         </p:blipFill>
         <p:spPr>
           <a:xfrm>
-            <a:off x="273062" y="207381"/>
+            <a:off x="273646" y="207966"/>
             <a:ext cx="688044" cy="688044"/>
           </a:xfrm>
           <a:prstGeom prst="rect">
@@ -13357,7 +14218,7 @@
       </p:pic>
       <p:sp>
         <p:nvSpPr>
-          <p:cNvPr id="14" name="object 14"/>
+          <p:cNvPr id="13" name="object 13"/>
           <p:cNvSpPr txBox="1">
             <a:spLocks noGrp="1"/>
           </p:cNvSpPr>
@@ -13369,7 +14230,7 @@
           <a:prstGeom prst="rect"/>
         </p:spPr>
         <p:txBody>
-          <a:bodyPr wrap="square" lIns="0" tIns="17145" rIns="0" bIns="0" rtlCol="0" vert="horz">
+          <a:bodyPr wrap="square" lIns="0" tIns="16510" rIns="0" bIns="0" rtlCol="0" vert="horz">
             <a:spAutoFit/>
           </a:bodyPr>
           <a:lstStyle/>
@@ -13379,7 +14240,7 @@
                 <a:spcPts val="1964"/>
               </a:lnSpc>
               <a:spcBef>
-                <a:spcPts val="135"/>
+                <a:spcPts val="130"/>
               </a:spcBef>
             </a:pPr>
             <a:r>
@@ -13410,13 +14271,13 @@
       </p:sp>
       <p:sp>
         <p:nvSpPr>
-          <p:cNvPr id="15" name="object 15" descr=""/>
+          <p:cNvPr id="14" name="object 14" descr=""/>
           <p:cNvSpPr txBox="1"/>
           <p:nvPr/>
         </p:nvSpPr>
         <p:spPr>
           <a:xfrm>
-            <a:off x="1326184" y="775325"/>
+            <a:off x="1326768" y="775910"/>
             <a:ext cx="1059815" cy="94615"/>
           </a:xfrm>
           <a:prstGeom prst="rect">
@@ -13691,27 +14552,27 @@
       </p:sp>
       <p:grpSp>
         <p:nvGrpSpPr>
-          <p:cNvPr id="16" name="object 16" descr=""/>
+          <p:cNvPr id="15" name="object 15" descr=""/>
           <p:cNvGrpSpPr/>
           <p:nvPr/>
         </p:nvGrpSpPr>
         <p:grpSpPr>
           <a:xfrm>
-            <a:off x="3736949" y="92646"/>
+            <a:off x="3737533" y="93231"/>
             <a:ext cx="321945" cy="153670"/>
-            <a:chOff x="3736949" y="92646"/>
+            <a:chOff x="3737533" y="93231"/>
             <a:chExt cx="321945" cy="153670"/>
           </a:xfrm>
         </p:grpSpPr>
         <p:sp>
           <p:nvSpPr>
-            <p:cNvPr id="17" name="object 17" descr=""/>
+            <p:cNvPr id="16" name="object 16" descr=""/>
             <p:cNvSpPr/>
             <p:nvPr/>
           </p:nvSpPr>
           <p:spPr>
             <a:xfrm>
-              <a:off x="3739172" y="94868"/>
+              <a:off x="3739755" y="95453"/>
               <a:ext cx="149225" cy="149225"/>
             </a:xfrm>
             <a:custGeom>
@@ -13729,13 +14590,13 @@
                     <a:pt x="148945" y="79362"/>
                   </a:lnTo>
                   <a:lnTo>
-                    <a:pt x="148463" y="84201"/>
+                    <a:pt x="148462" y="84200"/>
                   </a:lnTo>
                   <a:lnTo>
                     <a:pt x="147510" y="89001"/>
                   </a:lnTo>
                   <a:lnTo>
-                    <a:pt x="146558" y="93789"/>
+                    <a:pt x="146557" y="93789"/>
                   </a:lnTo>
                   <a:lnTo>
                     <a:pt x="145148" y="98450"/>
@@ -13747,6 +14608,15 @@
                     <a:pt x="141401" y="107492"/>
                   </a:lnTo>
                   <a:lnTo>
+                    <a:pt x="127126" y="127126"/>
+                  </a:lnTo>
+                  <a:lnTo>
+                    <a:pt x="123672" y="130581"/>
+                  </a:lnTo>
+                  <a:lnTo>
+                    <a:pt x="119913" y="133680"/>
+                  </a:lnTo>
+                  <a:lnTo>
                     <a:pt x="115849" y="136385"/>
                   </a:lnTo>
                   <a:lnTo>
@@ -13762,13 +14632,13 @@
                     <a:pt x="69583" y="148945"/>
                   </a:lnTo>
                   <a:lnTo>
-                    <a:pt x="64731" y="148463"/>
-                  </a:lnTo>
-                  <a:lnTo>
-                    <a:pt x="59944" y="147510"/>
-                  </a:lnTo>
-                  <a:lnTo>
-                    <a:pt x="55143" y="146558"/>
+                    <a:pt x="64731" y="148462"/>
+                  </a:lnTo>
+                  <a:lnTo>
+                    <a:pt x="59943" y="147510"/>
+                  </a:lnTo>
+                  <a:lnTo>
+                    <a:pt x="55143" y="146557"/>
                   </a:lnTo>
                   <a:lnTo>
                     <a:pt x="33096" y="136385"/>
@@ -13783,7 +14653,7 @@
                     <a:pt x="1435" y="89001"/>
                   </a:lnTo>
                   <a:lnTo>
-                    <a:pt x="469" y="84201"/>
+                    <a:pt x="469" y="84200"/>
                   </a:lnTo>
                   <a:lnTo>
                     <a:pt x="0" y="79362"/>
@@ -13798,7 +14668,7 @@
                     <a:pt x="469" y="64744"/>
                   </a:lnTo>
                   <a:lnTo>
-                    <a:pt x="1435" y="59944"/>
+                    <a:pt x="1435" y="59943"/>
                   </a:lnTo>
                   <a:lnTo>
                     <a:pt x="2387" y="55143"/>
@@ -13825,19 +14695,28 @@
                     <a:pt x="119913" y="15265"/>
                   </a:lnTo>
                   <a:lnTo>
-                    <a:pt x="143268" y="45974"/>
+                    <a:pt x="136385" y="33096"/>
+                  </a:lnTo>
+                  <a:lnTo>
+                    <a:pt x="139103" y="37160"/>
+                  </a:lnTo>
+                  <a:lnTo>
+                    <a:pt x="141401" y="41452"/>
+                  </a:lnTo>
+                  <a:lnTo>
+                    <a:pt x="143268" y="45973"/>
                   </a:lnTo>
                   <a:lnTo>
                     <a:pt x="145148" y="50495"/>
                   </a:lnTo>
                   <a:lnTo>
-                    <a:pt x="146558" y="55143"/>
-                  </a:lnTo>
-                  <a:lnTo>
-                    <a:pt x="147510" y="59944"/>
-                  </a:lnTo>
-                  <a:lnTo>
-                    <a:pt x="148463" y="64744"/>
+                    <a:pt x="146557" y="55143"/>
+                  </a:lnTo>
+                  <a:lnTo>
+                    <a:pt x="147510" y="59943"/>
+                  </a:lnTo>
+                  <a:lnTo>
+                    <a:pt x="148462" y="64744"/>
                   </a:lnTo>
                   <a:lnTo>
                     <a:pt x="148945" y="69583"/>
@@ -13863,13 +14742,13 @@
         </p:sp>
         <p:sp>
           <p:nvSpPr>
-            <p:cNvPr id="18" name="object 18" descr=""/>
+            <p:cNvPr id="17" name="object 17" descr=""/>
             <p:cNvSpPr/>
             <p:nvPr/>
           </p:nvSpPr>
           <p:spPr>
             <a:xfrm>
-              <a:off x="3907206" y="94868"/>
+              <a:off x="3907789" y="95453"/>
               <a:ext cx="149225" cy="149225"/>
             </a:xfrm>
             <a:custGeom>
@@ -13935,7 +14814,7 @@
                     <a:pt x="98463" y="3797"/>
                   </a:lnTo>
                   <a:lnTo>
-                    <a:pt x="84201" y="469"/>
+                    <a:pt x="84200" y="469"/>
                   </a:lnTo>
                   <a:lnTo>
                     <a:pt x="79362" y="0"/>
@@ -13956,13 +14835,13 @@
         </p:sp>
         <p:sp>
           <p:nvSpPr>
-            <p:cNvPr id="19" name="object 19" descr=""/>
+            <p:cNvPr id="18" name="object 18" descr=""/>
             <p:cNvSpPr/>
             <p:nvPr/>
           </p:nvSpPr>
           <p:spPr>
             <a:xfrm>
-              <a:off x="3907206" y="94868"/>
+              <a:off x="3907789" y="95453"/>
               <a:ext cx="149225" cy="149225"/>
             </a:xfrm>
             <a:custGeom>
@@ -13980,13 +14859,13 @@
                     <a:pt x="148945" y="79362"/>
                   </a:lnTo>
                   <a:lnTo>
-                    <a:pt x="148475" y="84201"/>
+                    <a:pt x="148475" y="84200"/>
                   </a:lnTo>
                   <a:lnTo>
                     <a:pt x="133680" y="119913"/>
                   </a:lnTo>
                   <a:lnTo>
-                    <a:pt x="127127" y="127127"/>
+                    <a:pt x="127126" y="127126"/>
                   </a:lnTo>
                   <a:lnTo>
                     <a:pt x="123672" y="130581"/>
@@ -14004,7 +14883,7 @@
                     <a:pt x="89001" y="147510"/>
                   </a:lnTo>
                   <a:lnTo>
-                    <a:pt x="84201" y="148463"/>
+                    <a:pt x="84200" y="148462"/>
                   </a:lnTo>
                   <a:lnTo>
                     <a:pt x="79362" y="148945"/>
@@ -14016,16 +14895,25 @@
                     <a:pt x="69583" y="148945"/>
                   </a:lnTo>
                   <a:lnTo>
+                    <a:pt x="64744" y="148462"/>
+                  </a:lnTo>
+                  <a:lnTo>
+                    <a:pt x="59943" y="147510"/>
+                  </a:lnTo>
+                  <a:lnTo>
+                    <a:pt x="55143" y="146557"/>
+                  </a:lnTo>
+                  <a:lnTo>
                     <a:pt x="33096" y="136385"/>
                   </a:lnTo>
                   <a:lnTo>
                     <a:pt x="29032" y="133680"/>
                   </a:lnTo>
                   <a:lnTo>
-                    <a:pt x="25273" y="130581"/>
-                  </a:lnTo>
-                  <a:lnTo>
-                    <a:pt x="21818" y="127127"/>
+                    <a:pt x="25272" y="130581"/>
+                  </a:lnTo>
+                  <a:lnTo>
+                    <a:pt x="21818" y="127126"/>
                   </a:lnTo>
                   <a:lnTo>
                     <a:pt x="18364" y="123672"/>
@@ -14055,7 +14943,7 @@
                     <a:pt x="1435" y="89001"/>
                   </a:lnTo>
                   <a:lnTo>
-                    <a:pt x="482" y="84201"/>
+                    <a:pt x="482" y="84200"/>
                   </a:lnTo>
                   <a:lnTo>
                     <a:pt x="0" y="79362"/>
@@ -14070,7 +14958,7 @@
                     <a:pt x="482" y="64744"/>
                   </a:lnTo>
                   <a:lnTo>
-                    <a:pt x="1435" y="59944"/>
+                    <a:pt x="1435" y="59943"/>
                   </a:lnTo>
                   <a:lnTo>
                     <a:pt x="2387" y="55143"/>
@@ -14079,7 +14967,7 @@
                     <a:pt x="3797" y="50495"/>
                   </a:lnTo>
                   <a:lnTo>
-                    <a:pt x="5676" y="45974"/>
+                    <a:pt x="5676" y="45973"/>
                   </a:lnTo>
                   <a:lnTo>
                     <a:pt x="7543" y="41452"/>
@@ -14094,7 +14982,7 @@
                     <a:pt x="15265" y="29032"/>
                   </a:lnTo>
                   <a:lnTo>
-                    <a:pt x="45974" y="5664"/>
+                    <a:pt x="45973" y="5664"/>
                   </a:lnTo>
                   <a:lnTo>
                     <a:pt x="69583" y="0"/>
@@ -14109,16 +14997,16 @@
                     <a:pt x="115849" y="12547"/>
                   </a:lnTo>
                   <a:lnTo>
-                    <a:pt x="127127" y="21805"/>
-                  </a:lnTo>
-                  <a:lnTo>
-                    <a:pt x="130594" y="25273"/>
+                    <a:pt x="127126" y="21805"/>
+                  </a:lnTo>
+                  <a:lnTo>
+                    <a:pt x="130594" y="25272"/>
                   </a:lnTo>
                   <a:lnTo>
                     <a:pt x="133680" y="29032"/>
                   </a:lnTo>
                   <a:lnTo>
-                    <a:pt x="136398" y="33096"/>
+                    <a:pt x="136397" y="33096"/>
                   </a:lnTo>
                   <a:lnTo>
                     <a:pt x="139115" y="37160"/>
@@ -14148,13 +15036,13 @@
       </p:grpSp>
       <p:sp>
         <p:nvSpPr>
-          <p:cNvPr id="20" name="object 20" descr=""/>
+          <p:cNvPr id="19" name="object 19" descr=""/>
           <p:cNvSpPr txBox="1"/>
           <p:nvPr/>
         </p:nvSpPr>
         <p:spPr>
           <a:xfrm>
-            <a:off x="3762755" y="122262"/>
+            <a:off x="3763340" y="122847"/>
             <a:ext cx="272415" cy="90170"/>
           </a:xfrm>
           <a:prstGeom prst="rect">
@@ -14208,336 +15096,14 @@
       </p:sp>
       <p:sp>
         <p:nvSpPr>
-          <p:cNvPr id="21" name="object 21" descr=""/>
+          <p:cNvPr id="20" name="object 20" descr=""/>
           <p:cNvSpPr txBox="1"/>
           <p:nvPr/>
         </p:nvSpPr>
         <p:spPr>
           <a:xfrm>
-            <a:off x="62067" y="1008290"/>
-            <a:ext cx="1080135" cy="794385"/>
-          </a:xfrm>
-          <a:prstGeom prst="rect">
-            <a:avLst/>
-          </a:prstGeom>
-        </p:spPr>
-        <p:txBody>
-          <a:bodyPr wrap="square" lIns="0" tIns="11430" rIns="0" bIns="0" rtlCol="0" vert="horz">
-            <a:spAutoFit/>
-          </a:bodyPr>
-          <a:lstStyle/>
-          <a:p>
-            <a:pPr marL="235585">
-              <a:lnSpc>
-                <a:spcPct val="100000"/>
-              </a:lnSpc>
-              <a:spcBef>
-                <a:spcPts val="90"/>
-              </a:spcBef>
-            </a:pPr>
-            <a:r>
-              <a:rPr dirty="0" sz="850" spc="-10" b="1">
-                <a:latin typeface="Tahoma"/>
-                <a:cs typeface="Tahoma"/>
-              </a:rPr>
-              <a:t>КОНТАКТЫ</a:t>
-            </a:r>
-            <a:endParaRPr sz="850">
-              <a:latin typeface="Tahoma"/>
-              <a:cs typeface="Tahoma"/>
-            </a:endParaRPr>
-          </a:p>
-          <a:p>
-            <a:pPr algn="r" marR="184785">
-              <a:lnSpc>
-                <a:spcPct val="100000"/>
-              </a:lnSpc>
-              <a:spcBef>
-                <a:spcPts val="464"/>
-              </a:spcBef>
-            </a:pPr>
-            <a:r>
-              <a:rPr dirty="0" sz="450" b="1">
-                <a:latin typeface="Tahoma"/>
-                <a:cs typeface="Tahoma"/>
-              </a:rPr>
-              <a:t>Адрес:</a:t>
-            </a:r>
-            <a:r>
-              <a:rPr dirty="0" sz="450" spc="430" b="1">
-                <a:latin typeface="Tahoma"/>
-                <a:cs typeface="Tahoma"/>
-              </a:rPr>
-              <a:t>  </a:t>
-            </a:r>
-            <a:r>
-              <a:rPr dirty="0" sz="450" spc="-20">
-                <a:latin typeface="Verdana"/>
-                <a:cs typeface="Verdana"/>
-                <a:hlinkClick r:id="rId6"/>
-              </a:rPr>
-              <a:t>ул.</a:t>
-            </a:r>
-            <a:r>
-              <a:rPr dirty="0" sz="450" spc="-30">
-                <a:latin typeface="Verdana"/>
-                <a:cs typeface="Verdana"/>
-                <a:hlinkClick r:id="rId6"/>
-              </a:rPr>
-              <a:t> </a:t>
-            </a:r>
-            <a:r>
-              <a:rPr dirty="0" sz="450" spc="-10">
-                <a:latin typeface="Verdana"/>
-                <a:cs typeface="Verdana"/>
-                <a:hlinkClick r:id="rId6"/>
-              </a:rPr>
-              <a:t>Сулаберидзе,</a:t>
-            </a:r>
-            <a:endParaRPr sz="450">
-              <a:latin typeface="Verdana"/>
-              <a:cs typeface="Verdana"/>
-            </a:endParaRPr>
-          </a:p>
-          <a:p>
-            <a:pPr algn="r" marR="240665">
-              <a:lnSpc>
-                <a:spcPct val="100000"/>
-              </a:lnSpc>
-              <a:spcBef>
-                <a:spcPts val="30"/>
-              </a:spcBef>
-            </a:pPr>
-            <a:r>
-              <a:rPr dirty="0" sz="450">
-                <a:latin typeface="Verdana"/>
-                <a:cs typeface="Verdana"/>
-                <a:hlinkClick r:id="rId6"/>
-              </a:rPr>
-              <a:t>Батуми,</a:t>
-            </a:r>
-            <a:r>
-              <a:rPr dirty="0" sz="450" spc="55">
-                <a:latin typeface="Verdana"/>
-                <a:cs typeface="Verdana"/>
-                <a:hlinkClick r:id="rId6"/>
-              </a:rPr>
-              <a:t> </a:t>
-            </a:r>
-            <a:r>
-              <a:rPr dirty="0" sz="450" spc="-10">
-                <a:latin typeface="Verdana"/>
-                <a:cs typeface="Verdana"/>
-                <a:hlinkClick r:id="rId6"/>
-              </a:rPr>
-              <a:t>Грузия</a:t>
-            </a:r>
-            <a:endParaRPr sz="450">
-              <a:latin typeface="Verdana"/>
-              <a:cs typeface="Verdana"/>
-            </a:endParaRPr>
-          </a:p>
-          <a:p>
-            <a:pPr algn="just" marL="350520" marR="5080" indent="-338455">
-              <a:lnSpc>
-                <a:spcPct val="105800"/>
-              </a:lnSpc>
-              <a:spcBef>
-                <a:spcPts val="150"/>
-              </a:spcBef>
-            </a:pPr>
-            <a:r>
-              <a:rPr dirty="0" sz="450" b="1">
-                <a:latin typeface="Tahoma"/>
-                <a:cs typeface="Tahoma"/>
-              </a:rPr>
-              <a:t>Email:</a:t>
-            </a:r>
-            <a:r>
-              <a:rPr dirty="0" sz="450" spc="495" b="1">
-                <a:latin typeface="Tahoma"/>
-                <a:cs typeface="Tahoma"/>
-              </a:rPr>
-              <a:t>  </a:t>
-            </a:r>
-            <a:r>
-              <a:rPr dirty="0" sz="450" spc="-10">
-                <a:latin typeface="Verdana"/>
-                <a:cs typeface="Verdana"/>
-                <a:hlinkClick r:id="rId7"/>
-              </a:rPr>
-              <a:t>nick.konstantinov.job@</a:t>
-            </a:r>
-            <a:r>
-              <a:rPr dirty="0" sz="450" spc="500">
-                <a:latin typeface="Verdana"/>
-                <a:cs typeface="Verdana"/>
-                <a:hlinkClick r:id="rId7"/>
-              </a:rPr>
-              <a:t> </a:t>
-            </a:r>
-            <a:r>
-              <a:rPr dirty="0" sz="450" spc="-10">
-                <a:latin typeface="Verdana"/>
-                <a:cs typeface="Verdana"/>
-                <a:hlinkClick r:id="rId7"/>
-              </a:rPr>
-              <a:t>gmail.com</a:t>
-            </a:r>
-            <a:endParaRPr sz="450">
-              <a:latin typeface="Verdana"/>
-              <a:cs typeface="Verdana"/>
-            </a:endParaRPr>
-          </a:p>
-          <a:p>
-            <a:pPr algn="just" marL="12700" marR="76200">
-              <a:lnSpc>
-                <a:spcPct val="133700"/>
-              </a:lnSpc>
-            </a:pPr>
-            <a:r>
-              <a:rPr dirty="0" sz="450" b="1">
-                <a:latin typeface="Tahoma"/>
-                <a:cs typeface="Tahoma"/>
-              </a:rPr>
-              <a:t>Telegram:</a:t>
-            </a:r>
-            <a:r>
-              <a:rPr dirty="0" sz="450" spc="204" b="1">
-                <a:latin typeface="Tahoma"/>
-                <a:cs typeface="Tahoma"/>
-              </a:rPr>
-              <a:t> </a:t>
-            </a:r>
-            <a:r>
-              <a:rPr dirty="0" sz="450" spc="-10">
-                <a:latin typeface="Verdana"/>
-                <a:cs typeface="Verdana"/>
-                <a:hlinkClick r:id="rId8"/>
-              </a:rPr>
-              <a:t>@nick_konstantinov</a:t>
-            </a:r>
-            <a:r>
-              <a:rPr dirty="0" sz="450" spc="500">
-                <a:latin typeface="Verdana"/>
-                <a:cs typeface="Verdana"/>
-              </a:rPr>
-              <a:t> </a:t>
-            </a:r>
-            <a:r>
-              <a:rPr dirty="0" sz="450" spc="10" b="1">
-                <a:latin typeface="Tahoma"/>
-                <a:cs typeface="Tahoma"/>
-              </a:rPr>
-              <a:t>LinkedIn:</a:t>
-            </a:r>
-            <a:r>
-              <a:rPr dirty="0" sz="450" spc="280" b="1">
-                <a:latin typeface="Tahoma"/>
-                <a:cs typeface="Tahoma"/>
-              </a:rPr>
-              <a:t> </a:t>
-            </a:r>
-            <a:r>
-              <a:rPr dirty="0" sz="450" spc="10">
-                <a:latin typeface="Verdana"/>
-                <a:cs typeface="Verdana"/>
-                <a:hlinkClick r:id="rId9"/>
-              </a:rPr>
-              <a:t>Mikita</a:t>
-            </a:r>
-            <a:r>
-              <a:rPr dirty="0" sz="450" spc="-25">
-                <a:latin typeface="Verdana"/>
-                <a:cs typeface="Verdana"/>
-                <a:hlinkClick r:id="rId9"/>
-              </a:rPr>
-              <a:t> </a:t>
-            </a:r>
-            <a:r>
-              <a:rPr dirty="0" sz="450" spc="-10">
-                <a:latin typeface="Verdana"/>
-                <a:cs typeface="Verdana"/>
-                <a:hlinkClick r:id="rId9"/>
-              </a:rPr>
-              <a:t>Kanstantsinau</a:t>
-            </a:r>
-            <a:r>
-              <a:rPr dirty="0" sz="450" spc="500">
-                <a:latin typeface="Verdana"/>
-                <a:cs typeface="Verdana"/>
-              </a:rPr>
-              <a:t> </a:t>
-            </a:r>
-            <a:r>
-              <a:rPr dirty="0" sz="450" b="1">
-                <a:latin typeface="Tahoma"/>
-                <a:cs typeface="Tahoma"/>
-              </a:rPr>
-              <a:t>GitHub:</a:t>
-            </a:r>
-            <a:r>
-              <a:rPr dirty="0" sz="450" spc="355" b="1">
-                <a:latin typeface="Tahoma"/>
-                <a:cs typeface="Tahoma"/>
-              </a:rPr>
-              <a:t>  </a:t>
-            </a:r>
-            <a:r>
-              <a:rPr dirty="0" sz="450">
-                <a:latin typeface="Verdana"/>
-                <a:cs typeface="Verdana"/>
-                <a:hlinkClick r:id="rId10"/>
-              </a:rPr>
-              <a:t>nick-</a:t>
-            </a:r>
-            <a:r>
-              <a:rPr dirty="0" sz="450" spc="-10">
-                <a:latin typeface="Verdana"/>
-                <a:cs typeface="Verdana"/>
-                <a:hlinkClick r:id="rId10"/>
-              </a:rPr>
-              <a:t>konstantinov</a:t>
-            </a:r>
-            <a:endParaRPr sz="450">
-              <a:latin typeface="Verdana"/>
-              <a:cs typeface="Verdana"/>
-            </a:endParaRPr>
-          </a:p>
-        </p:txBody>
-      </p:sp>
-      <p:pic>
-        <p:nvPicPr>
-          <p:cNvPr id="22" name="object 22" descr=""/>
-          <p:cNvPicPr/>
-          <p:nvPr/>
-        </p:nvPicPr>
-        <p:blipFill>
-          <a:blip r:embed="rId11" cstate="print"/>
-          <a:stretch>
-            <a:fillRect/>
-          </a:stretch>
-        </p:blipFill>
-        <p:spPr>
-          <a:xfrm>
-            <a:off x="74764" y="2044509"/>
-            <a:ext cx="106933" cy="106933"/>
-          </a:xfrm>
-          <a:prstGeom prst="rect">
-            <a:avLst/>
-          </a:prstGeom>
-        </p:spPr>
-      </p:pic>
-      <p:sp>
-        <p:nvSpPr>
-          <p:cNvPr id="23" name="object 23" descr=""/>
-          <p:cNvSpPr txBox="1"/>
-          <p:nvPr/>
-        </p:nvSpPr>
-        <p:spPr>
-          <a:xfrm>
-            <a:off x="146085" y="1856131"/>
-            <a:ext cx="965200" cy="285115"/>
+            <a:off x="286067" y="1008875"/>
+            <a:ext cx="856615" cy="446405"/>
           </a:xfrm>
           <a:prstGeom prst="rect">
             <a:avLst/>
@@ -14558,25 +15124,11 @@
               </a:spcBef>
             </a:pPr>
             <a:r>
-              <a:rPr dirty="0" sz="850" b="1">
-                <a:latin typeface="Tahoma"/>
-                <a:cs typeface="Tahoma"/>
-              </a:rPr>
-              <a:t>ПРОФ.</a:t>
-            </a:r>
-            <a:r>
-              <a:rPr dirty="0" sz="850" spc="100" b="1">
-                <a:latin typeface="Tahoma"/>
-                <a:cs typeface="Tahoma"/>
-              </a:rPr>
-              <a:t> </a:t>
-            </a:r>
-            <a:r>
               <a:rPr dirty="0" sz="850" spc="-10" b="1">
                 <a:latin typeface="Tahoma"/>
                 <a:cs typeface="Tahoma"/>
               </a:rPr>
-              <a:t>НАВЫКИ</a:t>
+              <a:t>КОНТАКТЫ</a:t>
             </a:r>
             <a:endParaRPr sz="850">
               <a:latin typeface="Tahoma"/>
@@ -14584,20 +15136,215 @@
             </a:endParaRPr>
           </a:p>
           <a:p>
-            <a:pPr marL="54610">
+            <a:pPr marL="127000">
               <a:lnSpc>
                 <a:spcPct val="100000"/>
               </a:lnSpc>
               <a:spcBef>
-                <a:spcPts val="495"/>
+                <a:spcPts val="464"/>
               </a:spcBef>
             </a:pPr>
             <a:r>
+              <a:rPr dirty="0" sz="450">
+                <a:latin typeface="Verdana"/>
+                <a:cs typeface="Verdana"/>
+                <a:hlinkClick r:id="rId6"/>
+              </a:rPr>
+              <a:t>г.Батуми,</a:t>
+            </a:r>
+            <a:r>
+              <a:rPr dirty="0" sz="450" spc="-25">
+                <a:latin typeface="Verdana"/>
+                <a:cs typeface="Verdana"/>
+                <a:hlinkClick r:id="rId6"/>
+              </a:rPr>
+              <a:t> </a:t>
+            </a:r>
+            <a:r>
               <a:rPr dirty="0" sz="450" spc="-10">
                 <a:latin typeface="Verdana"/>
                 <a:cs typeface="Verdana"/>
-              </a:rPr>
-              <a:t>HTML5</a:t>
+                <a:hlinkClick r:id="rId6"/>
+              </a:rPr>
+              <a:t>Грузия</a:t>
+            </a:r>
+            <a:endParaRPr sz="450">
+              <a:latin typeface="Verdana"/>
+              <a:cs typeface="Verdana"/>
+            </a:endParaRPr>
+          </a:p>
+          <a:p>
+            <a:pPr marL="127000" marR="5080">
+              <a:lnSpc>
+                <a:spcPct val="105800"/>
+              </a:lnSpc>
+              <a:spcBef>
+                <a:spcPts val="150"/>
+              </a:spcBef>
+            </a:pPr>
+            <a:r>
+              <a:rPr dirty="0" sz="450" spc="-10">
+                <a:latin typeface="Verdana"/>
+                <a:cs typeface="Verdana"/>
+                <a:hlinkClick r:id="rId7"/>
+              </a:rPr>
+              <a:t>nick.konstantinov.job@</a:t>
+            </a:r>
+            <a:r>
+              <a:rPr dirty="0" sz="450" spc="500">
+                <a:latin typeface="Verdana"/>
+                <a:cs typeface="Verdana"/>
+                <a:hlinkClick r:id="rId7"/>
+              </a:rPr>
+              <a:t> </a:t>
+            </a:r>
+            <a:r>
+              <a:rPr dirty="0" sz="450" spc="-10">
+                <a:latin typeface="Verdana"/>
+                <a:cs typeface="Verdana"/>
+                <a:hlinkClick r:id="rId7"/>
+              </a:rPr>
+              <a:t>gmail.com</a:t>
+            </a:r>
+            <a:endParaRPr sz="450">
+              <a:latin typeface="Verdana"/>
+              <a:cs typeface="Verdana"/>
+            </a:endParaRPr>
+          </a:p>
+        </p:txBody>
+      </p:sp>
+      <p:sp>
+        <p:nvSpPr>
+          <p:cNvPr id="21" name="object 21" descr=""/>
+          <p:cNvSpPr txBox="1"/>
+          <p:nvPr/>
+        </p:nvSpPr>
+        <p:spPr>
+          <a:xfrm>
+            <a:off x="62651" y="1429736"/>
+            <a:ext cx="1008380" cy="300990"/>
+          </a:xfrm>
+          <a:prstGeom prst="rect">
+            <a:avLst/>
+          </a:prstGeom>
+        </p:spPr>
+        <p:txBody>
+          <a:bodyPr wrap="square" lIns="0" tIns="11430" rIns="0" bIns="0" rtlCol="0" vert="horz">
+            <a:spAutoFit/>
+          </a:bodyPr>
+          <a:lstStyle/>
+          <a:p>
+            <a:pPr algn="just" marL="12700" marR="5080">
+              <a:lnSpc>
+                <a:spcPct val="133700"/>
+              </a:lnSpc>
+              <a:spcBef>
+                <a:spcPts val="90"/>
+              </a:spcBef>
+            </a:pPr>
+            <a:r>
+              <a:rPr dirty="0" sz="450" b="1">
+                <a:latin typeface="Tahoma"/>
+                <a:cs typeface="Tahoma"/>
+              </a:rPr>
+              <a:t>Telegram:</a:t>
+            </a:r>
+            <a:r>
+              <a:rPr dirty="0" sz="450" spc="204" b="1">
+                <a:latin typeface="Tahoma"/>
+                <a:cs typeface="Tahoma"/>
+              </a:rPr>
+              <a:t> </a:t>
+            </a:r>
+            <a:r>
+              <a:rPr dirty="0" sz="450" spc="-10">
+                <a:latin typeface="Verdana"/>
+                <a:cs typeface="Verdana"/>
+                <a:hlinkClick r:id="rId8"/>
+              </a:rPr>
+              <a:t>@nick_konstantinov</a:t>
+            </a:r>
+            <a:r>
+              <a:rPr dirty="0" sz="450" spc="500">
+                <a:latin typeface="Verdana"/>
+                <a:cs typeface="Verdana"/>
+              </a:rPr>
+              <a:t> </a:t>
+            </a:r>
+            <a:r>
+              <a:rPr dirty="0" sz="450" spc="10" b="1">
+                <a:latin typeface="Tahoma"/>
+                <a:cs typeface="Tahoma"/>
+              </a:rPr>
+              <a:t>LinkedIn:</a:t>
+            </a:r>
+            <a:r>
+              <a:rPr dirty="0" sz="450" spc="280" b="1">
+                <a:latin typeface="Tahoma"/>
+                <a:cs typeface="Tahoma"/>
+              </a:rPr>
+              <a:t> </a:t>
+            </a:r>
+            <a:r>
+              <a:rPr dirty="0" sz="450" spc="10">
+                <a:latin typeface="Verdana"/>
+                <a:cs typeface="Verdana"/>
+                <a:hlinkClick r:id="rId9"/>
+              </a:rPr>
+              <a:t>Mikita</a:t>
+            </a:r>
+            <a:r>
+              <a:rPr dirty="0" sz="450" spc="-25">
+                <a:latin typeface="Verdana"/>
+                <a:cs typeface="Verdana"/>
+                <a:hlinkClick r:id="rId9"/>
+              </a:rPr>
+              <a:t> </a:t>
+            </a:r>
+            <a:r>
+              <a:rPr dirty="0" sz="450" spc="-10">
+                <a:latin typeface="Verdana"/>
+                <a:cs typeface="Verdana"/>
+                <a:hlinkClick r:id="rId9"/>
+              </a:rPr>
+              <a:t>Kanstantsinau</a:t>
+            </a:r>
+            <a:r>
+              <a:rPr dirty="0" sz="450" spc="500">
+                <a:latin typeface="Verdana"/>
+                <a:cs typeface="Verdana"/>
+              </a:rPr>
+              <a:t> </a:t>
+            </a:r>
+            <a:r>
+              <a:rPr dirty="0" sz="450" b="1">
+                <a:latin typeface="Tahoma"/>
+                <a:cs typeface="Tahoma"/>
+              </a:rPr>
+              <a:t>GitHub:</a:t>
+            </a:r>
+            <a:r>
+              <a:rPr dirty="0" sz="450" spc="355" b="1">
+                <a:latin typeface="Tahoma"/>
+                <a:cs typeface="Tahoma"/>
+              </a:rPr>
+              <a:t>  </a:t>
+            </a:r>
+            <a:r>
+              <a:rPr dirty="0" sz="450">
+                <a:latin typeface="Verdana"/>
+                <a:cs typeface="Verdana"/>
+                <a:hlinkClick r:id="rId10"/>
+              </a:rPr>
+              <a:t>nick-</a:t>
+            </a:r>
+            <a:r>
+              <a:rPr dirty="0" sz="450" spc="-10">
+                <a:latin typeface="Verdana"/>
+                <a:cs typeface="Verdana"/>
+                <a:hlinkClick r:id="rId10"/>
+              </a:rPr>
+              <a:t>konstantinov</a:t>
             </a:r>
             <a:endParaRPr sz="450">
               <a:latin typeface="Verdana"/>
@@ -14608,27 +15355,49 @@
       </p:sp>
       <p:grpSp>
         <p:nvGrpSpPr>
-          <p:cNvPr id="24" name="object 24" descr=""/>
+          <p:cNvPr id="22" name="object 22" descr=""/>
           <p:cNvGrpSpPr/>
           <p:nvPr/>
         </p:nvGrpSpPr>
         <p:grpSpPr>
           <a:xfrm>
-            <a:off x="74764" y="2174357"/>
-            <a:ext cx="1108075" cy="156845"/>
-            <a:chOff x="74764" y="2174357"/>
-            <a:chExt cx="1108075" cy="156845"/>
+            <a:off x="75349" y="1972627"/>
+            <a:ext cx="1108075" cy="820419"/>
+            <a:chOff x="75349" y="1972627"/>
+            <a:chExt cx="1108075" cy="820419"/>
           </a:xfrm>
         </p:grpSpPr>
+        <p:pic>
+          <p:nvPicPr>
+            <p:cNvPr id="23" name="object 23" descr=""/>
+            <p:cNvPicPr/>
+            <p:nvPr/>
+          </p:nvPicPr>
+          <p:blipFill>
+            <a:blip r:embed="rId11" cstate="print"/>
+            <a:stretch>
+              <a:fillRect/>
+            </a:stretch>
+          </p:blipFill>
+          <p:spPr>
+            <a:xfrm>
+              <a:off x="91020" y="1972627"/>
+              <a:ext cx="75603" cy="106730"/>
+            </a:xfrm>
+            <a:prstGeom prst="rect">
+              <a:avLst/>
+            </a:prstGeom>
+          </p:spPr>
+        </p:pic>
         <p:sp>
           <p:nvSpPr>
-            <p:cNvPr id="25" name="object 25" descr=""/>
+            <p:cNvPr id="24" name="object 24" descr=""/>
             <p:cNvSpPr/>
             <p:nvPr/>
           </p:nvSpPr>
           <p:spPr>
             <a:xfrm>
-              <a:off x="74765" y="2174357"/>
+              <a:off x="75349" y="2102374"/>
               <a:ext cx="1108075" cy="15875"/>
             </a:xfrm>
             <a:custGeom>
@@ -14670,13 +15439,13 @@
         </p:sp>
         <p:sp>
           <p:nvSpPr>
-            <p:cNvPr id="26" name="object 26" descr=""/>
+            <p:cNvPr id="25" name="object 25" descr=""/>
             <p:cNvSpPr/>
             <p:nvPr/>
           </p:nvSpPr>
           <p:spPr>
             <a:xfrm>
-              <a:off x="74765" y="2174357"/>
+              <a:off x="75349" y="2102374"/>
               <a:ext cx="1054100" cy="15875"/>
             </a:xfrm>
             <a:custGeom>
@@ -14718,7 +15487,7 @@
         </p:sp>
         <p:pic>
           <p:nvPicPr>
-            <p:cNvPr id="27" name="object 27" descr=""/>
+            <p:cNvPr id="26" name="object 26" descr=""/>
             <p:cNvPicPr/>
             <p:nvPr/>
           </p:nvPicPr>
@@ -14730,79 +15499,132 @@
           </p:blipFill>
           <p:spPr>
             <a:xfrm>
-              <a:off x="74764" y="2223998"/>
-              <a:ext cx="106933" cy="106933"/>
+              <a:off x="90728" y="2152129"/>
+              <a:ext cx="76187" cy="106718"/>
             </a:xfrm>
             <a:prstGeom prst="rect">
               <a:avLst/>
             </a:prstGeom>
           </p:spPr>
         </p:pic>
-      </p:grpSp>
-      <p:sp>
-        <p:nvSpPr>
-          <p:cNvPr id="28" name="object 28" descr=""/>
-          <p:cNvSpPr txBox="1"/>
-          <p:nvPr/>
-        </p:nvSpPr>
-        <p:spPr>
-          <a:xfrm>
-            <a:off x="188099" y="2226579"/>
-            <a:ext cx="690245" cy="94615"/>
-          </a:xfrm>
-          <a:prstGeom prst="rect">
-            <a:avLst/>
-          </a:prstGeom>
-        </p:spPr>
-        <p:txBody>
-          <a:bodyPr wrap="square" lIns="0" tIns="12700" rIns="0" bIns="0" rtlCol="0" vert="horz">
-            <a:spAutoFit/>
-          </a:bodyPr>
-          <a:lstStyle/>
-          <a:p>
-            <a:pPr marL="12700">
-              <a:lnSpc>
-                <a:spcPct val="100000"/>
-              </a:lnSpc>
-              <a:spcBef>
-                <a:spcPts val="100"/>
-              </a:spcBef>
-            </a:pPr>
-            <a:r>
-              <a:rPr dirty="0" sz="450" spc="-35">
-                <a:latin typeface="Verdana"/>
-                <a:cs typeface="Verdana"/>
-              </a:rPr>
-              <a:t>CSS3 </a:t>
-            </a:r>
-            <a:r>
-              <a:rPr dirty="0" sz="450" spc="-30">
-                <a:latin typeface="Verdana"/>
-                <a:cs typeface="Verdana"/>
-              </a:rPr>
-              <a:t>(SCSS/SASS/LESS)</a:t>
-            </a:r>
-            <a:endParaRPr sz="450">
-              <a:latin typeface="Verdana"/>
-              <a:cs typeface="Verdana"/>
-            </a:endParaRPr>
-          </a:p>
-        </p:txBody>
-      </p:sp>
-      <p:grpSp>
-        <p:nvGrpSpPr>
-          <p:cNvPr id="29" name="object 29" descr=""/>
-          <p:cNvGrpSpPr/>
-          <p:nvPr/>
-        </p:nvGrpSpPr>
-        <p:grpSpPr>
-          <a:xfrm>
-            <a:off x="74764" y="2353846"/>
-            <a:ext cx="1108075" cy="156845"/>
-            <a:chOff x="74764" y="2353846"/>
-            <a:chExt cx="1108075" cy="156845"/>
-          </a:xfrm>
-        </p:grpSpPr>
+        <p:sp>
+          <p:nvSpPr>
+            <p:cNvPr id="27" name="object 27" descr=""/>
+            <p:cNvSpPr/>
+            <p:nvPr/>
+          </p:nvSpPr>
+          <p:spPr>
+            <a:xfrm>
+              <a:off x="75349" y="2281876"/>
+              <a:ext cx="1108075" cy="15875"/>
+            </a:xfrm>
+            <a:custGeom>
+              <a:avLst/>
+              <a:gdLst/>
+              <a:ahLst/>
+              <a:cxnLst/>
+              <a:rect l="l" t="t" r="r" b="b"/>
+              <a:pathLst>
+                <a:path w="1108075" h="15875">
+                  <a:moveTo>
+                    <a:pt x="1107528" y="0"/>
+                  </a:moveTo>
+                  <a:lnTo>
+                    <a:pt x="0" y="0"/>
+                  </a:lnTo>
+                  <a:lnTo>
+                    <a:pt x="0" y="15274"/>
+                  </a:lnTo>
+                  <a:lnTo>
+                    <a:pt x="1107528" y="15274"/>
+                  </a:lnTo>
+                  <a:lnTo>
+                    <a:pt x="1107528" y="0"/>
+                  </a:lnTo>
+                  <a:close/>
+                </a:path>
+              </a:pathLst>
+            </a:custGeom>
+            <a:solidFill>
+              <a:srgbClr val="DADADA"/>
+            </a:solidFill>
+          </p:spPr>
+          <p:txBody>
+            <a:bodyPr wrap="square" lIns="0" tIns="0" rIns="0" bIns="0" rtlCol="0"/>
+            <a:lstStyle/>
+            <a:p/>
+          </p:txBody>
+        </p:sp>
+        <p:sp>
+          <p:nvSpPr>
+            <p:cNvPr id="28" name="object 28" descr=""/>
+            <p:cNvSpPr/>
+            <p:nvPr/>
+          </p:nvSpPr>
+          <p:spPr>
+            <a:xfrm>
+              <a:off x="75349" y="2281876"/>
+              <a:ext cx="1054100" cy="15875"/>
+            </a:xfrm>
+            <a:custGeom>
+              <a:avLst/>
+              <a:gdLst/>
+              <a:ahLst/>
+              <a:cxnLst/>
+              <a:rect l="l" t="t" r="r" b="b"/>
+              <a:pathLst>
+                <a:path w="1054100" h="15875">
+                  <a:moveTo>
+                    <a:pt x="1054065" y="0"/>
+                  </a:moveTo>
+                  <a:lnTo>
+                    <a:pt x="0" y="0"/>
+                  </a:lnTo>
+                  <a:lnTo>
+                    <a:pt x="0" y="15274"/>
+                  </a:lnTo>
+                  <a:lnTo>
+                    <a:pt x="1054065" y="15274"/>
+                  </a:lnTo>
+                  <a:lnTo>
+                    <a:pt x="1054065" y="0"/>
+                  </a:lnTo>
+                  <a:close/>
+                </a:path>
+              </a:pathLst>
+            </a:custGeom>
+            <a:solidFill>
+              <a:srgbClr val="000000"/>
+            </a:solidFill>
+          </p:spPr>
+          <p:txBody>
+            <a:bodyPr wrap="square" lIns="0" tIns="0" rIns="0" bIns="0" rtlCol="0"/>
+            <a:lstStyle/>
+            <a:p/>
+          </p:txBody>
+        </p:sp>
+        <p:pic>
+          <p:nvPicPr>
+            <p:cNvPr id="29" name="object 29" descr=""/>
+            <p:cNvPicPr/>
+            <p:nvPr/>
+          </p:nvPicPr>
+          <p:blipFill>
+            <a:blip r:embed="rId13" cstate="print"/>
+            <a:stretch>
+              <a:fillRect/>
+            </a:stretch>
+          </p:blipFill>
+          <p:spPr>
+            <a:xfrm>
+              <a:off x="82042" y="2338196"/>
+              <a:ext cx="93560" cy="93573"/>
+            </a:xfrm>
+            <a:prstGeom prst="rect">
+              <a:avLst/>
+            </a:prstGeom>
+          </p:spPr>
+        </p:pic>
         <p:sp>
           <p:nvSpPr>
             <p:cNvPr id="30" name="object 30" descr=""/>
@@ -14811,7 +15633,7 @@
           </p:nvSpPr>
           <p:spPr>
             <a:xfrm>
-              <a:off x="74765" y="2353846"/>
+              <a:off x="75349" y="2461365"/>
               <a:ext cx="1108075" cy="15875"/>
             </a:xfrm>
             <a:custGeom>
@@ -14859,8 +15681,8 @@
           </p:nvSpPr>
           <p:spPr>
             <a:xfrm>
-              <a:off x="74765" y="2353846"/>
-              <a:ext cx="1054100" cy="15875"/>
+              <a:off x="75349" y="2461365"/>
+              <a:ext cx="943610" cy="15875"/>
             </a:xfrm>
             <a:custGeom>
               <a:avLst/>
@@ -14869,9 +15691,9 @@
               <a:cxnLst/>
               <a:rect l="l" t="t" r="r" b="b"/>
               <a:pathLst>
-                <a:path w="1054100" h="15875">
+                <a:path w="943610" h="15875">
                   <a:moveTo>
-                    <a:pt x="1054065" y="0"/>
+                    <a:pt x="943312" y="0"/>
                   </a:moveTo>
                   <a:lnTo>
                     <a:pt x="0" y="0"/>
@@ -14880,10 +15702,128 @@
                     <a:pt x="0" y="15274"/>
                   </a:lnTo>
                   <a:lnTo>
-                    <a:pt x="1054065" y="15274"/>
-                  </a:lnTo>
-                  <a:lnTo>
-                    <a:pt x="1054065" y="0"/>
+                    <a:pt x="943312" y="15274"/>
+                  </a:lnTo>
+                  <a:lnTo>
+                    <a:pt x="943312" y="0"/>
+                  </a:lnTo>
+                  <a:close/>
+                </a:path>
+              </a:pathLst>
+            </a:custGeom>
+            <a:solidFill>
+              <a:srgbClr val="000000"/>
+            </a:solidFill>
+          </p:spPr>
+          <p:txBody>
+            <a:bodyPr wrap="square" lIns="0" tIns="0" rIns="0" bIns="0" rtlCol="0"/>
+            <a:lstStyle/>
+            <a:p/>
+          </p:txBody>
+        </p:sp>
+        <p:sp>
+          <p:nvSpPr>
+            <p:cNvPr id="32" name="object 32" descr=""/>
+            <p:cNvSpPr/>
+            <p:nvPr/>
+          </p:nvSpPr>
+          <p:spPr>
+            <a:xfrm>
+              <a:off x="75349" y="2640866"/>
+              <a:ext cx="1108075" cy="15875"/>
+            </a:xfrm>
+            <a:custGeom>
+              <a:avLst/>
+              <a:gdLst/>
+              <a:ahLst/>
+              <a:cxnLst/>
+              <a:rect l="l" t="t" r="r" b="b"/>
+              <a:pathLst>
+                <a:path w="1108075" h="15875">
+                  <a:moveTo>
+                    <a:pt x="1107528" y="0"/>
+                  </a:moveTo>
+                  <a:lnTo>
+                    <a:pt x="0" y="0"/>
+                  </a:lnTo>
+                  <a:lnTo>
+                    <a:pt x="0" y="15274"/>
+                  </a:lnTo>
+                  <a:lnTo>
+                    <a:pt x="1107528" y="15274"/>
+                  </a:lnTo>
+                  <a:lnTo>
+                    <a:pt x="1107528" y="0"/>
+                  </a:lnTo>
+                  <a:close/>
+                </a:path>
+              </a:pathLst>
+            </a:custGeom>
+            <a:solidFill>
+              <a:srgbClr val="DADADA"/>
+            </a:solidFill>
+          </p:spPr>
+          <p:txBody>
+            <a:bodyPr wrap="square" lIns="0" tIns="0" rIns="0" bIns="0" rtlCol="0"/>
+            <a:lstStyle/>
+            <a:p/>
+          </p:txBody>
+        </p:sp>
+        <p:pic>
+          <p:nvPicPr>
+            <p:cNvPr id="33" name="object 33" descr=""/>
+            <p:cNvPicPr/>
+            <p:nvPr/>
+          </p:nvPicPr>
+          <p:blipFill>
+            <a:blip r:embed="rId14" cstate="print"/>
+            <a:stretch>
+              <a:fillRect/>
+            </a:stretch>
+          </p:blipFill>
+          <p:spPr>
+            <a:xfrm>
+              <a:off x="79171" y="2514828"/>
+              <a:ext cx="98717" cy="98717"/>
+            </a:xfrm>
+            <a:prstGeom prst="rect">
+              <a:avLst/>
+            </a:prstGeom>
+          </p:spPr>
+        </p:pic>
+        <p:sp>
+          <p:nvSpPr>
+            <p:cNvPr id="34" name="object 34" descr=""/>
+            <p:cNvSpPr/>
+            <p:nvPr/>
+          </p:nvSpPr>
+          <p:spPr>
+            <a:xfrm>
+              <a:off x="75349" y="2640866"/>
+              <a:ext cx="775335" cy="15875"/>
+            </a:xfrm>
+            <a:custGeom>
+              <a:avLst/>
+              <a:gdLst/>
+              <a:ahLst/>
+              <a:cxnLst/>
+              <a:rect l="l" t="t" r="r" b="b"/>
+              <a:pathLst>
+                <a:path w="775335" h="15875">
+                  <a:moveTo>
+                    <a:pt x="775270" y="0"/>
+                  </a:moveTo>
+                  <a:lnTo>
+                    <a:pt x="0" y="0"/>
+                  </a:lnTo>
+                  <a:lnTo>
+                    <a:pt x="0" y="15274"/>
+                  </a:lnTo>
+                  <a:lnTo>
+                    <a:pt x="775270" y="15274"/>
+                  </a:lnTo>
+                  <a:lnTo>
+                    <a:pt x="775270" y="0"/>
                   </a:lnTo>
                   <a:close/>
                 </a:path>
@@ -14901,20 +15841,20 @@
         </p:sp>
         <p:pic>
           <p:nvPicPr>
-            <p:cNvPr id="32" name="object 32" descr=""/>
+            <p:cNvPr id="35" name="object 35" descr=""/>
             <p:cNvPicPr/>
             <p:nvPr/>
           </p:nvPicPr>
           <p:blipFill>
-            <a:blip r:embed="rId13" cstate="print"/>
+            <a:blip r:embed="rId15" cstate="print"/>
             <a:stretch>
               <a:fillRect/>
             </a:stretch>
           </p:blipFill>
           <p:spPr>
             <a:xfrm>
-              <a:off x="74764" y="2403500"/>
-              <a:ext cx="106933" cy="106933"/>
+              <a:off x="84264" y="2694965"/>
+              <a:ext cx="89115" cy="98031"/>
             </a:xfrm>
             <a:prstGeom prst="rect">
               <a:avLst/>
@@ -14924,14 +15864,953 @@
       </p:grpSp>
       <p:sp>
         <p:nvSpPr>
-          <p:cNvPr id="33" name="object 33" descr=""/>
+          <p:cNvPr id="36" name="object 36" descr=""/>
           <p:cNvSpPr txBox="1"/>
           <p:nvPr/>
         </p:nvSpPr>
         <p:spPr>
           <a:xfrm>
-            <a:off x="188099" y="2406069"/>
-            <a:ext cx="320040" cy="94615"/>
+            <a:off x="146669" y="1784146"/>
+            <a:ext cx="1047750" cy="1003300"/>
+          </a:xfrm>
+          <a:prstGeom prst="rect">
+            <a:avLst/>
+          </a:prstGeom>
+        </p:spPr>
+        <p:txBody>
+          <a:bodyPr wrap="square" lIns="0" tIns="11430" rIns="0" bIns="0" rtlCol="0" vert="horz">
+            <a:spAutoFit/>
+          </a:bodyPr>
+          <a:lstStyle/>
+          <a:p>
+            <a:pPr marL="12700">
+              <a:lnSpc>
+                <a:spcPct val="100000"/>
+              </a:lnSpc>
+              <a:spcBef>
+                <a:spcPts val="90"/>
+              </a:spcBef>
+            </a:pPr>
+            <a:r>
+              <a:rPr dirty="0" sz="850" b="1">
+                <a:latin typeface="Tahoma"/>
+                <a:cs typeface="Tahoma"/>
+              </a:rPr>
+              <a:t>ПРОФ.</a:t>
+            </a:r>
+            <a:r>
+              <a:rPr dirty="0" sz="850" spc="100" b="1">
+                <a:latin typeface="Tahoma"/>
+                <a:cs typeface="Tahoma"/>
+              </a:rPr>
+              <a:t> </a:t>
+            </a:r>
+            <a:r>
+              <a:rPr dirty="0" sz="850" spc="-10" b="1">
+                <a:latin typeface="Tahoma"/>
+                <a:cs typeface="Tahoma"/>
+              </a:rPr>
+              <a:t>НАВЫКИ</a:t>
+            </a:r>
+            <a:endParaRPr sz="850">
+              <a:latin typeface="Tahoma"/>
+              <a:cs typeface="Tahoma"/>
+            </a:endParaRPr>
+          </a:p>
+          <a:p>
+            <a:pPr marL="54610">
+              <a:lnSpc>
+                <a:spcPct val="100000"/>
+              </a:lnSpc>
+              <a:spcBef>
+                <a:spcPts val="495"/>
+              </a:spcBef>
+              <a:tabLst>
+                <a:tab pos="940435" algn="l"/>
+              </a:tabLst>
+            </a:pPr>
+            <a:r>
+              <a:rPr dirty="0" sz="450" spc="-10">
+                <a:latin typeface="Verdana"/>
+                <a:cs typeface="Verdana"/>
+              </a:rPr>
+              <a:t>HTML5</a:t>
+            </a:r>
+            <a:r>
+              <a:rPr dirty="0" sz="450">
+                <a:latin typeface="Verdana"/>
+                <a:cs typeface="Verdana"/>
+              </a:rPr>
+              <a:t>	</a:t>
+            </a:r>
+            <a:r>
+              <a:rPr dirty="0" sz="450" spc="-30">
+                <a:solidFill>
+                  <a:srgbClr val="7F7F7F"/>
+                </a:solidFill>
+                <a:latin typeface="Verdana"/>
+                <a:cs typeface="Verdana"/>
+              </a:rPr>
+              <a:t>2г+</a:t>
+            </a:r>
+            <a:endParaRPr sz="450">
+              <a:latin typeface="Verdana"/>
+              <a:cs typeface="Verdana"/>
+            </a:endParaRPr>
+          </a:p>
+          <a:p>
+            <a:pPr>
+              <a:lnSpc>
+                <a:spcPct val="100000"/>
+              </a:lnSpc>
+              <a:spcBef>
+                <a:spcPts val="325"/>
+              </a:spcBef>
+            </a:pPr>
+            <a:endParaRPr sz="450">
+              <a:latin typeface="Verdana"/>
+              <a:cs typeface="Verdana"/>
+            </a:endParaRPr>
+          </a:p>
+          <a:p>
+            <a:pPr marL="54610">
+              <a:lnSpc>
+                <a:spcPct val="100000"/>
+              </a:lnSpc>
+              <a:tabLst>
+                <a:tab pos="940435" algn="l"/>
+              </a:tabLst>
+            </a:pPr>
+            <a:r>
+              <a:rPr dirty="0" sz="450" spc="-35">
+                <a:latin typeface="Verdana"/>
+                <a:cs typeface="Verdana"/>
+              </a:rPr>
+              <a:t>CSS3 </a:t>
+            </a:r>
+            <a:r>
+              <a:rPr dirty="0" sz="450" spc="-10">
+                <a:latin typeface="Verdana"/>
+                <a:cs typeface="Verdana"/>
+              </a:rPr>
+              <a:t>(SCSS/SASS/LESS)</a:t>
+            </a:r>
+            <a:r>
+              <a:rPr dirty="0" sz="450">
+                <a:latin typeface="Verdana"/>
+                <a:cs typeface="Verdana"/>
+              </a:rPr>
+              <a:t>	</a:t>
+            </a:r>
+            <a:r>
+              <a:rPr dirty="0" sz="450" spc="-30">
+                <a:solidFill>
+                  <a:srgbClr val="7F7F7F"/>
+                </a:solidFill>
+                <a:latin typeface="Verdana"/>
+                <a:cs typeface="Verdana"/>
+              </a:rPr>
+              <a:t>2г+</a:t>
+            </a:r>
+            <a:endParaRPr sz="450">
+              <a:latin typeface="Verdana"/>
+              <a:cs typeface="Verdana"/>
+            </a:endParaRPr>
+          </a:p>
+          <a:p>
+            <a:pPr>
+              <a:lnSpc>
+                <a:spcPct val="100000"/>
+              </a:lnSpc>
+              <a:spcBef>
+                <a:spcPts val="325"/>
+              </a:spcBef>
+            </a:pPr>
+            <a:endParaRPr sz="450">
+              <a:latin typeface="Verdana"/>
+              <a:cs typeface="Verdana"/>
+            </a:endParaRPr>
+          </a:p>
+          <a:p>
+            <a:pPr marL="54610">
+              <a:lnSpc>
+                <a:spcPct val="100000"/>
+              </a:lnSpc>
+              <a:tabLst>
+                <a:tab pos="913765" algn="l"/>
+              </a:tabLst>
+            </a:pPr>
+            <a:r>
+              <a:rPr dirty="0" sz="450" spc="-10">
+                <a:latin typeface="Verdana"/>
+                <a:cs typeface="Verdana"/>
+              </a:rPr>
+              <a:t>JavaScript</a:t>
+            </a:r>
+            <a:r>
+              <a:rPr dirty="0" sz="450">
+                <a:latin typeface="Verdana"/>
+                <a:cs typeface="Verdana"/>
+              </a:rPr>
+              <a:t>	</a:t>
+            </a:r>
+            <a:r>
+              <a:rPr dirty="0" sz="450" spc="-70">
+                <a:solidFill>
+                  <a:srgbClr val="7F7F7F"/>
+                </a:solidFill>
+                <a:latin typeface="Verdana"/>
+                <a:cs typeface="Verdana"/>
+              </a:rPr>
+              <a:t>1.5г+</a:t>
+            </a:r>
+            <a:endParaRPr sz="450">
+              <a:latin typeface="Verdana"/>
+              <a:cs typeface="Verdana"/>
+            </a:endParaRPr>
+          </a:p>
+          <a:p>
+            <a:pPr>
+              <a:lnSpc>
+                <a:spcPct val="100000"/>
+              </a:lnSpc>
+              <a:spcBef>
+                <a:spcPts val="325"/>
+              </a:spcBef>
+            </a:pPr>
+            <a:endParaRPr sz="450">
+              <a:latin typeface="Verdana"/>
+              <a:cs typeface="Verdana"/>
+            </a:endParaRPr>
+          </a:p>
+          <a:p>
+            <a:pPr marL="54610">
+              <a:lnSpc>
+                <a:spcPct val="100000"/>
+              </a:lnSpc>
+              <a:spcBef>
+                <a:spcPts val="5"/>
+              </a:spcBef>
+              <a:tabLst>
+                <a:tab pos="894715" algn="l"/>
+              </a:tabLst>
+            </a:pPr>
+            <a:r>
+              <a:rPr dirty="0" sz="450" spc="-10">
+                <a:latin typeface="Verdana"/>
+                <a:cs typeface="Verdana"/>
+              </a:rPr>
+              <a:t>TypeScript</a:t>
+            </a:r>
+            <a:r>
+              <a:rPr dirty="0" sz="450" spc="-25">
+                <a:latin typeface="Verdana"/>
+                <a:cs typeface="Verdana"/>
+              </a:rPr>
+              <a:t> v.5</a:t>
+            </a:r>
+            <a:r>
+              <a:rPr dirty="0" sz="450">
+                <a:latin typeface="Verdana"/>
+                <a:cs typeface="Verdana"/>
+              </a:rPr>
+              <a:t>	</a:t>
+            </a:r>
+            <a:r>
+              <a:rPr dirty="0" sz="450" spc="-40">
+                <a:solidFill>
+                  <a:srgbClr val="7F7F7F"/>
+                </a:solidFill>
+                <a:latin typeface="Verdana"/>
+                <a:cs typeface="Verdana"/>
+              </a:rPr>
+              <a:t>0.5г+</a:t>
+            </a:r>
+            <a:endParaRPr sz="450">
+              <a:latin typeface="Verdana"/>
+              <a:cs typeface="Verdana"/>
+            </a:endParaRPr>
+          </a:p>
+          <a:p>
+            <a:pPr>
+              <a:lnSpc>
+                <a:spcPct val="100000"/>
+              </a:lnSpc>
+              <a:spcBef>
+                <a:spcPts val="325"/>
+              </a:spcBef>
+            </a:pPr>
+            <a:endParaRPr sz="450">
+              <a:latin typeface="Verdana"/>
+              <a:cs typeface="Verdana"/>
+            </a:endParaRPr>
+          </a:p>
+          <a:p>
+            <a:pPr marL="54610">
+              <a:lnSpc>
+                <a:spcPct val="100000"/>
+              </a:lnSpc>
+              <a:tabLst>
+                <a:tab pos="894715" algn="l"/>
+              </a:tabLst>
+            </a:pPr>
+            <a:r>
+              <a:rPr dirty="0" sz="450">
+                <a:latin typeface="Verdana"/>
+                <a:cs typeface="Verdana"/>
+              </a:rPr>
+              <a:t>Angular</a:t>
+            </a:r>
+            <a:r>
+              <a:rPr dirty="0" sz="450" spc="-10">
+                <a:latin typeface="Verdana"/>
+                <a:cs typeface="Verdana"/>
+              </a:rPr>
+              <a:t> </a:t>
+            </a:r>
+            <a:r>
+              <a:rPr dirty="0" sz="450" spc="-25">
+                <a:latin typeface="Verdana"/>
+                <a:cs typeface="Verdana"/>
+              </a:rPr>
+              <a:t>v.5</a:t>
+            </a:r>
+            <a:r>
+              <a:rPr dirty="0" sz="450">
+                <a:latin typeface="Verdana"/>
+                <a:cs typeface="Verdana"/>
+              </a:rPr>
+              <a:t>	</a:t>
+            </a:r>
+            <a:r>
+              <a:rPr dirty="0" sz="450" spc="-40">
+                <a:solidFill>
+                  <a:srgbClr val="7F7F7F"/>
+                </a:solidFill>
+                <a:latin typeface="Verdana"/>
+                <a:cs typeface="Verdana"/>
+              </a:rPr>
+              <a:t>0.5г+</a:t>
+            </a:r>
+            <a:endParaRPr sz="450">
+              <a:latin typeface="Verdana"/>
+              <a:cs typeface="Verdana"/>
+            </a:endParaRPr>
+          </a:p>
+        </p:txBody>
+      </p:sp>
+      <p:grpSp>
+        <p:nvGrpSpPr>
+          <p:cNvPr id="37" name="object 37" descr=""/>
+          <p:cNvGrpSpPr/>
+          <p:nvPr/>
+        </p:nvGrpSpPr>
+        <p:grpSpPr>
+          <a:xfrm>
+            <a:off x="75349" y="2820355"/>
+            <a:ext cx="1108075" cy="15875"/>
+            <a:chOff x="75349" y="2820355"/>
+            <a:chExt cx="1108075" cy="15875"/>
+          </a:xfrm>
+        </p:grpSpPr>
+        <p:sp>
+          <p:nvSpPr>
+            <p:cNvPr id="38" name="object 38" descr=""/>
+            <p:cNvSpPr/>
+            <p:nvPr/>
+          </p:nvSpPr>
+          <p:spPr>
+            <a:xfrm>
+              <a:off x="75349" y="2820355"/>
+              <a:ext cx="1108075" cy="15875"/>
+            </a:xfrm>
+            <a:custGeom>
+              <a:avLst/>
+              <a:gdLst/>
+              <a:ahLst/>
+              <a:cxnLst/>
+              <a:rect l="l" t="t" r="r" b="b"/>
+              <a:pathLst>
+                <a:path w="1108075" h="15875">
+                  <a:moveTo>
+                    <a:pt x="1107528" y="0"/>
+                  </a:moveTo>
+                  <a:lnTo>
+                    <a:pt x="0" y="0"/>
+                  </a:lnTo>
+                  <a:lnTo>
+                    <a:pt x="0" y="15274"/>
+                  </a:lnTo>
+                  <a:lnTo>
+                    <a:pt x="1107528" y="15274"/>
+                  </a:lnTo>
+                  <a:lnTo>
+                    <a:pt x="1107528" y="0"/>
+                  </a:lnTo>
+                  <a:close/>
+                </a:path>
+              </a:pathLst>
+            </a:custGeom>
+            <a:solidFill>
+              <a:srgbClr val="DADADA"/>
+            </a:solidFill>
+          </p:spPr>
+          <p:txBody>
+            <a:bodyPr wrap="square" lIns="0" tIns="0" rIns="0" bIns="0" rtlCol="0"/>
+            <a:lstStyle/>
+            <a:p/>
+          </p:txBody>
+        </p:sp>
+        <p:sp>
+          <p:nvSpPr>
+            <p:cNvPr id="39" name="object 39" descr=""/>
+            <p:cNvSpPr/>
+            <p:nvPr/>
+          </p:nvSpPr>
+          <p:spPr>
+            <a:xfrm>
+              <a:off x="75349" y="2820355"/>
+              <a:ext cx="554355" cy="15875"/>
+            </a:xfrm>
+            <a:custGeom>
+              <a:avLst/>
+              <a:gdLst/>
+              <a:ahLst/>
+              <a:cxnLst/>
+              <a:rect l="l" t="t" r="r" b="b"/>
+              <a:pathLst>
+                <a:path w="554355" h="15875">
+                  <a:moveTo>
+                    <a:pt x="553764" y="0"/>
+                  </a:moveTo>
+                  <a:lnTo>
+                    <a:pt x="0" y="0"/>
+                  </a:lnTo>
+                  <a:lnTo>
+                    <a:pt x="0" y="15274"/>
+                  </a:lnTo>
+                  <a:lnTo>
+                    <a:pt x="553764" y="15274"/>
+                  </a:lnTo>
+                  <a:lnTo>
+                    <a:pt x="553764" y="0"/>
+                  </a:lnTo>
+                  <a:close/>
+                </a:path>
+              </a:pathLst>
+            </a:custGeom>
+            <a:solidFill>
+              <a:srgbClr val="000000"/>
+            </a:solidFill>
+          </p:spPr>
+          <p:txBody>
+            <a:bodyPr wrap="square" lIns="0" tIns="0" rIns="0" bIns="0" rtlCol="0"/>
+            <a:lstStyle/>
+            <a:p/>
+          </p:txBody>
+        </p:sp>
+      </p:grpSp>
+      <p:grpSp>
+        <p:nvGrpSpPr>
+          <p:cNvPr id="40" name="object 40" descr=""/>
+          <p:cNvGrpSpPr/>
+          <p:nvPr/>
+        </p:nvGrpSpPr>
+        <p:grpSpPr>
+          <a:xfrm>
+            <a:off x="75349" y="3102965"/>
+            <a:ext cx="1108075" cy="280670"/>
+            <a:chOff x="75349" y="3102965"/>
+            <a:chExt cx="1108075" cy="280670"/>
+          </a:xfrm>
+        </p:grpSpPr>
+        <p:pic>
+          <p:nvPicPr>
+            <p:cNvPr id="41" name="object 41" descr=""/>
+            <p:cNvPicPr/>
+            <p:nvPr/>
+          </p:nvPicPr>
+          <p:blipFill>
+            <a:blip r:embed="rId16" cstate="print"/>
+            <a:stretch>
+              <a:fillRect/>
+            </a:stretch>
+          </p:blipFill>
+          <p:spPr>
+            <a:xfrm>
+              <a:off x="79806" y="3102965"/>
+              <a:ext cx="96329" cy="106934"/>
+            </a:xfrm>
+            <a:prstGeom prst="rect">
+              <a:avLst/>
+            </a:prstGeom>
+          </p:spPr>
+        </p:pic>
+        <p:sp>
+          <p:nvSpPr>
+            <p:cNvPr id="42" name="object 42" descr=""/>
+            <p:cNvSpPr/>
+            <p:nvPr/>
+          </p:nvSpPr>
+          <p:spPr>
+            <a:xfrm>
+              <a:off x="75349" y="3232821"/>
+              <a:ext cx="1108075" cy="15875"/>
+            </a:xfrm>
+            <a:custGeom>
+              <a:avLst/>
+              <a:gdLst/>
+              <a:ahLst/>
+              <a:cxnLst/>
+              <a:rect l="l" t="t" r="r" b="b"/>
+              <a:pathLst>
+                <a:path w="1108075" h="15875">
+                  <a:moveTo>
+                    <a:pt x="1107528" y="0"/>
+                  </a:moveTo>
+                  <a:lnTo>
+                    <a:pt x="0" y="0"/>
+                  </a:lnTo>
+                  <a:lnTo>
+                    <a:pt x="0" y="15279"/>
+                  </a:lnTo>
+                  <a:lnTo>
+                    <a:pt x="1107528" y="15279"/>
+                  </a:lnTo>
+                  <a:lnTo>
+                    <a:pt x="1107528" y="0"/>
+                  </a:lnTo>
+                  <a:close/>
+                </a:path>
+              </a:pathLst>
+            </a:custGeom>
+            <a:solidFill>
+              <a:srgbClr val="DADADA"/>
+            </a:solidFill>
+          </p:spPr>
+          <p:txBody>
+            <a:bodyPr wrap="square" lIns="0" tIns="0" rIns="0" bIns="0" rtlCol="0"/>
+            <a:lstStyle/>
+            <a:p/>
+          </p:txBody>
+        </p:sp>
+        <p:sp>
+          <p:nvSpPr>
+            <p:cNvPr id="43" name="object 43" descr=""/>
+            <p:cNvSpPr/>
+            <p:nvPr/>
+          </p:nvSpPr>
+          <p:spPr>
+            <a:xfrm>
+              <a:off x="75349" y="3232821"/>
+              <a:ext cx="833119" cy="15875"/>
+            </a:xfrm>
+            <a:custGeom>
+              <a:avLst/>
+              <a:gdLst/>
+              <a:ahLst/>
+              <a:cxnLst/>
+              <a:rect l="l" t="t" r="r" b="b"/>
+              <a:pathLst>
+                <a:path w="833119" h="15875">
+                  <a:moveTo>
+                    <a:pt x="832554" y="0"/>
+                  </a:moveTo>
+                  <a:lnTo>
+                    <a:pt x="0" y="0"/>
+                  </a:lnTo>
+                  <a:lnTo>
+                    <a:pt x="0" y="15279"/>
+                  </a:lnTo>
+                  <a:lnTo>
+                    <a:pt x="832554" y="15279"/>
+                  </a:lnTo>
+                  <a:lnTo>
+                    <a:pt x="832554" y="0"/>
+                  </a:lnTo>
+                  <a:close/>
+                </a:path>
+              </a:pathLst>
+            </a:custGeom>
+            <a:solidFill>
+              <a:srgbClr val="000000"/>
+            </a:solidFill>
+          </p:spPr>
+          <p:txBody>
+            <a:bodyPr wrap="square" lIns="0" tIns="0" rIns="0" bIns="0" rtlCol="0"/>
+            <a:lstStyle/>
+            <a:p/>
+          </p:txBody>
+        </p:sp>
+        <p:pic>
+          <p:nvPicPr>
+            <p:cNvPr id="44" name="object 44" descr=""/>
+            <p:cNvPicPr/>
+            <p:nvPr/>
+          </p:nvPicPr>
+          <p:blipFill>
+            <a:blip r:embed="rId17" cstate="print"/>
+            <a:stretch>
+              <a:fillRect/>
+            </a:stretch>
+          </p:blipFill>
+          <p:spPr>
+            <a:xfrm>
+              <a:off x="81381" y="3288499"/>
+              <a:ext cx="94869" cy="94869"/>
+            </a:xfrm>
+            <a:prstGeom prst="rect">
+              <a:avLst/>
+            </a:prstGeom>
+          </p:spPr>
+        </p:pic>
+      </p:grpSp>
+      <p:sp>
+        <p:nvSpPr>
+          <p:cNvPr id="45" name="object 45" descr=""/>
+          <p:cNvSpPr txBox="1"/>
+          <p:nvPr/>
+        </p:nvSpPr>
+        <p:spPr>
+          <a:xfrm>
+            <a:off x="188683" y="2914590"/>
+            <a:ext cx="1005840" cy="464820"/>
+          </a:xfrm>
+          <a:prstGeom prst="rect">
+            <a:avLst/>
+          </a:prstGeom>
+        </p:spPr>
+        <p:txBody>
+          <a:bodyPr wrap="square" lIns="0" tIns="11430" rIns="0" bIns="0" rtlCol="0" vert="horz">
+            <a:spAutoFit/>
+          </a:bodyPr>
+          <a:lstStyle/>
+          <a:p>
+            <a:pPr marL="14604">
+              <a:lnSpc>
+                <a:spcPct val="100000"/>
+              </a:lnSpc>
+              <a:spcBef>
+                <a:spcPts val="90"/>
+              </a:spcBef>
+            </a:pPr>
+            <a:r>
+              <a:rPr dirty="0" sz="850" b="1">
+                <a:latin typeface="Tahoma"/>
+                <a:cs typeface="Tahoma"/>
+              </a:rPr>
+              <a:t>ДОП.</a:t>
+            </a:r>
+            <a:r>
+              <a:rPr dirty="0" sz="850" spc="75" b="1">
+                <a:latin typeface="Tahoma"/>
+                <a:cs typeface="Tahoma"/>
+              </a:rPr>
+              <a:t> </a:t>
+            </a:r>
+            <a:r>
+              <a:rPr dirty="0" sz="850" spc="-10" b="1">
+                <a:latin typeface="Tahoma"/>
+                <a:cs typeface="Tahoma"/>
+              </a:rPr>
+              <a:t>НАВЫКИ</a:t>
+            </a:r>
+            <a:endParaRPr sz="850">
+              <a:latin typeface="Tahoma"/>
+              <a:cs typeface="Tahoma"/>
+            </a:endParaRPr>
+          </a:p>
+          <a:p>
+            <a:pPr marL="12700">
+              <a:lnSpc>
+                <a:spcPct val="100000"/>
+              </a:lnSpc>
+              <a:spcBef>
+                <a:spcPts val="495"/>
+              </a:spcBef>
+              <a:tabLst>
+                <a:tab pos="913765" algn="l"/>
+              </a:tabLst>
+            </a:pPr>
+            <a:r>
+              <a:rPr dirty="0" sz="450">
+                <a:latin typeface="Verdana"/>
+                <a:cs typeface="Verdana"/>
+              </a:rPr>
+              <a:t>Webpack</a:t>
+            </a:r>
+            <a:r>
+              <a:rPr dirty="0" sz="450" spc="25">
+                <a:latin typeface="Verdana"/>
+                <a:cs typeface="Verdana"/>
+              </a:rPr>
+              <a:t> </a:t>
+            </a:r>
+            <a:r>
+              <a:rPr dirty="0" sz="450" spc="-25">
+                <a:latin typeface="Verdana"/>
+                <a:cs typeface="Verdana"/>
+              </a:rPr>
+              <a:t>v.5</a:t>
+            </a:r>
+            <a:r>
+              <a:rPr dirty="0" sz="450">
+                <a:latin typeface="Verdana"/>
+                <a:cs typeface="Verdana"/>
+              </a:rPr>
+              <a:t>	</a:t>
+            </a:r>
+            <a:r>
+              <a:rPr dirty="0" sz="450" spc="-70">
+                <a:solidFill>
+                  <a:srgbClr val="7F7F7F"/>
+                </a:solidFill>
+                <a:latin typeface="Verdana"/>
+                <a:cs typeface="Verdana"/>
+              </a:rPr>
+              <a:t>1г+</a:t>
+            </a:r>
+            <a:endParaRPr sz="450">
+              <a:latin typeface="Verdana"/>
+              <a:cs typeface="Verdana"/>
+            </a:endParaRPr>
+          </a:p>
+          <a:p>
+            <a:pPr>
+              <a:lnSpc>
+                <a:spcPct val="100000"/>
+              </a:lnSpc>
+              <a:spcBef>
+                <a:spcPts val="325"/>
+              </a:spcBef>
+            </a:pPr>
+            <a:endParaRPr sz="450">
+              <a:latin typeface="Verdana"/>
+              <a:cs typeface="Verdana"/>
+            </a:endParaRPr>
+          </a:p>
+          <a:p>
+            <a:pPr marL="12700">
+              <a:lnSpc>
+                <a:spcPct val="100000"/>
+              </a:lnSpc>
+            </a:pPr>
+            <a:r>
+              <a:rPr dirty="0" sz="450" spc="-25">
+                <a:latin typeface="Verdana"/>
+                <a:cs typeface="Verdana"/>
+              </a:rPr>
+              <a:t>Сист.</a:t>
+            </a:r>
+            <a:r>
+              <a:rPr dirty="0" sz="450" spc="-40">
+                <a:latin typeface="Verdana"/>
+                <a:cs typeface="Verdana"/>
+              </a:rPr>
+              <a:t> </a:t>
+            </a:r>
+            <a:r>
+              <a:rPr dirty="0" sz="450">
+                <a:latin typeface="Verdana"/>
+                <a:cs typeface="Verdana"/>
+              </a:rPr>
+              <a:t>контроля</a:t>
+            </a:r>
+            <a:r>
+              <a:rPr dirty="0" sz="450" spc="-40">
+                <a:latin typeface="Verdana"/>
+                <a:cs typeface="Verdana"/>
+              </a:rPr>
+              <a:t> </a:t>
+            </a:r>
+            <a:r>
+              <a:rPr dirty="0" sz="450">
+                <a:latin typeface="Verdana"/>
+                <a:cs typeface="Verdana"/>
+              </a:rPr>
+              <a:t>версий</a:t>
+            </a:r>
+            <a:r>
+              <a:rPr dirty="0" sz="450" spc="-45">
+                <a:latin typeface="Verdana"/>
+                <a:cs typeface="Verdana"/>
+              </a:rPr>
+              <a:t> </a:t>
+            </a:r>
+            <a:r>
+              <a:rPr dirty="0" sz="450">
+                <a:latin typeface="Verdana"/>
+                <a:cs typeface="Verdana"/>
+              </a:rPr>
+              <a:t>(Git)</a:t>
+            </a:r>
+            <a:r>
+              <a:rPr dirty="0" sz="450" spc="260">
+                <a:latin typeface="Verdana"/>
+                <a:cs typeface="Verdana"/>
+              </a:rPr>
+              <a:t> </a:t>
+            </a:r>
+            <a:r>
+              <a:rPr dirty="0" sz="450" spc="-55">
+                <a:solidFill>
+                  <a:srgbClr val="7F7F7F"/>
+                </a:solidFill>
+                <a:latin typeface="Verdana"/>
+                <a:cs typeface="Verdana"/>
+              </a:rPr>
+              <a:t>1.5г+</a:t>
+            </a:r>
+            <a:endParaRPr sz="450">
+              <a:latin typeface="Verdana"/>
+              <a:cs typeface="Verdana"/>
+            </a:endParaRPr>
+          </a:p>
+        </p:txBody>
+      </p:sp>
+      <p:grpSp>
+        <p:nvGrpSpPr>
+          <p:cNvPr id="46" name="object 46" descr=""/>
+          <p:cNvGrpSpPr/>
+          <p:nvPr/>
+        </p:nvGrpSpPr>
+        <p:grpSpPr>
+          <a:xfrm>
+            <a:off x="75349" y="3412315"/>
+            <a:ext cx="1108075" cy="149225"/>
+            <a:chOff x="75349" y="3412315"/>
+            <a:chExt cx="1108075" cy="149225"/>
+          </a:xfrm>
+        </p:grpSpPr>
+        <p:sp>
+          <p:nvSpPr>
+            <p:cNvPr id="47" name="object 47" descr=""/>
+            <p:cNvSpPr/>
+            <p:nvPr/>
+          </p:nvSpPr>
+          <p:spPr>
+            <a:xfrm>
+              <a:off x="75349" y="3412315"/>
+              <a:ext cx="1108075" cy="15875"/>
+            </a:xfrm>
+            <a:custGeom>
+              <a:avLst/>
+              <a:gdLst/>
+              <a:ahLst/>
+              <a:cxnLst/>
+              <a:rect l="l" t="t" r="r" b="b"/>
+              <a:pathLst>
+                <a:path w="1108075" h="15875">
+                  <a:moveTo>
+                    <a:pt x="1107528" y="0"/>
+                  </a:moveTo>
+                  <a:lnTo>
+                    <a:pt x="0" y="0"/>
+                  </a:lnTo>
+                  <a:lnTo>
+                    <a:pt x="0" y="15274"/>
+                  </a:lnTo>
+                  <a:lnTo>
+                    <a:pt x="1107528" y="15274"/>
+                  </a:lnTo>
+                  <a:lnTo>
+                    <a:pt x="1107528" y="0"/>
+                  </a:lnTo>
+                  <a:close/>
+                </a:path>
+              </a:pathLst>
+            </a:custGeom>
+            <a:solidFill>
+              <a:srgbClr val="DADADA"/>
+            </a:solidFill>
+          </p:spPr>
+          <p:txBody>
+            <a:bodyPr wrap="square" lIns="0" tIns="0" rIns="0" bIns="0" rtlCol="0"/>
+            <a:lstStyle/>
+            <a:p/>
+          </p:txBody>
+        </p:sp>
+        <p:sp>
+          <p:nvSpPr>
+            <p:cNvPr id="48" name="object 48" descr=""/>
+            <p:cNvSpPr/>
+            <p:nvPr/>
+          </p:nvSpPr>
+          <p:spPr>
+            <a:xfrm>
+              <a:off x="75349" y="3412315"/>
+              <a:ext cx="996950" cy="15875"/>
+            </a:xfrm>
+            <a:custGeom>
+              <a:avLst/>
+              <a:gdLst/>
+              <a:ahLst/>
+              <a:cxnLst/>
+              <a:rect l="l" t="t" r="r" b="b"/>
+              <a:pathLst>
+                <a:path w="996950" h="15875">
+                  <a:moveTo>
+                    <a:pt x="996776" y="0"/>
+                  </a:moveTo>
+                  <a:lnTo>
+                    <a:pt x="0" y="0"/>
+                  </a:lnTo>
+                  <a:lnTo>
+                    <a:pt x="0" y="15274"/>
+                  </a:lnTo>
+                  <a:lnTo>
+                    <a:pt x="996776" y="15274"/>
+                  </a:lnTo>
+                  <a:lnTo>
+                    <a:pt x="996776" y="0"/>
+                  </a:lnTo>
+                  <a:close/>
+                </a:path>
+              </a:pathLst>
+            </a:custGeom>
+            <a:solidFill>
+              <a:srgbClr val="000000"/>
+            </a:solidFill>
+          </p:spPr>
+          <p:txBody>
+            <a:bodyPr wrap="square" lIns="0" tIns="0" rIns="0" bIns="0" rtlCol="0"/>
+            <a:lstStyle/>
+            <a:p/>
+          </p:txBody>
+        </p:sp>
+        <p:pic>
+          <p:nvPicPr>
+            <p:cNvPr id="49" name="object 49" descr=""/>
+            <p:cNvPicPr/>
+            <p:nvPr/>
+          </p:nvPicPr>
+          <p:blipFill>
+            <a:blip r:embed="rId18" cstate="print"/>
+            <a:stretch>
+              <a:fillRect/>
+            </a:stretch>
+          </p:blipFill>
+          <p:spPr>
+            <a:xfrm>
+              <a:off x="82994" y="3469601"/>
+              <a:ext cx="91655" cy="91655"/>
+            </a:xfrm>
+            <a:prstGeom prst="rect">
+              <a:avLst/>
+            </a:prstGeom>
+          </p:spPr>
+        </p:pic>
+      </p:grpSp>
+      <p:sp>
+        <p:nvSpPr>
+          <p:cNvPr id="50" name="object 50" descr=""/>
+          <p:cNvSpPr txBox="1"/>
+          <p:nvPr/>
+        </p:nvSpPr>
+        <p:spPr>
+          <a:xfrm>
+            <a:off x="188683" y="3464538"/>
+            <a:ext cx="1005840" cy="94615"/>
           </a:xfrm>
           <a:prstGeom prst="rect">
             <a:avLst/>
@@ -14952,11 +16831,70 @@
               </a:spcBef>
             </a:pPr>
             <a:r>
+              <a:rPr dirty="0" sz="450" spc="-30">
+                <a:latin typeface="Verdana"/>
+                <a:cs typeface="Verdana"/>
+              </a:rPr>
+              <a:t>Граф.</a:t>
+            </a:r>
+            <a:r>
+              <a:rPr dirty="0" sz="450" spc="-25">
+                <a:latin typeface="Verdana"/>
+                <a:cs typeface="Verdana"/>
+              </a:rPr>
+              <a:t> </a:t>
+            </a:r>
+            <a:r>
+              <a:rPr dirty="0" sz="450">
+                <a:latin typeface="Verdana"/>
+                <a:cs typeface="Verdana"/>
+              </a:rPr>
+              <a:t>редакторы</a:t>
+            </a:r>
+            <a:r>
               <a:rPr dirty="0" sz="450" spc="-10">
                 <a:latin typeface="Verdana"/>
                 <a:cs typeface="Verdana"/>
               </a:rPr>
-              <a:t>JavaScript</a:t>
+              <a:t> </a:t>
+            </a:r>
+            <a:r>
+              <a:rPr dirty="0" sz="450" spc="-30">
+                <a:latin typeface="Verdana"/>
+                <a:cs typeface="Verdana"/>
+              </a:rPr>
+              <a:t>(Ps,</a:t>
+            </a:r>
+            <a:r>
+              <a:rPr dirty="0" sz="450" spc="-25">
+                <a:latin typeface="Verdana"/>
+                <a:cs typeface="Verdana"/>
+              </a:rPr>
+              <a:t> </a:t>
+            </a:r>
+            <a:r>
+              <a:rPr dirty="0" sz="450">
+                <a:latin typeface="Verdana"/>
+                <a:cs typeface="Verdana"/>
+              </a:rPr>
+              <a:t>Figma)</a:t>
+            </a:r>
+            <a:r>
+              <a:rPr dirty="0" sz="450" spc="310">
+                <a:latin typeface="Verdana"/>
+                <a:cs typeface="Verdana"/>
+              </a:rPr>
+              <a:t> </a:t>
+            </a:r>
+            <a:r>
+              <a:rPr dirty="0" sz="450" spc="-25">
+                <a:solidFill>
+                  <a:srgbClr val="7F7F7F"/>
+                </a:solidFill>
+                <a:latin typeface="Verdana"/>
+                <a:cs typeface="Verdana"/>
+              </a:rPr>
+              <a:t>2г+</a:t>
             </a:r>
             <a:endParaRPr sz="450">
               <a:latin typeface="Verdana"/>
@@ -14967,27 +16905,27 @@
       </p:sp>
       <p:grpSp>
         <p:nvGrpSpPr>
-          <p:cNvPr id="34" name="object 34" descr=""/>
+          <p:cNvPr id="51" name="object 51" descr=""/>
           <p:cNvGrpSpPr/>
           <p:nvPr/>
         </p:nvGrpSpPr>
         <p:grpSpPr>
           <a:xfrm>
-            <a:off x="74764" y="2533343"/>
-            <a:ext cx="1108075" cy="156845"/>
-            <a:chOff x="74764" y="2533343"/>
-            <a:chExt cx="1108075" cy="156845"/>
+            <a:off x="75349" y="3591817"/>
+            <a:ext cx="1108075" cy="15875"/>
+            <a:chOff x="75349" y="3591817"/>
+            <a:chExt cx="1108075" cy="15875"/>
           </a:xfrm>
         </p:grpSpPr>
         <p:sp>
           <p:nvSpPr>
-            <p:cNvPr id="35" name="object 35" descr=""/>
+            <p:cNvPr id="52" name="object 52" descr=""/>
             <p:cNvSpPr/>
             <p:nvPr/>
           </p:nvSpPr>
           <p:spPr>
             <a:xfrm>
-              <a:off x="74765" y="2533343"/>
+              <a:off x="75349" y="3591817"/>
               <a:ext cx="1108075" cy="15875"/>
             </a:xfrm>
             <a:custGeom>
@@ -15005,10 +16943,10 @@
                     <a:pt x="0" y="0"/>
                   </a:lnTo>
                   <a:lnTo>
-                    <a:pt x="0" y="15279"/>
-                  </a:lnTo>
-                  <a:lnTo>
-                    <a:pt x="1107528" y="15279"/>
+                    <a:pt x="0" y="15274"/>
+                  </a:lnTo>
+                  <a:lnTo>
+                    <a:pt x="1107528" y="15274"/>
                   </a:lnTo>
                   <a:lnTo>
                     <a:pt x="1107528" y="0"/>
@@ -15029,13 +16967,13 @@
         </p:sp>
         <p:sp>
           <p:nvSpPr>
-            <p:cNvPr id="36" name="object 36" descr=""/>
+            <p:cNvPr id="53" name="object 53" descr=""/>
             <p:cNvSpPr/>
             <p:nvPr/>
           </p:nvSpPr>
           <p:spPr>
             <a:xfrm>
-              <a:off x="74765" y="2533343"/>
+              <a:off x="75349" y="3591817"/>
               <a:ext cx="943610" cy="15875"/>
             </a:xfrm>
             <a:custGeom>
@@ -15053,414 +16991,13 @@
                     <a:pt x="0" y="0"/>
                   </a:lnTo>
                   <a:lnTo>
-                    <a:pt x="0" y="15279"/>
-                  </a:lnTo>
-                  <a:lnTo>
-                    <a:pt x="943312" y="15279"/>
+                    <a:pt x="0" y="15274"/>
+                  </a:lnTo>
+                  <a:lnTo>
+                    <a:pt x="943312" y="15274"/>
                   </a:lnTo>
                   <a:lnTo>
                     <a:pt x="943312" y="0"/>
-                  </a:lnTo>
-                  <a:close/>
-                </a:path>
-              </a:pathLst>
-            </a:custGeom>
-            <a:solidFill>
-              <a:srgbClr val="000000"/>
-            </a:solidFill>
-          </p:spPr>
-          <p:txBody>
-            <a:bodyPr wrap="square" lIns="0" tIns="0" rIns="0" bIns="0" rtlCol="0"/>
-            <a:lstStyle/>
-            <a:p/>
-          </p:txBody>
-        </p:sp>
-        <p:pic>
-          <p:nvPicPr>
-            <p:cNvPr id="37" name="object 37" descr=""/>
-            <p:cNvPicPr/>
-            <p:nvPr/>
-          </p:nvPicPr>
-          <p:blipFill>
-            <a:blip r:embed="rId14" cstate="print"/>
-            <a:stretch>
-              <a:fillRect/>
-            </a:stretch>
-          </p:blipFill>
-          <p:spPr>
-            <a:xfrm>
-              <a:off x="74764" y="2582989"/>
-              <a:ext cx="106933" cy="106933"/>
-            </a:xfrm>
-            <a:prstGeom prst="rect">
-              <a:avLst/>
-            </a:prstGeom>
-          </p:spPr>
-        </p:pic>
-      </p:grpSp>
-      <p:sp>
-        <p:nvSpPr>
-          <p:cNvPr id="38" name="object 38" descr=""/>
-          <p:cNvSpPr txBox="1"/>
-          <p:nvPr/>
-        </p:nvSpPr>
-        <p:spPr>
-          <a:xfrm>
-            <a:off x="188099" y="2585571"/>
-            <a:ext cx="409575" cy="94615"/>
-          </a:xfrm>
-          <a:prstGeom prst="rect">
-            <a:avLst/>
-          </a:prstGeom>
-        </p:spPr>
-        <p:txBody>
-          <a:bodyPr wrap="square" lIns="0" tIns="12700" rIns="0" bIns="0" rtlCol="0" vert="horz">
-            <a:spAutoFit/>
-          </a:bodyPr>
-          <a:lstStyle/>
-          <a:p>
-            <a:pPr marL="12700">
-              <a:lnSpc>
-                <a:spcPct val="100000"/>
-              </a:lnSpc>
-              <a:spcBef>
-                <a:spcPts val="100"/>
-              </a:spcBef>
-            </a:pPr>
-            <a:r>
-              <a:rPr dirty="0" sz="450" spc="-10">
-                <a:latin typeface="Verdana"/>
-                <a:cs typeface="Verdana"/>
-              </a:rPr>
-              <a:t>TypeScript</a:t>
-            </a:r>
-            <a:r>
-              <a:rPr dirty="0" sz="450" spc="-25">
-                <a:latin typeface="Verdana"/>
-                <a:cs typeface="Verdana"/>
-              </a:rPr>
-              <a:t> </a:t>
-            </a:r>
-            <a:r>
-              <a:rPr dirty="0" sz="450" spc="-30">
-                <a:latin typeface="Verdana"/>
-                <a:cs typeface="Verdana"/>
-              </a:rPr>
-              <a:t>v.5</a:t>
-            </a:r>
-            <a:endParaRPr sz="450">
-              <a:latin typeface="Verdana"/>
-              <a:cs typeface="Verdana"/>
-            </a:endParaRPr>
-          </a:p>
-        </p:txBody>
-      </p:sp>
-      <p:grpSp>
-        <p:nvGrpSpPr>
-          <p:cNvPr id="39" name="object 39" descr=""/>
-          <p:cNvGrpSpPr/>
-          <p:nvPr/>
-        </p:nvGrpSpPr>
-        <p:grpSpPr>
-          <a:xfrm>
-            <a:off x="74764" y="2712832"/>
-            <a:ext cx="1108075" cy="156845"/>
-            <a:chOff x="74764" y="2712832"/>
-            <a:chExt cx="1108075" cy="156845"/>
-          </a:xfrm>
-        </p:grpSpPr>
-        <p:sp>
-          <p:nvSpPr>
-            <p:cNvPr id="40" name="object 40" descr=""/>
-            <p:cNvSpPr/>
-            <p:nvPr/>
-          </p:nvSpPr>
-          <p:spPr>
-            <a:xfrm>
-              <a:off x="74765" y="2712832"/>
-              <a:ext cx="1108075" cy="15875"/>
-            </a:xfrm>
-            <a:custGeom>
-              <a:avLst/>
-              <a:gdLst/>
-              <a:ahLst/>
-              <a:cxnLst/>
-              <a:rect l="l" t="t" r="r" b="b"/>
-              <a:pathLst>
-                <a:path w="1108075" h="15875">
-                  <a:moveTo>
-                    <a:pt x="1107528" y="0"/>
-                  </a:moveTo>
-                  <a:lnTo>
-                    <a:pt x="0" y="0"/>
-                  </a:lnTo>
-                  <a:lnTo>
-                    <a:pt x="0" y="15279"/>
-                  </a:lnTo>
-                  <a:lnTo>
-                    <a:pt x="1107528" y="15279"/>
-                  </a:lnTo>
-                  <a:lnTo>
-                    <a:pt x="1107528" y="0"/>
-                  </a:lnTo>
-                  <a:close/>
-                </a:path>
-              </a:pathLst>
-            </a:custGeom>
-            <a:solidFill>
-              <a:srgbClr val="DADADA"/>
-            </a:solidFill>
-          </p:spPr>
-          <p:txBody>
-            <a:bodyPr wrap="square" lIns="0" tIns="0" rIns="0" bIns="0" rtlCol="0"/>
-            <a:lstStyle/>
-            <a:p/>
-          </p:txBody>
-        </p:sp>
-        <p:sp>
-          <p:nvSpPr>
-            <p:cNvPr id="41" name="object 41" descr=""/>
-            <p:cNvSpPr/>
-            <p:nvPr/>
-          </p:nvSpPr>
-          <p:spPr>
-            <a:xfrm>
-              <a:off x="74765" y="2712832"/>
-              <a:ext cx="775335" cy="15875"/>
-            </a:xfrm>
-            <a:custGeom>
-              <a:avLst/>
-              <a:gdLst/>
-              <a:ahLst/>
-              <a:cxnLst/>
-              <a:rect l="l" t="t" r="r" b="b"/>
-              <a:pathLst>
-                <a:path w="775335" h="15875">
-                  <a:moveTo>
-                    <a:pt x="775270" y="0"/>
-                  </a:moveTo>
-                  <a:lnTo>
-                    <a:pt x="0" y="0"/>
-                  </a:lnTo>
-                  <a:lnTo>
-                    <a:pt x="0" y="15279"/>
-                  </a:lnTo>
-                  <a:lnTo>
-                    <a:pt x="775270" y="15279"/>
-                  </a:lnTo>
-                  <a:lnTo>
-                    <a:pt x="775270" y="0"/>
-                  </a:lnTo>
-                  <a:close/>
-                </a:path>
-              </a:pathLst>
-            </a:custGeom>
-            <a:solidFill>
-              <a:srgbClr val="000000"/>
-            </a:solidFill>
-          </p:spPr>
-          <p:txBody>
-            <a:bodyPr wrap="square" lIns="0" tIns="0" rIns="0" bIns="0" rtlCol="0"/>
-            <a:lstStyle/>
-            <a:p/>
-          </p:txBody>
-        </p:sp>
-        <p:pic>
-          <p:nvPicPr>
-            <p:cNvPr id="42" name="object 42" descr=""/>
-            <p:cNvPicPr/>
-            <p:nvPr/>
-          </p:nvPicPr>
-          <p:blipFill>
-            <a:blip r:embed="rId15" cstate="print"/>
-            <a:stretch>
-              <a:fillRect/>
-            </a:stretch>
-          </p:blipFill>
-          <p:spPr>
-            <a:xfrm>
-              <a:off x="74764" y="2762491"/>
-              <a:ext cx="106933" cy="106933"/>
-            </a:xfrm>
-            <a:prstGeom prst="rect">
-              <a:avLst/>
-            </a:prstGeom>
-          </p:spPr>
-        </p:pic>
-      </p:grpSp>
-      <p:sp>
-        <p:nvSpPr>
-          <p:cNvPr id="43" name="object 43" descr=""/>
-          <p:cNvSpPr txBox="1"/>
-          <p:nvPr/>
-        </p:nvSpPr>
-        <p:spPr>
-          <a:xfrm>
-            <a:off x="188099" y="2765060"/>
-            <a:ext cx="876935" cy="94615"/>
-          </a:xfrm>
-          <a:prstGeom prst="rect">
-            <a:avLst/>
-          </a:prstGeom>
-        </p:spPr>
-        <p:txBody>
-          <a:bodyPr wrap="square" lIns="0" tIns="12700" rIns="0" bIns="0" rtlCol="0" vert="horz">
-            <a:spAutoFit/>
-          </a:bodyPr>
-          <a:lstStyle/>
-          <a:p>
-            <a:pPr marL="12700">
-              <a:lnSpc>
-                <a:spcPct val="100000"/>
-              </a:lnSpc>
-              <a:spcBef>
-                <a:spcPts val="100"/>
-              </a:spcBef>
-            </a:pPr>
-            <a:r>
-              <a:rPr dirty="0" sz="450">
-                <a:latin typeface="Verdana"/>
-                <a:cs typeface="Verdana"/>
-              </a:rPr>
-              <a:t>Angular</a:t>
-            </a:r>
-            <a:r>
-              <a:rPr dirty="0" sz="450" spc="5">
-                <a:latin typeface="Verdana"/>
-                <a:cs typeface="Verdana"/>
-              </a:rPr>
-              <a:t> </a:t>
-            </a:r>
-            <a:r>
-              <a:rPr dirty="0" sz="450" spc="-65">
-                <a:latin typeface="Verdana"/>
-                <a:cs typeface="Verdana"/>
-              </a:rPr>
-              <a:t>v.5</a:t>
-            </a:r>
-            <a:r>
-              <a:rPr dirty="0" sz="450" spc="-10">
-                <a:latin typeface="Verdana"/>
-                <a:cs typeface="Verdana"/>
-              </a:rPr>
-              <a:t> (базовые</a:t>
-            </a:r>
-            <a:r>
-              <a:rPr dirty="0" sz="450" spc="-5">
-                <a:latin typeface="Verdana"/>
-                <a:cs typeface="Verdana"/>
-              </a:rPr>
-              <a:t> </a:t>
-            </a:r>
-            <a:r>
-              <a:rPr dirty="0" sz="450" spc="-10">
-                <a:latin typeface="Verdana"/>
-                <a:cs typeface="Verdana"/>
-              </a:rPr>
-              <a:t>знания)</a:t>
-            </a:r>
-            <a:endParaRPr sz="450">
-              <a:latin typeface="Verdana"/>
-              <a:cs typeface="Verdana"/>
-            </a:endParaRPr>
-          </a:p>
-        </p:txBody>
-      </p:sp>
-      <p:grpSp>
-        <p:nvGrpSpPr>
-          <p:cNvPr id="44" name="object 44" descr=""/>
-          <p:cNvGrpSpPr/>
-          <p:nvPr/>
-        </p:nvGrpSpPr>
-        <p:grpSpPr>
-          <a:xfrm>
-            <a:off x="74765" y="2892334"/>
-            <a:ext cx="1108075" cy="15875"/>
-            <a:chOff x="74765" y="2892334"/>
-            <a:chExt cx="1108075" cy="15875"/>
-          </a:xfrm>
-        </p:grpSpPr>
-        <p:sp>
-          <p:nvSpPr>
-            <p:cNvPr id="45" name="object 45" descr=""/>
-            <p:cNvSpPr/>
-            <p:nvPr/>
-          </p:nvSpPr>
-          <p:spPr>
-            <a:xfrm>
-              <a:off x="74765" y="2892334"/>
-              <a:ext cx="1108075" cy="15875"/>
-            </a:xfrm>
-            <a:custGeom>
-              <a:avLst/>
-              <a:gdLst/>
-              <a:ahLst/>
-              <a:cxnLst/>
-              <a:rect l="l" t="t" r="r" b="b"/>
-              <a:pathLst>
-                <a:path w="1108075" h="15875">
-                  <a:moveTo>
-                    <a:pt x="1107528" y="0"/>
-                  </a:moveTo>
-                  <a:lnTo>
-                    <a:pt x="0" y="0"/>
-                  </a:lnTo>
-                  <a:lnTo>
-                    <a:pt x="0" y="15279"/>
-                  </a:lnTo>
-                  <a:lnTo>
-                    <a:pt x="1107528" y="15279"/>
-                  </a:lnTo>
-                  <a:lnTo>
-                    <a:pt x="1107528" y="0"/>
-                  </a:lnTo>
-                  <a:close/>
-                </a:path>
-              </a:pathLst>
-            </a:custGeom>
-            <a:solidFill>
-              <a:srgbClr val="DADADA"/>
-            </a:solidFill>
-          </p:spPr>
-          <p:txBody>
-            <a:bodyPr wrap="square" lIns="0" tIns="0" rIns="0" bIns="0" rtlCol="0"/>
-            <a:lstStyle/>
-            <a:p/>
-          </p:txBody>
-        </p:sp>
-        <p:sp>
-          <p:nvSpPr>
-            <p:cNvPr id="46" name="object 46" descr=""/>
-            <p:cNvSpPr/>
-            <p:nvPr/>
-          </p:nvSpPr>
-          <p:spPr>
-            <a:xfrm>
-              <a:off x="74765" y="2892334"/>
-              <a:ext cx="554355" cy="15875"/>
-            </a:xfrm>
-            <a:custGeom>
-              <a:avLst/>
-              <a:gdLst/>
-              <a:ahLst/>
-              <a:cxnLst/>
-              <a:rect l="l" t="t" r="r" b="b"/>
-              <a:pathLst>
-                <a:path w="554355" h="15875">
-                  <a:moveTo>
-                    <a:pt x="553764" y="0"/>
-                  </a:moveTo>
-                  <a:lnTo>
-                    <a:pt x="0" y="0"/>
-                  </a:lnTo>
-                  <a:lnTo>
-                    <a:pt x="0" y="15279"/>
-                  </a:lnTo>
-                  <a:lnTo>
-                    <a:pt x="553764" y="15279"/>
-                  </a:lnTo>
-                  <a:lnTo>
-                    <a:pt x="553764" y="0"/>
                   </a:lnTo>
                   <a:close/>
                 </a:path>
@@ -15479,668 +17016,7 @@
       </p:grpSp>
       <p:pic>
         <p:nvPicPr>
-          <p:cNvPr id="47" name="object 47" descr=""/>
-          <p:cNvPicPr/>
-          <p:nvPr/>
-        </p:nvPicPr>
-        <p:blipFill>
-          <a:blip r:embed="rId16" cstate="print"/>
-          <a:stretch>
-            <a:fillRect/>
-          </a:stretch>
-        </p:blipFill>
-        <p:spPr>
-          <a:xfrm>
-            <a:off x="74764" y="3174949"/>
-            <a:ext cx="106933" cy="106933"/>
-          </a:xfrm>
-          <a:prstGeom prst="rect">
-            <a:avLst/>
-          </a:prstGeom>
-        </p:spPr>
-      </p:pic>
-      <p:sp>
-        <p:nvSpPr>
-          <p:cNvPr id="48" name="object 48" descr=""/>
-          <p:cNvSpPr txBox="1"/>
-          <p:nvPr/>
-        </p:nvSpPr>
-        <p:spPr>
-          <a:xfrm>
-            <a:off x="188099" y="2986574"/>
-            <a:ext cx="879475" cy="285115"/>
-          </a:xfrm>
-          <a:prstGeom prst="rect">
-            <a:avLst/>
-          </a:prstGeom>
-        </p:spPr>
-        <p:txBody>
-          <a:bodyPr wrap="square" lIns="0" tIns="11430" rIns="0" bIns="0" rtlCol="0" vert="horz">
-            <a:spAutoFit/>
-          </a:bodyPr>
-          <a:lstStyle/>
-          <a:p>
-            <a:pPr marL="14604">
-              <a:lnSpc>
-                <a:spcPct val="100000"/>
-              </a:lnSpc>
-              <a:spcBef>
-                <a:spcPts val="90"/>
-              </a:spcBef>
-            </a:pPr>
-            <a:r>
-              <a:rPr dirty="0" sz="850" b="1">
-                <a:latin typeface="Tahoma"/>
-                <a:cs typeface="Tahoma"/>
-              </a:rPr>
-              <a:t>ДОП.</a:t>
-            </a:r>
-            <a:r>
-              <a:rPr dirty="0" sz="850" spc="75" b="1">
-                <a:latin typeface="Tahoma"/>
-                <a:cs typeface="Tahoma"/>
-              </a:rPr>
-              <a:t> </a:t>
-            </a:r>
-            <a:r>
-              <a:rPr dirty="0" sz="850" spc="-10" b="1">
-                <a:latin typeface="Tahoma"/>
-                <a:cs typeface="Tahoma"/>
-              </a:rPr>
-              <a:t>НАВЫКИ</a:t>
-            </a:r>
-            <a:endParaRPr sz="850">
-              <a:latin typeface="Tahoma"/>
-              <a:cs typeface="Tahoma"/>
-            </a:endParaRPr>
-          </a:p>
-          <a:p>
-            <a:pPr marL="12700">
-              <a:lnSpc>
-                <a:spcPct val="100000"/>
-              </a:lnSpc>
-              <a:spcBef>
-                <a:spcPts val="495"/>
-              </a:spcBef>
-            </a:pPr>
-            <a:r>
-              <a:rPr dirty="0" sz="450">
-                <a:latin typeface="Verdana"/>
-                <a:cs typeface="Verdana"/>
-              </a:rPr>
-              <a:t>Webpack</a:t>
-            </a:r>
-            <a:r>
-              <a:rPr dirty="0" sz="450" spc="25">
-                <a:latin typeface="Verdana"/>
-                <a:cs typeface="Verdana"/>
-              </a:rPr>
-              <a:t> </a:t>
-            </a:r>
-            <a:r>
-              <a:rPr dirty="0" sz="450" spc="-25">
-                <a:latin typeface="Verdana"/>
-                <a:cs typeface="Verdana"/>
-              </a:rPr>
-              <a:t>v.5</a:t>
-            </a:r>
-            <a:endParaRPr sz="450">
-              <a:latin typeface="Verdana"/>
-              <a:cs typeface="Verdana"/>
-            </a:endParaRPr>
-          </a:p>
-        </p:txBody>
-      </p:sp>
-      <p:grpSp>
-        <p:nvGrpSpPr>
-          <p:cNvPr id="49" name="object 49" descr=""/>
-          <p:cNvGrpSpPr/>
-          <p:nvPr/>
-        </p:nvGrpSpPr>
-        <p:grpSpPr>
-          <a:xfrm>
-            <a:off x="74764" y="3304797"/>
-            <a:ext cx="1108075" cy="156845"/>
-            <a:chOff x="74764" y="3304797"/>
-            <a:chExt cx="1108075" cy="156845"/>
-          </a:xfrm>
-        </p:grpSpPr>
-        <p:sp>
-          <p:nvSpPr>
-            <p:cNvPr id="50" name="object 50" descr=""/>
-            <p:cNvSpPr/>
-            <p:nvPr/>
-          </p:nvSpPr>
-          <p:spPr>
-            <a:xfrm>
-              <a:off x="74765" y="3304797"/>
-              <a:ext cx="1108075" cy="15875"/>
-            </a:xfrm>
-            <a:custGeom>
-              <a:avLst/>
-              <a:gdLst/>
-              <a:ahLst/>
-              <a:cxnLst/>
-              <a:rect l="l" t="t" r="r" b="b"/>
-              <a:pathLst>
-                <a:path w="1108075" h="15875">
-                  <a:moveTo>
-                    <a:pt x="1107528" y="0"/>
-                  </a:moveTo>
-                  <a:lnTo>
-                    <a:pt x="0" y="0"/>
-                  </a:lnTo>
-                  <a:lnTo>
-                    <a:pt x="0" y="15274"/>
-                  </a:lnTo>
-                  <a:lnTo>
-                    <a:pt x="1107528" y="15274"/>
-                  </a:lnTo>
-                  <a:lnTo>
-                    <a:pt x="1107528" y="0"/>
-                  </a:lnTo>
-                  <a:close/>
-                </a:path>
-              </a:pathLst>
-            </a:custGeom>
-            <a:solidFill>
-              <a:srgbClr val="DADADA"/>
-            </a:solidFill>
-          </p:spPr>
-          <p:txBody>
-            <a:bodyPr wrap="square" lIns="0" tIns="0" rIns="0" bIns="0" rtlCol="0"/>
-            <a:lstStyle/>
-            <a:p/>
-          </p:txBody>
-        </p:sp>
-        <p:sp>
-          <p:nvSpPr>
-            <p:cNvPr id="51" name="object 51" descr=""/>
-            <p:cNvSpPr/>
-            <p:nvPr/>
-          </p:nvSpPr>
-          <p:spPr>
-            <a:xfrm>
-              <a:off x="74765" y="3304797"/>
-              <a:ext cx="833119" cy="15875"/>
-            </a:xfrm>
-            <a:custGeom>
-              <a:avLst/>
-              <a:gdLst/>
-              <a:ahLst/>
-              <a:cxnLst/>
-              <a:rect l="l" t="t" r="r" b="b"/>
-              <a:pathLst>
-                <a:path w="833119" h="15875">
-                  <a:moveTo>
-                    <a:pt x="832554" y="0"/>
-                  </a:moveTo>
-                  <a:lnTo>
-                    <a:pt x="0" y="0"/>
-                  </a:lnTo>
-                  <a:lnTo>
-                    <a:pt x="0" y="15274"/>
-                  </a:lnTo>
-                  <a:lnTo>
-                    <a:pt x="832554" y="15274"/>
-                  </a:lnTo>
-                  <a:lnTo>
-                    <a:pt x="832554" y="0"/>
-                  </a:lnTo>
-                  <a:close/>
-                </a:path>
-              </a:pathLst>
-            </a:custGeom>
-            <a:solidFill>
-              <a:srgbClr val="000000"/>
-            </a:solidFill>
-          </p:spPr>
-          <p:txBody>
-            <a:bodyPr wrap="square" lIns="0" tIns="0" rIns="0" bIns="0" rtlCol="0"/>
-            <a:lstStyle/>
-            <a:p/>
-          </p:txBody>
-        </p:sp>
-        <p:pic>
-          <p:nvPicPr>
-            <p:cNvPr id="52" name="object 52" descr=""/>
-            <p:cNvPicPr/>
-            <p:nvPr/>
-          </p:nvPicPr>
-          <p:blipFill>
-            <a:blip r:embed="rId17" cstate="print"/>
-            <a:stretch>
-              <a:fillRect/>
-            </a:stretch>
-          </p:blipFill>
-          <p:spPr>
-            <a:xfrm>
-              <a:off x="74764" y="3354450"/>
-              <a:ext cx="106933" cy="106933"/>
-            </a:xfrm>
-            <a:prstGeom prst="rect">
-              <a:avLst/>
-            </a:prstGeom>
-          </p:spPr>
-        </p:pic>
-      </p:grpSp>
-      <p:sp>
-        <p:nvSpPr>
-          <p:cNvPr id="53" name="object 53" descr=""/>
-          <p:cNvSpPr txBox="1"/>
-          <p:nvPr/>
-        </p:nvSpPr>
-        <p:spPr>
-          <a:xfrm>
-            <a:off x="188099" y="3357020"/>
-            <a:ext cx="942340" cy="94615"/>
-          </a:xfrm>
-          <a:prstGeom prst="rect">
-            <a:avLst/>
-          </a:prstGeom>
-        </p:spPr>
-        <p:txBody>
-          <a:bodyPr wrap="square" lIns="0" tIns="12700" rIns="0" bIns="0" rtlCol="0" vert="horz">
-            <a:spAutoFit/>
-          </a:bodyPr>
-          <a:lstStyle/>
-          <a:p>
-            <a:pPr marL="12700">
-              <a:lnSpc>
-                <a:spcPct val="100000"/>
-              </a:lnSpc>
-              <a:spcBef>
-                <a:spcPts val="100"/>
-              </a:spcBef>
-            </a:pPr>
-            <a:r>
-              <a:rPr dirty="0" sz="450">
-                <a:latin typeface="Verdana"/>
-                <a:cs typeface="Verdana"/>
-              </a:rPr>
-              <a:t>Система</a:t>
-            </a:r>
-            <a:r>
-              <a:rPr dirty="0" sz="450" spc="15">
-                <a:latin typeface="Verdana"/>
-                <a:cs typeface="Verdana"/>
-              </a:rPr>
-              <a:t> </a:t>
-            </a:r>
-            <a:r>
-              <a:rPr dirty="0" sz="450">
-                <a:latin typeface="Verdana"/>
-                <a:cs typeface="Verdana"/>
-              </a:rPr>
-              <a:t>контроля</a:t>
-            </a:r>
-            <a:r>
-              <a:rPr dirty="0" sz="450" spc="10">
-                <a:latin typeface="Verdana"/>
-                <a:cs typeface="Verdana"/>
-              </a:rPr>
-              <a:t> </a:t>
-            </a:r>
-            <a:r>
-              <a:rPr dirty="0" sz="450">
-                <a:latin typeface="Verdana"/>
-                <a:cs typeface="Verdana"/>
-              </a:rPr>
-              <a:t>версий</a:t>
-            </a:r>
-            <a:r>
-              <a:rPr dirty="0" sz="450" spc="-5">
-                <a:latin typeface="Verdana"/>
-                <a:cs typeface="Verdana"/>
-              </a:rPr>
-              <a:t> </a:t>
-            </a:r>
-            <a:r>
-              <a:rPr dirty="0" sz="450" spc="-20">
-                <a:latin typeface="Verdana"/>
-                <a:cs typeface="Verdana"/>
-              </a:rPr>
-              <a:t>(Git)</a:t>
-            </a:r>
-            <a:endParaRPr sz="450">
-              <a:latin typeface="Verdana"/>
-              <a:cs typeface="Verdana"/>
-            </a:endParaRPr>
-          </a:p>
-        </p:txBody>
-      </p:sp>
-      <p:grpSp>
-        <p:nvGrpSpPr>
           <p:cNvPr id="54" name="object 54" descr=""/>
-          <p:cNvGrpSpPr/>
-          <p:nvPr/>
-        </p:nvGrpSpPr>
-        <p:grpSpPr>
-          <a:xfrm>
-            <a:off x="74764" y="3484298"/>
-            <a:ext cx="1108075" cy="156845"/>
-            <a:chOff x="74764" y="3484298"/>
-            <a:chExt cx="1108075" cy="156845"/>
-          </a:xfrm>
-        </p:grpSpPr>
-        <p:sp>
-          <p:nvSpPr>
-            <p:cNvPr id="55" name="object 55" descr=""/>
-            <p:cNvSpPr/>
-            <p:nvPr/>
-          </p:nvSpPr>
-          <p:spPr>
-            <a:xfrm>
-              <a:off x="74765" y="3484298"/>
-              <a:ext cx="1108075" cy="15875"/>
-            </a:xfrm>
-            <a:custGeom>
-              <a:avLst/>
-              <a:gdLst/>
-              <a:ahLst/>
-              <a:cxnLst/>
-              <a:rect l="l" t="t" r="r" b="b"/>
-              <a:pathLst>
-                <a:path w="1108075" h="15875">
-                  <a:moveTo>
-                    <a:pt x="1107528" y="0"/>
-                  </a:moveTo>
-                  <a:lnTo>
-                    <a:pt x="0" y="0"/>
-                  </a:lnTo>
-                  <a:lnTo>
-                    <a:pt x="0" y="15274"/>
-                  </a:lnTo>
-                  <a:lnTo>
-                    <a:pt x="1107528" y="15274"/>
-                  </a:lnTo>
-                  <a:lnTo>
-                    <a:pt x="1107528" y="0"/>
-                  </a:lnTo>
-                  <a:close/>
-                </a:path>
-              </a:pathLst>
-            </a:custGeom>
-            <a:solidFill>
-              <a:srgbClr val="DADADA"/>
-            </a:solidFill>
-          </p:spPr>
-          <p:txBody>
-            <a:bodyPr wrap="square" lIns="0" tIns="0" rIns="0" bIns="0" rtlCol="0"/>
-            <a:lstStyle/>
-            <a:p/>
-          </p:txBody>
-        </p:sp>
-        <p:sp>
-          <p:nvSpPr>
-            <p:cNvPr id="56" name="object 56" descr=""/>
-            <p:cNvSpPr/>
-            <p:nvPr/>
-          </p:nvSpPr>
-          <p:spPr>
-            <a:xfrm>
-              <a:off x="74765" y="3484298"/>
-              <a:ext cx="996950" cy="15875"/>
-            </a:xfrm>
-            <a:custGeom>
-              <a:avLst/>
-              <a:gdLst/>
-              <a:ahLst/>
-              <a:cxnLst/>
-              <a:rect l="l" t="t" r="r" b="b"/>
-              <a:pathLst>
-                <a:path w="996950" h="15875">
-                  <a:moveTo>
-                    <a:pt x="996776" y="0"/>
-                  </a:moveTo>
-                  <a:lnTo>
-                    <a:pt x="0" y="0"/>
-                  </a:lnTo>
-                  <a:lnTo>
-                    <a:pt x="0" y="15274"/>
-                  </a:lnTo>
-                  <a:lnTo>
-                    <a:pt x="996776" y="15274"/>
-                  </a:lnTo>
-                  <a:lnTo>
-                    <a:pt x="996776" y="0"/>
-                  </a:lnTo>
-                  <a:close/>
-                </a:path>
-              </a:pathLst>
-            </a:custGeom>
-            <a:solidFill>
-              <a:srgbClr val="000000"/>
-            </a:solidFill>
-          </p:spPr>
-          <p:txBody>
-            <a:bodyPr wrap="square" lIns="0" tIns="0" rIns="0" bIns="0" rtlCol="0"/>
-            <a:lstStyle/>
-            <a:p/>
-          </p:txBody>
-        </p:sp>
-        <p:pic>
-          <p:nvPicPr>
-            <p:cNvPr id="57" name="object 57" descr=""/>
-            <p:cNvPicPr/>
-            <p:nvPr/>
-          </p:nvPicPr>
-          <p:blipFill>
-            <a:blip r:embed="rId18" cstate="print"/>
-            <a:stretch>
-              <a:fillRect/>
-            </a:stretch>
-          </p:blipFill>
-          <p:spPr>
-            <a:xfrm>
-              <a:off x="74764" y="3533939"/>
-              <a:ext cx="106933" cy="106933"/>
-            </a:xfrm>
-            <a:prstGeom prst="rect">
-              <a:avLst/>
-            </a:prstGeom>
-          </p:spPr>
-        </p:pic>
-      </p:grpSp>
-      <p:sp>
-        <p:nvSpPr>
-          <p:cNvPr id="58" name="object 58" descr=""/>
-          <p:cNvSpPr txBox="1"/>
-          <p:nvPr/>
-        </p:nvSpPr>
-        <p:spPr>
-          <a:xfrm>
-            <a:off x="188099" y="3536521"/>
-            <a:ext cx="861694" cy="94615"/>
-          </a:xfrm>
-          <a:prstGeom prst="rect">
-            <a:avLst/>
-          </a:prstGeom>
-        </p:spPr>
-        <p:txBody>
-          <a:bodyPr wrap="square" lIns="0" tIns="12700" rIns="0" bIns="0" rtlCol="0" vert="horz">
-            <a:spAutoFit/>
-          </a:bodyPr>
-          <a:lstStyle/>
-          <a:p>
-            <a:pPr marL="12700">
-              <a:lnSpc>
-                <a:spcPct val="100000"/>
-              </a:lnSpc>
-              <a:spcBef>
-                <a:spcPts val="100"/>
-              </a:spcBef>
-            </a:pPr>
-            <a:r>
-              <a:rPr dirty="0" sz="450" spc="-30">
-                <a:latin typeface="Verdana"/>
-                <a:cs typeface="Verdana"/>
-              </a:rPr>
-              <a:t>Граф.</a:t>
-            </a:r>
-            <a:r>
-              <a:rPr dirty="0" sz="450" spc="-10">
-                <a:latin typeface="Verdana"/>
-                <a:cs typeface="Verdana"/>
-              </a:rPr>
-              <a:t> </a:t>
-            </a:r>
-            <a:r>
-              <a:rPr dirty="0" sz="450">
-                <a:latin typeface="Verdana"/>
-                <a:cs typeface="Verdana"/>
-              </a:rPr>
-              <a:t>редакторы</a:t>
-            </a:r>
-            <a:r>
-              <a:rPr dirty="0" sz="450" spc="5">
-                <a:latin typeface="Verdana"/>
-                <a:cs typeface="Verdana"/>
-              </a:rPr>
-              <a:t> </a:t>
-            </a:r>
-            <a:r>
-              <a:rPr dirty="0" sz="450" spc="-30">
-                <a:latin typeface="Verdana"/>
-                <a:cs typeface="Verdana"/>
-              </a:rPr>
-              <a:t>(Ps,</a:t>
-            </a:r>
-            <a:r>
-              <a:rPr dirty="0" sz="450" spc="-5">
-                <a:latin typeface="Verdana"/>
-                <a:cs typeface="Verdana"/>
-              </a:rPr>
-              <a:t> </a:t>
-            </a:r>
-            <a:r>
-              <a:rPr dirty="0" sz="450" spc="-10">
-                <a:latin typeface="Verdana"/>
-                <a:cs typeface="Verdana"/>
-              </a:rPr>
-              <a:t>Figma)</a:t>
-            </a:r>
-            <a:endParaRPr sz="450">
-              <a:latin typeface="Verdana"/>
-              <a:cs typeface="Verdana"/>
-            </a:endParaRPr>
-          </a:p>
-        </p:txBody>
-      </p:sp>
-      <p:grpSp>
-        <p:nvGrpSpPr>
-          <p:cNvPr id="59" name="object 59" descr=""/>
-          <p:cNvGrpSpPr/>
-          <p:nvPr/>
-        </p:nvGrpSpPr>
-        <p:grpSpPr>
-          <a:xfrm>
-            <a:off x="74765" y="3663787"/>
-            <a:ext cx="1108075" cy="15875"/>
-            <a:chOff x="74765" y="3663787"/>
-            <a:chExt cx="1108075" cy="15875"/>
-          </a:xfrm>
-        </p:grpSpPr>
-        <p:sp>
-          <p:nvSpPr>
-            <p:cNvPr id="60" name="object 60" descr=""/>
-            <p:cNvSpPr/>
-            <p:nvPr/>
-          </p:nvSpPr>
-          <p:spPr>
-            <a:xfrm>
-              <a:off x="74765" y="3663787"/>
-              <a:ext cx="1108075" cy="15875"/>
-            </a:xfrm>
-            <a:custGeom>
-              <a:avLst/>
-              <a:gdLst/>
-              <a:ahLst/>
-              <a:cxnLst/>
-              <a:rect l="l" t="t" r="r" b="b"/>
-              <a:pathLst>
-                <a:path w="1108075" h="15875">
-                  <a:moveTo>
-                    <a:pt x="1107528" y="0"/>
-                  </a:moveTo>
-                  <a:lnTo>
-                    <a:pt x="0" y="0"/>
-                  </a:lnTo>
-                  <a:lnTo>
-                    <a:pt x="0" y="15274"/>
-                  </a:lnTo>
-                  <a:lnTo>
-                    <a:pt x="1107528" y="15274"/>
-                  </a:lnTo>
-                  <a:lnTo>
-                    <a:pt x="1107528" y="0"/>
-                  </a:lnTo>
-                  <a:close/>
-                </a:path>
-              </a:pathLst>
-            </a:custGeom>
-            <a:solidFill>
-              <a:srgbClr val="DADADA"/>
-            </a:solidFill>
-          </p:spPr>
-          <p:txBody>
-            <a:bodyPr wrap="square" lIns="0" tIns="0" rIns="0" bIns="0" rtlCol="0"/>
-            <a:lstStyle/>
-            <a:p/>
-          </p:txBody>
-        </p:sp>
-        <p:sp>
-          <p:nvSpPr>
-            <p:cNvPr id="61" name="object 61" descr=""/>
-            <p:cNvSpPr/>
-            <p:nvPr/>
-          </p:nvSpPr>
-          <p:spPr>
-            <a:xfrm>
-              <a:off x="74765" y="3663787"/>
-              <a:ext cx="943610" cy="15875"/>
-            </a:xfrm>
-            <a:custGeom>
-              <a:avLst/>
-              <a:gdLst/>
-              <a:ahLst/>
-              <a:cxnLst/>
-              <a:rect l="l" t="t" r="r" b="b"/>
-              <a:pathLst>
-                <a:path w="943610" h="15875">
-                  <a:moveTo>
-                    <a:pt x="943312" y="0"/>
-                  </a:moveTo>
-                  <a:lnTo>
-                    <a:pt x="0" y="0"/>
-                  </a:lnTo>
-                  <a:lnTo>
-                    <a:pt x="0" y="15274"/>
-                  </a:lnTo>
-                  <a:lnTo>
-                    <a:pt x="943312" y="15274"/>
-                  </a:lnTo>
-                  <a:lnTo>
-                    <a:pt x="943312" y="0"/>
-                  </a:lnTo>
-                  <a:close/>
-                </a:path>
-              </a:pathLst>
-            </a:custGeom>
-            <a:solidFill>
-              <a:srgbClr val="000000"/>
-            </a:solidFill>
-          </p:spPr>
-          <p:txBody>
-            <a:bodyPr wrap="square" lIns="0" tIns="0" rIns="0" bIns="0" rtlCol="0"/>
-            <a:lstStyle/>
-            <a:p/>
-          </p:txBody>
-        </p:sp>
-      </p:grpSp>
-      <p:pic>
-        <p:nvPicPr>
-          <p:cNvPr id="62" name="object 62" descr=""/>
           <p:cNvPicPr/>
           <p:nvPr/>
         </p:nvPicPr>
@@ -16152,8 +17028,8 @@
         </p:blipFill>
         <p:spPr>
           <a:xfrm>
-            <a:off x="74764" y="3946397"/>
-            <a:ext cx="106933" cy="106934"/>
+            <a:off x="77863" y="3883609"/>
+            <a:ext cx="101917" cy="88557"/>
           </a:xfrm>
           <a:prstGeom prst="rect">
             <a:avLst/>
@@ -16162,13 +17038,13 @@
       </p:pic>
       <p:sp>
         <p:nvSpPr>
-          <p:cNvPr id="63" name="object 63" descr=""/>
+          <p:cNvPr id="55" name="object 55" descr=""/>
           <p:cNvSpPr txBox="1"/>
           <p:nvPr/>
         </p:nvSpPr>
         <p:spPr>
           <a:xfrm>
-            <a:off x="188099" y="3758024"/>
+            <a:off x="188683" y="3686039"/>
             <a:ext cx="811530" cy="285115"/>
           </a:xfrm>
           <a:prstGeom prst="rect">
@@ -16310,27 +17186,27 @@
       </p:sp>
       <p:grpSp>
         <p:nvGrpSpPr>
-          <p:cNvPr id="64" name="object 64" descr=""/>
+          <p:cNvPr id="56" name="object 56" descr=""/>
           <p:cNvGrpSpPr/>
           <p:nvPr/>
         </p:nvGrpSpPr>
         <p:grpSpPr>
           <a:xfrm>
-            <a:off x="74764" y="4076253"/>
-            <a:ext cx="1108075" cy="156845"/>
-            <a:chOff x="74764" y="4076253"/>
-            <a:chExt cx="1108075" cy="156845"/>
+            <a:off x="75349" y="4004270"/>
+            <a:ext cx="1108075" cy="15875"/>
+            <a:chOff x="75349" y="4004270"/>
+            <a:chExt cx="1108075" cy="15875"/>
           </a:xfrm>
         </p:grpSpPr>
         <p:sp>
           <p:nvSpPr>
-            <p:cNvPr id="65" name="object 65" descr=""/>
+            <p:cNvPr id="57" name="object 57" descr=""/>
             <p:cNvSpPr/>
             <p:nvPr/>
           </p:nvSpPr>
           <p:spPr>
             <a:xfrm>
-              <a:off x="74765" y="4076253"/>
+              <a:off x="75349" y="4004270"/>
               <a:ext cx="1108075" cy="15875"/>
             </a:xfrm>
             <a:custGeom>
@@ -16372,13 +17248,13 @@
         </p:sp>
         <p:sp>
           <p:nvSpPr>
-            <p:cNvPr id="66" name="object 66" descr=""/>
+            <p:cNvPr id="58" name="object 58" descr=""/>
             <p:cNvSpPr/>
             <p:nvPr/>
           </p:nvSpPr>
           <p:spPr>
             <a:xfrm>
-              <a:off x="74765" y="4076253"/>
+              <a:off x="75349" y="4004270"/>
               <a:ext cx="996950" cy="15875"/>
             </a:xfrm>
             <a:custGeom>
@@ -16418,38 +17294,382 @@
             <a:p/>
           </p:txBody>
         </p:sp>
-        <p:pic>
-          <p:nvPicPr>
-            <p:cNvPr id="67" name="object 67" descr=""/>
-            <p:cNvPicPr/>
-            <p:nvPr/>
-          </p:nvPicPr>
-          <p:blipFill>
-            <a:blip r:embed="rId20" cstate="print"/>
-            <a:stretch>
-              <a:fillRect/>
-            </a:stretch>
-          </p:blipFill>
-          <p:spPr>
-            <a:xfrm>
-              <a:off x="74764" y="4125899"/>
-              <a:ext cx="106933" cy="106934"/>
-            </a:xfrm>
-            <a:prstGeom prst="rect">
-              <a:avLst/>
-            </a:prstGeom>
-          </p:spPr>
-        </p:pic>
       </p:grpSp>
       <p:sp>
         <p:nvSpPr>
-          <p:cNvPr id="68" name="object 68" descr=""/>
+          <p:cNvPr id="59" name="object 59" descr=""/>
+          <p:cNvSpPr/>
+          <p:nvPr/>
+        </p:nvSpPr>
+        <p:spPr>
+          <a:xfrm>
+            <a:off x="90995" y="4078630"/>
+            <a:ext cx="76200" cy="59055"/>
+          </a:xfrm>
+          <a:custGeom>
+            <a:avLst/>
+            <a:gdLst/>
+            <a:ahLst/>
+            <a:cxnLst/>
+            <a:rect l="l" t="t" r="r" b="b"/>
+            <a:pathLst>
+              <a:path w="76200" h="59054">
+                <a:moveTo>
+                  <a:pt x="190" y="46647"/>
+                </a:moveTo>
+                <a:lnTo>
+                  <a:pt x="0" y="55143"/>
+                </a:lnTo>
+                <a:lnTo>
+                  <a:pt x="64719" y="55143"/>
+                </a:lnTo>
+                <a:lnTo>
+                  <a:pt x="64719" y="59016"/>
+                </a:lnTo>
+                <a:lnTo>
+                  <a:pt x="75679" y="50939"/>
+                </a:lnTo>
+                <a:lnTo>
+                  <a:pt x="69914" y="46697"/>
+                </a:lnTo>
+                <a:lnTo>
+                  <a:pt x="53807" y="46672"/>
+                </a:lnTo>
+                <a:lnTo>
+                  <a:pt x="26136" y="46672"/>
+                </a:lnTo>
+                <a:lnTo>
+                  <a:pt x="190" y="46647"/>
+                </a:lnTo>
+                <a:close/>
+              </a:path>
+              <a:path w="76200" h="59054">
+                <a:moveTo>
+                  <a:pt x="64719" y="42875"/>
+                </a:moveTo>
+                <a:lnTo>
+                  <a:pt x="64757" y="46456"/>
+                </a:lnTo>
+                <a:lnTo>
+                  <a:pt x="64554" y="46697"/>
+                </a:lnTo>
+                <a:lnTo>
+                  <a:pt x="69914" y="46697"/>
+                </a:lnTo>
+                <a:lnTo>
+                  <a:pt x="64719" y="42875"/>
+                </a:lnTo>
+                <a:close/>
+              </a:path>
+              <a:path w="76200" h="59054">
+                <a:moveTo>
+                  <a:pt x="60566" y="46659"/>
+                </a:moveTo>
+                <a:lnTo>
+                  <a:pt x="53809" y="46672"/>
+                </a:lnTo>
+                <a:lnTo>
+                  <a:pt x="61895" y="46672"/>
+                </a:lnTo>
+                <a:lnTo>
+                  <a:pt x="60566" y="46659"/>
+                </a:lnTo>
+                <a:close/>
+              </a:path>
+              <a:path w="76200" h="59054">
+                <a:moveTo>
+                  <a:pt x="51657" y="15938"/>
+                </a:moveTo>
+                <a:lnTo>
+                  <a:pt x="29222" y="15938"/>
+                </a:lnTo>
+                <a:lnTo>
+                  <a:pt x="37236" y="17106"/>
+                </a:lnTo>
+                <a:lnTo>
+                  <a:pt x="44040" y="19954"/>
+                </a:lnTo>
+                <a:lnTo>
+                  <a:pt x="48474" y="25415"/>
+                </a:lnTo>
+                <a:lnTo>
+                  <a:pt x="49943" y="32273"/>
+                </a:lnTo>
+                <a:lnTo>
+                  <a:pt x="47853" y="39306"/>
+                </a:lnTo>
+                <a:lnTo>
+                  <a:pt x="44843" y="44259"/>
+                </a:lnTo>
+                <a:lnTo>
+                  <a:pt x="40309" y="46647"/>
+                </a:lnTo>
+                <a:lnTo>
+                  <a:pt x="26136" y="46672"/>
+                </a:lnTo>
+                <a:lnTo>
+                  <a:pt x="53807" y="46672"/>
+                </a:lnTo>
+                <a:lnTo>
+                  <a:pt x="53365" y="46634"/>
+                </a:lnTo>
+                <a:lnTo>
+                  <a:pt x="53340" y="46443"/>
+                </a:lnTo>
+                <a:lnTo>
+                  <a:pt x="53555" y="46088"/>
+                </a:lnTo>
+                <a:lnTo>
+                  <a:pt x="57810" y="40347"/>
+                </a:lnTo>
+                <a:lnTo>
+                  <a:pt x="59283" y="34124"/>
+                </a:lnTo>
+                <a:lnTo>
+                  <a:pt x="57988" y="27317"/>
+                </a:lnTo>
+                <a:lnTo>
+                  <a:pt x="54014" y="18068"/>
+                </a:lnTo>
+                <a:lnTo>
+                  <a:pt x="51657" y="15938"/>
+                </a:lnTo>
+                <a:close/>
+              </a:path>
+              <a:path w="76200" h="59054">
+                <a:moveTo>
+                  <a:pt x="14973" y="0"/>
+                </a:moveTo>
+                <a:lnTo>
+                  <a:pt x="6362" y="1625"/>
+                </a:lnTo>
+                <a:lnTo>
+                  <a:pt x="2324" y="5638"/>
+                </a:lnTo>
+                <a:lnTo>
+                  <a:pt x="210" y="15697"/>
+                </a:lnTo>
+                <a:lnTo>
+                  <a:pt x="175" y="15938"/>
+                </a:lnTo>
+                <a:lnTo>
+                  <a:pt x="2380" y="21323"/>
+                </a:lnTo>
+                <a:lnTo>
+                  <a:pt x="8308" y="25415"/>
+                </a:lnTo>
+                <a:lnTo>
+                  <a:pt x="10160" y="26136"/>
+                </a:lnTo>
+                <a:lnTo>
+                  <a:pt x="12204" y="26479"/>
+                </a:lnTo>
+                <a:lnTo>
+                  <a:pt x="12255" y="26682"/>
+                </a:lnTo>
+                <a:lnTo>
+                  <a:pt x="11823" y="28841"/>
+                </a:lnTo>
+                <a:lnTo>
+                  <a:pt x="11734" y="33261"/>
+                </a:lnTo>
+                <a:lnTo>
+                  <a:pt x="11455" y="33566"/>
+                </a:lnTo>
+                <a:lnTo>
+                  <a:pt x="10261" y="33820"/>
+                </a:lnTo>
+                <a:lnTo>
+                  <a:pt x="9245" y="33959"/>
+                </a:lnTo>
+                <a:lnTo>
+                  <a:pt x="8470" y="34099"/>
+                </a:lnTo>
+                <a:lnTo>
+                  <a:pt x="17805" y="43713"/>
+                </a:lnTo>
+                <a:lnTo>
+                  <a:pt x="23746" y="32219"/>
+                </a:lnTo>
+                <a:lnTo>
+                  <a:pt x="20167" y="32219"/>
+                </a:lnTo>
+                <a:lnTo>
+                  <a:pt x="20256" y="30327"/>
+                </a:lnTo>
+                <a:lnTo>
+                  <a:pt x="21659" y="21894"/>
+                </a:lnTo>
+                <a:lnTo>
+                  <a:pt x="13843" y="21894"/>
+                </a:lnTo>
+                <a:lnTo>
+                  <a:pt x="9245" y="21513"/>
+                </a:lnTo>
+                <a:lnTo>
+                  <a:pt x="5791" y="17856"/>
+                </a:lnTo>
+                <a:lnTo>
+                  <a:pt x="5672" y="11571"/>
+                </a:lnTo>
+                <a:lnTo>
+                  <a:pt x="5715" y="8343"/>
+                </a:lnTo>
+                <a:lnTo>
+                  <a:pt x="10248" y="4381"/>
+                </a:lnTo>
+                <a:lnTo>
+                  <a:pt x="23816" y="4381"/>
+                </a:lnTo>
+                <a:lnTo>
+                  <a:pt x="23417" y="2768"/>
+                </a:lnTo>
+                <a:lnTo>
+                  <a:pt x="21869" y="2768"/>
+                </a:lnTo>
+                <a:lnTo>
+                  <a:pt x="21551" y="2717"/>
+                </a:lnTo>
+                <a:lnTo>
+                  <a:pt x="18122" y="609"/>
+                </a:lnTo>
+                <a:lnTo>
+                  <a:pt x="14973" y="0"/>
+                </a:lnTo>
+                <a:close/>
+              </a:path>
+              <a:path w="76200" h="59054">
+                <a:moveTo>
+                  <a:pt x="24015" y="31699"/>
+                </a:moveTo>
+                <a:lnTo>
+                  <a:pt x="20167" y="32219"/>
+                </a:lnTo>
+                <a:lnTo>
+                  <a:pt x="23746" y="32219"/>
+                </a:lnTo>
+                <a:lnTo>
+                  <a:pt x="24015" y="31699"/>
+                </a:lnTo>
+                <a:close/>
+              </a:path>
+              <a:path w="76200" h="59054">
+                <a:moveTo>
+                  <a:pt x="37562" y="8552"/>
+                </a:moveTo>
+                <a:lnTo>
+                  <a:pt x="27381" y="9740"/>
+                </a:lnTo>
+                <a:lnTo>
+                  <a:pt x="21463" y="11785"/>
+                </a:lnTo>
+                <a:lnTo>
+                  <a:pt x="17119" y="15697"/>
+                </a:lnTo>
+                <a:lnTo>
+                  <a:pt x="14020" y="21628"/>
+                </a:lnTo>
+                <a:lnTo>
+                  <a:pt x="13843" y="21894"/>
+                </a:lnTo>
+                <a:lnTo>
+                  <a:pt x="21659" y="21894"/>
+                </a:lnTo>
+                <a:lnTo>
+                  <a:pt x="21772" y="21310"/>
+                </a:lnTo>
+                <a:lnTo>
+                  <a:pt x="29222" y="15938"/>
+                </a:lnTo>
+                <a:lnTo>
+                  <a:pt x="51657" y="15938"/>
+                </a:lnTo>
+                <a:lnTo>
+                  <a:pt x="46823" y="11571"/>
+                </a:lnTo>
+                <a:lnTo>
+                  <a:pt x="37562" y="8552"/>
+                </a:lnTo>
+                <a:close/>
+              </a:path>
+              <a:path w="76200" h="59054">
+                <a:moveTo>
+                  <a:pt x="23816" y="4381"/>
+                </a:moveTo>
+                <a:lnTo>
+                  <a:pt x="10248" y="4381"/>
+                </a:lnTo>
+                <a:lnTo>
+                  <a:pt x="16598" y="5422"/>
+                </a:lnTo>
+                <a:lnTo>
+                  <a:pt x="17653" y="5791"/>
+                </a:lnTo>
+                <a:lnTo>
+                  <a:pt x="18605" y="6502"/>
+                </a:lnTo>
+                <a:lnTo>
+                  <a:pt x="17335" y="8089"/>
+                </a:lnTo>
+                <a:lnTo>
+                  <a:pt x="24650" y="8597"/>
+                </a:lnTo>
+                <a:lnTo>
+                  <a:pt x="24758" y="8432"/>
+                </a:lnTo>
+                <a:lnTo>
+                  <a:pt x="24742" y="8089"/>
+                </a:lnTo>
+                <a:lnTo>
+                  <a:pt x="24498" y="7239"/>
+                </a:lnTo>
+                <a:lnTo>
+                  <a:pt x="23816" y="4381"/>
+                </a:lnTo>
+                <a:close/>
+              </a:path>
+              <a:path w="76200" h="59054">
+                <a:moveTo>
+                  <a:pt x="23037" y="1231"/>
+                </a:moveTo>
+                <a:lnTo>
+                  <a:pt x="22694" y="1625"/>
+                </a:lnTo>
+                <a:lnTo>
+                  <a:pt x="22402" y="1892"/>
+                </a:lnTo>
+                <a:lnTo>
+                  <a:pt x="21869" y="2768"/>
+                </a:lnTo>
+                <a:lnTo>
+                  <a:pt x="23417" y="2768"/>
+                </a:lnTo>
+                <a:lnTo>
+                  <a:pt x="23037" y="1231"/>
+                </a:lnTo>
+                <a:close/>
+              </a:path>
+            </a:pathLst>
+          </a:custGeom>
+          <a:solidFill>
+            <a:srgbClr val="000000"/>
+          </a:solidFill>
+        </p:spPr>
+        <p:txBody>
+          <a:bodyPr wrap="square" lIns="0" tIns="0" rIns="0" bIns="0" rtlCol="0"/>
+          <a:lstStyle/>
+          <a:p/>
+        </p:txBody>
+      </p:sp>
+      <p:sp>
+        <p:nvSpPr>
+          <p:cNvPr id="60" name="object 60" descr=""/>
           <p:cNvSpPr txBox="1"/>
           <p:nvPr/>
         </p:nvSpPr>
         <p:spPr>
           <a:xfrm>
-            <a:off x="188099" y="4128468"/>
+            <a:off x="188683" y="4056498"/>
             <a:ext cx="662940" cy="94615"/>
           </a:xfrm>
           <a:prstGeom prst="rect">
@@ -16507,27 +17727,27 @@
       </p:sp>
       <p:grpSp>
         <p:nvGrpSpPr>
-          <p:cNvPr id="69" name="object 69" descr=""/>
+          <p:cNvPr id="61" name="object 61" descr=""/>
           <p:cNvGrpSpPr/>
           <p:nvPr/>
         </p:nvGrpSpPr>
         <p:grpSpPr>
           <a:xfrm>
-            <a:off x="74764" y="4255742"/>
+            <a:off x="75349" y="4183759"/>
             <a:ext cx="1108075" cy="156845"/>
-            <a:chOff x="74764" y="4255742"/>
+            <a:chOff x="75349" y="4183759"/>
             <a:chExt cx="1108075" cy="156845"/>
           </a:xfrm>
         </p:grpSpPr>
         <p:sp>
           <p:nvSpPr>
-            <p:cNvPr id="70" name="object 70" descr=""/>
+            <p:cNvPr id="62" name="object 62" descr=""/>
             <p:cNvSpPr/>
             <p:nvPr/>
           </p:nvSpPr>
           <p:spPr>
             <a:xfrm>
-              <a:off x="74765" y="4255742"/>
+              <a:off x="75349" y="4183759"/>
               <a:ext cx="1108075" cy="15875"/>
             </a:xfrm>
             <a:custGeom>
@@ -16569,13 +17789,13 @@
         </p:sp>
         <p:sp>
           <p:nvSpPr>
-            <p:cNvPr id="71" name="object 71" descr=""/>
+            <p:cNvPr id="63" name="object 63" descr=""/>
             <p:cNvSpPr/>
             <p:nvPr/>
           </p:nvSpPr>
           <p:spPr>
             <a:xfrm>
-              <a:off x="74765" y="4255742"/>
+              <a:off x="75349" y="4183759"/>
               <a:ext cx="996950" cy="15875"/>
             </a:xfrm>
             <a:custGeom>
@@ -16617,20 +17837,20 @@
         </p:sp>
         <p:pic>
           <p:nvPicPr>
-            <p:cNvPr id="72" name="object 72" descr=""/>
+            <p:cNvPr id="64" name="object 64" descr=""/>
             <p:cNvPicPr/>
             <p:nvPr/>
           </p:nvPicPr>
           <p:blipFill>
-            <a:blip r:embed="rId21" cstate="print"/>
+            <a:blip r:embed="rId20" cstate="print"/>
             <a:stretch>
               <a:fillRect/>
             </a:stretch>
           </p:blipFill>
           <p:spPr>
             <a:xfrm>
-              <a:off x="74764" y="4305388"/>
-              <a:ext cx="106933" cy="106934"/>
+              <a:off x="75349" y="4233417"/>
+              <a:ext cx="106934" cy="106934"/>
             </a:xfrm>
             <a:prstGeom prst="rect">
               <a:avLst/>
@@ -16640,13 +17860,13 @@
       </p:grpSp>
       <p:sp>
         <p:nvSpPr>
-          <p:cNvPr id="73" name="object 73" descr=""/>
+          <p:cNvPr id="65" name="object 65" descr=""/>
           <p:cNvSpPr txBox="1"/>
           <p:nvPr/>
         </p:nvSpPr>
         <p:spPr>
           <a:xfrm>
-            <a:off x="188099" y="4307970"/>
+            <a:off x="188683" y="4235987"/>
             <a:ext cx="624840" cy="94615"/>
           </a:xfrm>
           <a:prstGeom prst="rect">
@@ -16718,27 +17938,27 @@
       </p:sp>
       <p:grpSp>
         <p:nvGrpSpPr>
-          <p:cNvPr id="74" name="object 74" descr=""/>
+          <p:cNvPr id="66" name="object 66" descr=""/>
           <p:cNvGrpSpPr/>
           <p:nvPr/>
         </p:nvGrpSpPr>
         <p:grpSpPr>
           <a:xfrm>
-            <a:off x="74765" y="4435244"/>
+            <a:off x="75349" y="4363261"/>
             <a:ext cx="1108075" cy="15875"/>
-            <a:chOff x="74765" y="4435244"/>
+            <a:chOff x="75349" y="4363261"/>
             <a:chExt cx="1108075" cy="15875"/>
           </a:xfrm>
         </p:grpSpPr>
         <p:sp>
           <p:nvSpPr>
-            <p:cNvPr id="75" name="object 75" descr=""/>
+            <p:cNvPr id="67" name="object 67" descr=""/>
             <p:cNvSpPr/>
             <p:nvPr/>
           </p:nvSpPr>
           <p:spPr>
             <a:xfrm>
-              <a:off x="74765" y="4435244"/>
+              <a:off x="75349" y="4363261"/>
               <a:ext cx="1108075" cy="15875"/>
             </a:xfrm>
             <a:custGeom>
@@ -16780,13 +18000,13 @@
         </p:sp>
         <p:sp>
           <p:nvSpPr>
-            <p:cNvPr id="76" name="object 76" descr=""/>
+            <p:cNvPr id="68" name="object 68" descr=""/>
             <p:cNvSpPr/>
             <p:nvPr/>
           </p:nvSpPr>
           <p:spPr>
             <a:xfrm>
-              <a:off x="74765" y="4435244"/>
+              <a:off x="75349" y="4363261"/>
               <a:ext cx="833119" cy="15875"/>
             </a:xfrm>
             <a:custGeom>
@@ -16827,24 +18047,107 @@
           </p:txBody>
         </p:sp>
       </p:grpSp>
+      <p:sp>
+        <p:nvSpPr>
+          <p:cNvPr id="69" name="object 69" descr=""/>
+          <p:cNvSpPr txBox="1"/>
+          <p:nvPr/>
+        </p:nvSpPr>
+        <p:spPr>
+          <a:xfrm>
+            <a:off x="95108" y="5037389"/>
+            <a:ext cx="1067435" cy="332105"/>
+          </a:xfrm>
+          <a:prstGeom prst="rect">
+            <a:avLst/>
+          </a:prstGeom>
+        </p:spPr>
+        <p:txBody>
+          <a:bodyPr wrap="square" lIns="0" tIns="61594" rIns="0" bIns="0" rtlCol="0" vert="horz">
+            <a:spAutoFit/>
+          </a:bodyPr>
+          <a:lstStyle/>
+          <a:p>
+            <a:pPr algn="ctr">
+              <a:lnSpc>
+                <a:spcPct val="100000"/>
+              </a:lnSpc>
+              <a:spcBef>
+                <a:spcPts val="484"/>
+              </a:spcBef>
+            </a:pPr>
+            <a:r>
+              <a:rPr dirty="0" sz="850" spc="10" b="1">
+                <a:latin typeface="Tahoma"/>
+                <a:cs typeface="Tahoma"/>
+              </a:rPr>
+              <a:t>ПРИМЕРЫ</a:t>
+            </a:r>
+            <a:r>
+              <a:rPr dirty="0" sz="850" spc="190" b="1">
+                <a:latin typeface="Tahoma"/>
+                <a:cs typeface="Tahoma"/>
+              </a:rPr>
+              <a:t> </a:t>
+            </a:r>
+            <a:r>
+              <a:rPr dirty="0" sz="850" spc="-10" b="1">
+                <a:latin typeface="Tahoma"/>
+                <a:cs typeface="Tahoma"/>
+              </a:rPr>
+              <a:t>РАБОТ</a:t>
+            </a:r>
+            <a:endParaRPr sz="850">
+              <a:latin typeface="Tahoma"/>
+              <a:cs typeface="Tahoma"/>
+            </a:endParaRPr>
+          </a:p>
+          <a:p>
+            <a:pPr algn="ctr">
+              <a:lnSpc>
+                <a:spcPct val="100000"/>
+              </a:lnSpc>
+              <a:spcBef>
+                <a:spcPts val="285"/>
+              </a:spcBef>
+            </a:pPr>
+            <a:r>
+              <a:rPr dirty="0" u="sng" sz="600" spc="45">
+                <a:uFill>
+                  <a:solidFill>
+                    <a:srgbClr val="000000"/>
+                  </a:solidFill>
+                </a:uFill>
+                <a:latin typeface="Tahoma"/>
+                <a:cs typeface="Tahoma"/>
+              </a:rPr>
+              <a:t>ВЕРСТКА</a:t>
+            </a:r>
+            <a:endParaRPr sz="600">
+              <a:latin typeface="Tahoma"/>
+              <a:cs typeface="Tahoma"/>
+            </a:endParaRPr>
+          </a:p>
+        </p:txBody>
+      </p:sp>
       <p:pic>
         <p:nvPicPr>
-          <p:cNvPr id="77" name="object 77" descr="">
-            <a:hlinkClick r:id="rId22"/>
+          <p:cNvPr id="70" name="object 70" descr="">
+            <a:hlinkClick r:id="rId21"/>
           </p:cNvPr>
           <p:cNvPicPr/>
           <p:nvPr/>
         </p:nvPicPr>
         <p:blipFill>
-          <a:blip r:embed="rId23" cstate="print"/>
+          <a:blip r:embed="rId22" cstate="print"/>
           <a:stretch>
             <a:fillRect/>
           </a:stretch>
         </p:blipFill>
         <p:spPr>
           <a:xfrm>
-            <a:off x="158178" y="5385429"/>
-            <a:ext cx="432624" cy="306748"/>
+            <a:off x="257759" y="5409234"/>
+            <a:ext cx="344633" cy="229755"/>
           </a:xfrm>
           <a:prstGeom prst="rect">
             <a:avLst/>
@@ -16853,22 +18156,142 @@
       </p:pic>
       <p:pic>
         <p:nvPicPr>
-          <p:cNvPr id="78" name="object 78" descr="">
-            <a:hlinkClick r:id="rId24"/>
+          <p:cNvPr id="71" name="object 71" descr="">
+            <a:hlinkClick r:id="rId23"/>
           </p:cNvPr>
           <p:cNvPicPr/>
           <p:nvPr/>
         </p:nvPicPr>
         <p:blipFill>
-          <a:blip r:embed="rId25" cstate="print"/>
+          <a:blip r:embed="rId24" cstate="print"/>
           <a:stretch>
             <a:fillRect/>
           </a:stretch>
         </p:blipFill>
         <p:spPr>
           <a:xfrm>
-            <a:off x="666572" y="5385429"/>
-            <a:ext cx="432624" cy="306748"/>
+            <a:off x="654938" y="5409234"/>
+            <a:ext cx="344633" cy="229755"/>
+          </a:xfrm>
+          <a:prstGeom prst="rect">
+            <a:avLst/>
+          </a:prstGeom>
+        </p:spPr>
+      </p:pic>
+      <p:sp>
+        <p:nvSpPr>
+          <p:cNvPr id="72" name="object 72" descr=""/>
+          <p:cNvSpPr txBox="1"/>
+          <p:nvPr/>
+        </p:nvSpPr>
+        <p:spPr>
+          <a:xfrm>
+            <a:off x="247878" y="5679601"/>
+            <a:ext cx="763270" cy="117475"/>
+          </a:xfrm>
+          <a:prstGeom prst="rect">
+            <a:avLst/>
+          </a:prstGeom>
+        </p:spPr>
+        <p:txBody>
+          <a:bodyPr wrap="square" lIns="0" tIns="12700" rIns="0" bIns="0" rtlCol="0" vert="horz">
+            <a:spAutoFit/>
+          </a:bodyPr>
+          <a:lstStyle/>
+          <a:p>
+            <a:pPr marL="12700">
+              <a:lnSpc>
+                <a:spcPct val="100000"/>
+              </a:lnSpc>
+              <a:spcBef>
+                <a:spcPts val="100"/>
+              </a:spcBef>
+            </a:pPr>
+            <a:r>
+              <a:rPr dirty="0" u="sng" sz="600" spc="60">
+                <a:uFill>
+                  <a:solidFill>
+                    <a:srgbClr val="000000"/>
+                  </a:solidFill>
+                </a:uFill>
+                <a:latin typeface="Tahoma"/>
+                <a:cs typeface="Tahoma"/>
+              </a:rPr>
+              <a:t>ВЕБ-ПРИЛОЖ.</a:t>
+            </a:r>
+            <a:r>
+              <a:rPr dirty="0" u="sng" sz="600" spc="-25">
+                <a:uFill>
+                  <a:solidFill>
+                    <a:srgbClr val="000000"/>
+                  </a:solidFill>
+                </a:uFill>
+                <a:latin typeface="Tahoma"/>
+                <a:cs typeface="Tahoma"/>
+              </a:rPr>
+              <a:t> </a:t>
+            </a:r>
+            <a:r>
+              <a:rPr dirty="0" u="sng" sz="600" spc="-40">
+                <a:uFill>
+                  <a:solidFill>
+                    <a:srgbClr val="000000"/>
+                  </a:solidFill>
+                </a:uFill>
+                <a:latin typeface="Tahoma"/>
+                <a:cs typeface="Tahoma"/>
+              </a:rPr>
+              <a:t>/</a:t>
+            </a:r>
+            <a:r>
+              <a:rPr dirty="0" u="sng" sz="600" spc="-35">
+                <a:uFill>
+                  <a:solidFill>
+                    <a:srgbClr val="000000"/>
+                  </a:solidFill>
+                </a:uFill>
+                <a:latin typeface="Tahoma"/>
+                <a:cs typeface="Tahoma"/>
+              </a:rPr>
+              <a:t> </a:t>
+            </a:r>
+            <a:r>
+              <a:rPr dirty="0" u="sng" sz="600" spc="-25">
+                <a:uFill>
+                  <a:solidFill>
+                    <a:srgbClr val="000000"/>
+                  </a:solidFill>
+                </a:uFill>
+                <a:latin typeface="Tahoma"/>
+                <a:cs typeface="Tahoma"/>
+              </a:rPr>
+              <a:t>JS</a:t>
+            </a:r>
+            <a:endParaRPr sz="600">
+              <a:latin typeface="Tahoma"/>
+              <a:cs typeface="Tahoma"/>
+            </a:endParaRPr>
+          </a:p>
+        </p:txBody>
+      </p:sp>
+      <p:pic>
+        <p:nvPicPr>
+          <p:cNvPr id="73" name="object 73" descr="">
+            <a:hlinkClick r:id="rId25"/>
+          </p:cNvPr>
+          <p:cNvPicPr/>
+          <p:nvPr/>
+        </p:nvPicPr>
+        <p:blipFill>
+          <a:blip r:embed="rId26" cstate="print"/>
+          <a:stretch>
+            <a:fillRect/>
+          </a:stretch>
+        </p:blipFill>
+        <p:spPr>
+          <a:xfrm>
+            <a:off x="257759" y="5836970"/>
+            <a:ext cx="344633" cy="229755"/>
           </a:xfrm>
           <a:prstGeom prst="rect">
             <a:avLst/>
@@ -16877,55 +18300,129 @@
       </p:pic>
       <p:pic>
         <p:nvPicPr>
-          <p:cNvPr id="79" name="object 79" descr="">
-            <a:hlinkClick r:id="rId26"/>
+          <p:cNvPr id="74" name="object 74" descr="">
+            <a:hlinkClick r:id="rId27"/>
           </p:cNvPr>
           <p:cNvPicPr/>
           <p:nvPr/>
         </p:nvPicPr>
         <p:blipFill>
-          <a:blip r:embed="rId27" cstate="print"/>
+          <a:blip r:embed="rId28" cstate="print"/>
           <a:stretch>
             <a:fillRect/>
           </a:stretch>
         </p:blipFill>
         <p:spPr>
           <a:xfrm>
-            <a:off x="154965" y="5970509"/>
-            <a:ext cx="431554" cy="305525"/>
+            <a:off x="654938" y="5836970"/>
+            <a:ext cx="344633" cy="229755"/>
           </a:xfrm>
           <a:prstGeom prst="rect">
             <a:avLst/>
           </a:prstGeom>
         </p:spPr>
       </p:pic>
-      <p:pic>
-        <p:nvPicPr>
-          <p:cNvPr id="80" name="object 80" descr="">
-            <a:hlinkClick r:id="rId28"/>
-          </p:cNvPr>
-          <p:cNvPicPr/>
+      <p:sp>
+        <p:nvSpPr>
+          <p:cNvPr id="75" name="object 75" descr=""/>
+          <p:cNvSpPr txBox="1"/>
           <p:nvPr/>
-        </p:nvPicPr>
-        <p:blipFill>
-          <a:blip r:embed="rId29" cstate="print"/>
-          <a:stretch>
-            <a:fillRect/>
-          </a:stretch>
-        </p:blipFill>
+        </p:nvSpPr>
         <p:spPr>
           <a:xfrm>
-            <a:off x="662914" y="5970509"/>
-            <a:ext cx="431542" cy="305525"/>
+            <a:off x="97027" y="6107337"/>
+            <a:ext cx="1066165" cy="117475"/>
           </a:xfrm>
           <a:prstGeom prst="rect">
             <a:avLst/>
           </a:prstGeom>
         </p:spPr>
-      </p:pic>
+        <p:txBody>
+          <a:bodyPr wrap="square" lIns="0" tIns="12700" rIns="0" bIns="0" rtlCol="0" vert="horz">
+            <a:spAutoFit/>
+          </a:bodyPr>
+          <a:lstStyle/>
+          <a:p>
+            <a:pPr marL="12700">
+              <a:lnSpc>
+                <a:spcPct val="100000"/>
+              </a:lnSpc>
+              <a:spcBef>
+                <a:spcPts val="100"/>
+              </a:spcBef>
+            </a:pPr>
+            <a:r>
+              <a:rPr dirty="0" u="sng" sz="600" spc="60">
+                <a:uFill>
+                  <a:solidFill>
+                    <a:srgbClr val="000000"/>
+                  </a:solidFill>
+                </a:uFill>
+                <a:latin typeface="Tahoma"/>
+                <a:cs typeface="Tahoma"/>
+              </a:rPr>
+              <a:t>ВЕБ-ПРИЛОЖ.</a:t>
+            </a:r>
+            <a:r>
+              <a:rPr dirty="0" u="sng" sz="600" spc="-25">
+                <a:uFill>
+                  <a:solidFill>
+                    <a:srgbClr val="000000"/>
+                  </a:solidFill>
+                </a:uFill>
+                <a:latin typeface="Tahoma"/>
+                <a:cs typeface="Tahoma"/>
+              </a:rPr>
+              <a:t> </a:t>
+            </a:r>
+            <a:r>
+              <a:rPr dirty="0" u="sng" sz="600" spc="-40">
+                <a:uFill>
+                  <a:solidFill>
+                    <a:srgbClr val="000000"/>
+                  </a:solidFill>
+                </a:uFill>
+                <a:latin typeface="Tahoma"/>
+                <a:cs typeface="Tahoma"/>
+              </a:rPr>
+              <a:t>/</a:t>
+            </a:r>
+            <a:r>
+              <a:rPr dirty="0" u="sng" sz="600" spc="-35">
+                <a:uFill>
+                  <a:solidFill>
+                    <a:srgbClr val="000000"/>
+                  </a:solidFill>
+                </a:uFill>
+                <a:latin typeface="Tahoma"/>
+                <a:cs typeface="Tahoma"/>
+              </a:rPr>
+              <a:t> </a:t>
+            </a:r>
+            <a:r>
+              <a:rPr dirty="0" u="sng" sz="600" spc="50">
+                <a:uFill>
+                  <a:solidFill>
+                    <a:srgbClr val="000000"/>
+                  </a:solidFill>
+                </a:uFill>
+                <a:latin typeface="Tahoma"/>
+                <a:cs typeface="Tahoma"/>
+              </a:rPr>
+              <a:t>ANGULAR</a:t>
+            </a:r>
+            <a:endParaRPr sz="600">
+              <a:latin typeface="Tahoma"/>
+              <a:cs typeface="Tahoma"/>
+            </a:endParaRPr>
+          </a:p>
+        </p:txBody>
+      </p:sp>
       <p:pic>
         <p:nvPicPr>
-          <p:cNvPr id="81" name="object 81" descr=""/>
+          <p:cNvPr id="76" name="object 76" descr="">
+            <a:hlinkClick r:id="rId29"/>
+          </p:cNvPr>
           <p:cNvPicPr/>
           <p:nvPr/>
         </p:nvPicPr>
@@ -16937,8 +18434,8 @@
         </p:blipFill>
         <p:spPr>
           <a:xfrm>
-            <a:off x="410845" y="6329505"/>
-            <a:ext cx="431554" cy="324620"/>
+            <a:off x="456958" y="6264707"/>
+            <a:ext cx="344633" cy="229755"/>
           </a:xfrm>
           <a:prstGeom prst="rect">
             <a:avLst/>
@@ -16947,13 +18444,13 @@
       </p:pic>
       <p:sp>
         <p:nvSpPr>
-          <p:cNvPr id="82" name="object 82" descr=""/>
+          <p:cNvPr id="77" name="object 77" descr=""/>
           <p:cNvSpPr/>
           <p:nvPr/>
         </p:nvSpPr>
         <p:spPr>
           <a:xfrm>
-            <a:off x="1340193" y="2832544"/>
+            <a:off x="1340777" y="2833128"/>
             <a:ext cx="43815" cy="43815"/>
           </a:xfrm>
           <a:custGeom>
@@ -16995,13 +18492,13 @@
       </p:sp>
       <p:sp>
         <p:nvSpPr>
-          <p:cNvPr id="83" name="object 83" descr=""/>
+          <p:cNvPr id="78" name="object 78" descr=""/>
           <p:cNvSpPr txBox="1"/>
           <p:nvPr/>
         </p:nvSpPr>
         <p:spPr>
           <a:xfrm>
-            <a:off x="1326184" y="2490088"/>
+            <a:off x="1326768" y="2490672"/>
             <a:ext cx="2456180" cy="798830"/>
           </a:xfrm>
           <a:prstGeom prst="rect">
@@ -17430,27 +18927,27 @@
       </p:sp>
       <p:grpSp>
         <p:nvGrpSpPr>
-          <p:cNvPr id="84" name="object 84" descr=""/>
+          <p:cNvPr id="79" name="object 79" descr=""/>
           <p:cNvGrpSpPr/>
           <p:nvPr/>
         </p:nvGrpSpPr>
         <p:grpSpPr>
           <a:xfrm>
-            <a:off x="1340193" y="3336657"/>
+            <a:off x="1340777" y="3337242"/>
             <a:ext cx="43815" cy="1418590"/>
-            <a:chOff x="1340193" y="3336657"/>
+            <a:chOff x="1340777" y="3337242"/>
             <a:chExt cx="43815" cy="1418590"/>
           </a:xfrm>
         </p:grpSpPr>
         <p:sp>
           <p:nvSpPr>
-            <p:cNvPr id="85" name="object 85" descr=""/>
+            <p:cNvPr id="80" name="object 80" descr=""/>
             <p:cNvSpPr/>
             <p:nvPr/>
           </p:nvSpPr>
           <p:spPr>
             <a:xfrm>
-              <a:off x="1359884" y="3354450"/>
+              <a:off x="1360468" y="3355035"/>
               <a:ext cx="0" cy="1363980"/>
             </a:xfrm>
             <a:custGeom>
@@ -17485,13 +18982,13 @@
         </p:sp>
         <p:sp>
           <p:nvSpPr>
-            <p:cNvPr id="86" name="object 86" descr=""/>
+            <p:cNvPr id="81" name="object 81" descr=""/>
             <p:cNvSpPr/>
             <p:nvPr/>
           </p:nvSpPr>
           <p:spPr>
             <a:xfrm>
-              <a:off x="1340193" y="3336657"/>
+              <a:off x="1340777" y="3337242"/>
               <a:ext cx="43815" cy="1418590"/>
             </a:xfrm>
             <a:custGeom>
@@ -17606,7 +19103,7 @@
       </p:grpSp>
       <p:sp>
         <p:nvSpPr>
-          <p:cNvPr id="87" name="object 87" descr=""/>
+          <p:cNvPr id="82" name="object 82" descr=""/>
           <p:cNvSpPr txBox="1">
             <a:spLocks noGrp="1"/>
           </p:cNvSpPr>
@@ -18571,27 +20068,27 @@
       </p:sp>
       <p:grpSp>
         <p:nvGrpSpPr>
-          <p:cNvPr id="88" name="object 88" descr=""/>
+          <p:cNvPr id="83" name="object 83" descr=""/>
           <p:cNvGrpSpPr/>
           <p:nvPr/>
         </p:nvGrpSpPr>
         <p:grpSpPr>
           <a:xfrm>
-            <a:off x="1340193" y="5211825"/>
+            <a:off x="1340777" y="5212410"/>
             <a:ext cx="43815" cy="746125"/>
-            <a:chOff x="1340193" y="5211825"/>
+            <a:chOff x="1340777" y="5212410"/>
             <a:chExt cx="43815" cy="746125"/>
           </a:xfrm>
         </p:grpSpPr>
         <p:sp>
           <p:nvSpPr>
-            <p:cNvPr id="89" name="object 89" descr=""/>
+            <p:cNvPr id="84" name="object 84" descr=""/>
             <p:cNvSpPr/>
             <p:nvPr/>
           </p:nvSpPr>
           <p:spPr>
             <a:xfrm>
-              <a:off x="1359884" y="5237250"/>
+              <a:off x="1360468" y="5237835"/>
               <a:ext cx="0" cy="683895"/>
             </a:xfrm>
             <a:custGeom>
@@ -18626,13 +20123,13 @@
         </p:sp>
         <p:sp>
           <p:nvSpPr>
-            <p:cNvPr id="90" name="object 90" descr=""/>
+            <p:cNvPr id="85" name="object 85" descr=""/>
             <p:cNvSpPr/>
             <p:nvPr/>
           </p:nvSpPr>
           <p:spPr>
             <a:xfrm>
-              <a:off x="1340193" y="5211838"/>
+              <a:off x="1340777" y="5212422"/>
               <a:ext cx="43815" cy="746125"/>
             </a:xfrm>
             <a:custGeom>
@@ -18711,13 +20208,13 @@
       </p:grpSp>
       <p:sp>
         <p:nvSpPr>
-          <p:cNvPr id="91" name="object 91" descr=""/>
+          <p:cNvPr id="86" name="object 86" descr=""/>
           <p:cNvSpPr txBox="1"/>
           <p:nvPr/>
         </p:nvSpPr>
         <p:spPr>
           <a:xfrm>
-            <a:off x="1421663" y="5166110"/>
+            <a:off x="1422247" y="5166694"/>
             <a:ext cx="2419985" cy="1000760"/>
           </a:xfrm>
           <a:prstGeom prst="rect">
@@ -19237,14 +20734,14 @@
       </p:sp>
       <p:sp>
         <p:nvSpPr>
-          <p:cNvPr id="92" name="object 92" descr=""/>
+          <p:cNvPr id="87" name="object 87" descr=""/>
           <p:cNvSpPr/>
           <p:nvPr/>
         </p:nvSpPr>
         <p:spPr>
           <a:xfrm>
-            <a:off x="3871023" y="252704"/>
-            <a:ext cx="205740" cy="179705"/>
+            <a:off x="3762375" y="258965"/>
+            <a:ext cx="328295" cy="173990"/>
           </a:xfrm>
           <a:custGeom>
             <a:avLst/>
@@ -19253,21 +20750,21 @@
             <a:cxnLst/>
             <a:rect l="l" t="t" r="r" b="b"/>
             <a:pathLst>
-              <a:path w="205739" h="179704">
+              <a:path w="328295" h="173990">
                 <a:moveTo>
-                  <a:pt x="205676" y="0"/>
+                  <a:pt x="327723" y="0"/>
                 </a:moveTo>
                 <a:lnTo>
                   <a:pt x="0" y="0"/>
                 </a:lnTo>
                 <a:lnTo>
-                  <a:pt x="0" y="179196"/>
-                </a:lnTo>
-                <a:lnTo>
-                  <a:pt x="205676" y="179196"/>
-                </a:lnTo>
-                <a:lnTo>
-                  <a:pt x="205676" y="0"/>
+                  <a:pt x="0" y="173532"/>
+                </a:lnTo>
+                <a:lnTo>
+                  <a:pt x="327723" y="173532"/>
+                </a:lnTo>
+                <a:lnTo>
+                  <a:pt x="327723" y="0"/>
                 </a:lnTo>
                 <a:close/>
               </a:path>
